--- a/ppt/05.C언어-함수.pptx
+++ b/ppt/05.C언어-함수.pptx
@@ -1,6 +1,6 @@
 
 <file path=ppt/presentation.xml><?xml version="1.0" encoding="utf-8"?>
-<p:presentation xmlns:a="http://schemas.openxmlformats.org/drawingml/2006/main" xmlns:r="http://schemas.openxmlformats.org/officeDocument/2006/relationships" xmlns:p="http://schemas.openxmlformats.org/presentationml/2006/main" saveSubsetFonts="1">
+<p:presentation xmlns:a="http://schemas.openxmlformats.org/drawingml/2006/main" xmlns:r="http://schemas.openxmlformats.org/officeDocument/2006/relationships" xmlns:p="http://schemas.openxmlformats.org/presentationml/2006/main" embedTrueTypeFonts="1" saveSubsetFonts="1">
   <p:sldMasterIdLst>
     <p:sldMasterId id="2147483648" r:id="rId1"/>
   </p:sldMasterIdLst>
@@ -40,6 +40,23 @@
   </p:sldIdLst>
   <p:sldSz cx="9144000" cy="6858000" type="screen4x3"/>
   <p:notesSz cx="6858000" cy="9144000"/>
+  <p:embeddedFontLst>
+    <p:embeddedFont>
+      <p:font typeface="HY견고딕" panose="02030600000101010101" pitchFamily="18" charset="-127"/>
+      <p:regular r:id="rId32"/>
+    </p:embeddedFont>
+    <p:embeddedFont>
+      <p:font typeface="가을체" panose="02030600000101010101" pitchFamily="18" charset="-127"/>
+      <p:regular r:id="rId33"/>
+    </p:embeddedFont>
+    <p:embeddedFont>
+      <p:font typeface="Consolas" panose="020B0609020204030204" pitchFamily="49" charset="0"/>
+      <p:regular r:id="rId34"/>
+      <p:bold r:id="rId35"/>
+      <p:italic r:id="rId36"/>
+      <p:boldItalic r:id="rId37"/>
+    </p:embeddedFont>
+  </p:embeddedFontLst>
   <p:defaultTextStyle>
     <a:defPPr>
       <a:defRPr lang="ko-KR"/>

--- a/ppt/05.C언어-함수.pptx
+++ b/ppt/05.C언어-함수.pptx
@@ -42,19 +42,29 @@
   <p:notesSz cx="6858000" cy="9144000"/>
   <p:embeddedFontLst>
     <p:embeddedFont>
+      <p:font typeface="D2Coding" panose="020B0609020101020101" pitchFamily="49" charset="-127"/>
+      <p:regular r:id="rId32"/>
+      <p:bold r:id="rId33"/>
+    </p:embeddedFont>
+    <p:embeddedFont>
+      <p:font typeface="나눔바른고딕" panose="020B0603020101020101" pitchFamily="50" charset="-127"/>
+      <p:regular r:id="rId34"/>
+      <p:bold r:id="rId35"/>
+    </p:embeddedFont>
+    <p:embeddedFont>
+      <p:font typeface="Consolas" panose="020B0609020204030204" pitchFamily="49" charset="0"/>
+      <p:regular r:id="rId36"/>
+      <p:bold r:id="rId37"/>
+      <p:italic r:id="rId38"/>
+      <p:boldItalic r:id="rId39"/>
+    </p:embeddedFont>
+    <p:embeddedFont>
       <p:font typeface="HY견고딕" panose="02030600000101010101" pitchFamily="18" charset="-127"/>
-      <p:regular r:id="rId32"/>
+      <p:regular r:id="rId40"/>
     </p:embeddedFont>
     <p:embeddedFont>
       <p:font typeface="가을체" panose="02030600000101010101" pitchFamily="18" charset="-127"/>
-      <p:regular r:id="rId33"/>
-    </p:embeddedFont>
-    <p:embeddedFont>
-      <p:font typeface="Consolas" panose="020B0609020204030204" pitchFamily="49" charset="0"/>
-      <p:regular r:id="rId34"/>
-      <p:bold r:id="rId35"/>
-      <p:italic r:id="rId36"/>
-      <p:boldItalic r:id="rId37"/>
+      <p:regular r:id="rId41"/>
     </p:embeddedFont>
   </p:embeddedFontLst>
   <p:defaultTextStyle>
@@ -1470,9 +1480,11 @@
           <a:bodyPr/>
           <a:lstStyle>
             <a:lvl1pPr>
+              <a:buSzPct val="80000"/>
               <a:defRPr b="1"/>
             </a:lvl1pPr>
             <a:lvl2pPr>
+              <a:buSzPct val="60000"/>
               <a:defRPr b="1"/>
             </a:lvl2pPr>
             <a:lvl3pPr>
@@ -3960,22 +3972,21 @@
           <a:lstStyle/>
           <a:p>
             <a:r>
-              <a:rPr lang="en-US" altLang="ko-KR" b="0" dirty="0"/>
+              <a:rPr lang="en-US" altLang="ko-KR" dirty="0"/>
               <a:t>5.3 </a:t>
             </a:r>
             <a:r>
-              <a:rPr lang="ko-KR" altLang="en-US" b="0" dirty="0"/>
+              <a:rPr lang="ko-KR" altLang="en-US" dirty="0"/>
               <a:t>매개변수</a:t>
             </a:r>
             <a:r>
-              <a:rPr lang="en-US" altLang="ko-KR" b="0" dirty="0"/>
+              <a:rPr lang="en-US" altLang="ko-KR" dirty="0"/>
               <a:t>/</a:t>
             </a:r>
             <a:r>
-              <a:rPr lang="ko-KR" altLang="en-US" b="0" dirty="0"/>
+              <a:rPr lang="ko-KR" altLang="en-US" dirty="0"/>
               <a:t>인수</a:t>
             </a:r>
-            <a:endParaRPr lang="ko-KR" altLang="en-US" dirty="0"/>
           </a:p>
         </p:txBody>
       </p:sp>
@@ -4224,7 +4235,7 @@
           <a:lstStyle/>
           <a:p>
             <a:r>
-              <a:rPr lang="en-US" altLang="ko-KR" sz="2400" b="0" i="0" u="none" strike="noStrike" dirty="0">
+              <a:rPr lang="en-US" altLang="ko-KR" sz="2400" b="1" i="0" u="none" strike="noStrike" dirty="0">
                 <a:solidFill>
                   <a:srgbClr val="A626A4"/>
                 </a:solidFill>
@@ -4234,7 +4245,7 @@
               <a:t>int</a:t>
             </a:r>
             <a:r>
-              <a:rPr lang="en-US" altLang="ko-KR" sz="2400" b="0" i="0" u="none" strike="noStrike" dirty="0">
+              <a:rPr lang="en-US" altLang="ko-KR" sz="2400" b="1" i="0" u="none" strike="noStrike" dirty="0">
                 <a:solidFill>
                   <a:srgbClr val="383A42"/>
                 </a:solidFill>
@@ -4244,7 +4255,7 @@
               <a:t> </a:t>
             </a:r>
             <a:r>
-              <a:rPr lang="en-US" altLang="ko-KR" sz="2400" b="0" i="0" u="none" strike="noStrike" dirty="0">
+              <a:rPr lang="en-US" altLang="ko-KR" sz="2400" b="1" i="0" u="none" strike="noStrike" dirty="0">
                 <a:solidFill>
                   <a:srgbClr val="4078F2"/>
                 </a:solidFill>
@@ -4254,7 +4265,7 @@
               <a:t>Add</a:t>
             </a:r>
             <a:r>
-              <a:rPr lang="en-US" altLang="ko-KR" sz="2400" b="0" i="0" u="none" strike="noStrike" dirty="0">
+              <a:rPr lang="en-US" altLang="ko-KR" sz="2400" b="1" i="0" u="none" strike="noStrike" dirty="0">
                 <a:solidFill>
                   <a:srgbClr val="383A42"/>
                 </a:solidFill>
@@ -4264,7 +4275,7 @@
               <a:t>(</a:t>
             </a:r>
             <a:r>
-              <a:rPr lang="en-US" altLang="ko-KR" sz="2400" b="0" i="0" u="none" strike="noStrike" dirty="0">
+              <a:rPr lang="en-US" altLang="ko-KR" sz="2400" b="1" i="0" u="none" strike="noStrike" dirty="0">
                 <a:solidFill>
                   <a:srgbClr val="A626A4"/>
                 </a:solidFill>
@@ -4274,7 +4285,7 @@
               <a:t>int</a:t>
             </a:r>
             <a:r>
-              <a:rPr lang="en-US" altLang="ko-KR" sz="2400" b="0" i="0" u="none" strike="noStrike" dirty="0">
+              <a:rPr lang="en-US" altLang="ko-KR" sz="2400" b="1" i="0" u="none" strike="noStrike" dirty="0">
                 <a:solidFill>
                   <a:srgbClr val="383A42"/>
                 </a:solidFill>
@@ -4284,7 +4295,7 @@
               <a:t> a, </a:t>
             </a:r>
             <a:r>
-              <a:rPr lang="en-US" altLang="ko-KR" sz="2400" b="0" i="0" u="none" strike="noStrike" dirty="0">
+              <a:rPr lang="en-US" altLang="ko-KR" sz="2400" b="1" i="0" u="none" strike="noStrike" dirty="0">
                 <a:solidFill>
                   <a:srgbClr val="A626A4"/>
                 </a:solidFill>
@@ -4294,7 +4305,7 @@
               <a:t>int</a:t>
             </a:r>
             <a:r>
-              <a:rPr lang="en-US" altLang="ko-KR" sz="2400" b="0" i="0" u="none" strike="noStrike" dirty="0">
+              <a:rPr lang="en-US" altLang="ko-KR" sz="2400" b="1" i="0" u="none" strike="noStrike" dirty="0">
                 <a:solidFill>
                   <a:srgbClr val="383A42"/>
                 </a:solidFill>
@@ -4304,7 +4315,7 @@
               <a:t> b); </a:t>
             </a:r>
             <a:r>
-              <a:rPr lang="en-US" altLang="ko-KR" sz="2400" i="1" dirty="0">
+              <a:rPr lang="en-US" altLang="ko-KR" sz="2400" b="1" i="1" dirty="0">
                 <a:solidFill>
                   <a:srgbClr val="A0A1A7"/>
                 </a:solidFill>
@@ -4313,7 +4324,7 @@
               <a:t>// a, b : </a:t>
             </a:r>
             <a:r>
-              <a:rPr lang="ko-KR" altLang="en-US" sz="2400" i="1" dirty="0">
+              <a:rPr lang="ko-KR" altLang="en-US" sz="2400" b="1" i="1" dirty="0">
                 <a:solidFill>
                   <a:srgbClr val="A0A1A7"/>
                 </a:solidFill>
@@ -4321,7 +4332,7 @@
               </a:rPr>
               <a:t>매개변수</a:t>
             </a:r>
-            <a:endParaRPr lang="ko-KR" altLang="en-US" dirty="0"/>
+            <a:endParaRPr lang="ko-KR" altLang="en-US" b="1" dirty="0"/>
           </a:p>
         </p:txBody>
       </p:sp>
@@ -4362,7 +4373,7 @@
           <a:lstStyle/>
           <a:p>
             <a:r>
-              <a:rPr lang="pl-PL" altLang="ko-KR" sz="2400" b="0" i="0" u="none" strike="noStrike" dirty="0">
+              <a:rPr lang="pl-PL" altLang="ko-KR" sz="2400" b="1" i="0" u="none" strike="noStrike" dirty="0">
                 <a:solidFill>
                   <a:srgbClr val="A626A4"/>
                 </a:solidFill>
@@ -4372,7 +4383,7 @@
               <a:t>int</a:t>
             </a:r>
             <a:r>
-              <a:rPr lang="pl-PL" altLang="ko-KR" sz="2400" b="0" i="0" u="none" strike="noStrike" dirty="0">
+              <a:rPr lang="pl-PL" altLang="ko-KR" sz="2400" b="1" i="0" u="none" strike="noStrike" dirty="0">
                 <a:solidFill>
                   <a:srgbClr val="383A42"/>
                 </a:solidFill>
@@ -4382,7 +4393,7 @@
               <a:t> z = Add(x, y);</a:t>
             </a:r>
             <a:r>
-              <a:rPr lang="en-US" altLang="ko-KR" dirty="0">
+              <a:rPr lang="en-US" altLang="ko-KR" b="1" dirty="0">
                 <a:solidFill>
                   <a:srgbClr val="383A42"/>
                 </a:solidFill>
@@ -4391,7 +4402,7 @@
               <a:t> </a:t>
             </a:r>
             <a:r>
-              <a:rPr lang="en-US" altLang="ko-KR" i="1" dirty="0">
+              <a:rPr lang="en-US" altLang="ko-KR" b="1" i="1" dirty="0">
                 <a:solidFill>
                   <a:srgbClr val="A0A1A7"/>
                 </a:solidFill>
@@ -4400,7 +4411,7 @@
               <a:t>// x, y : </a:t>
             </a:r>
             <a:r>
-              <a:rPr lang="ko-KR" altLang="en-US" i="1" dirty="0">
+              <a:rPr lang="ko-KR" altLang="en-US" b="1" i="1" dirty="0">
                 <a:solidFill>
                   <a:srgbClr val="A0A1A7"/>
                 </a:solidFill>
@@ -4408,7 +4419,7 @@
               </a:rPr>
               <a:t>인수</a:t>
             </a:r>
-            <a:endParaRPr lang="ko-KR" altLang="en-US" dirty="0"/>
+            <a:endParaRPr lang="ko-KR" altLang="en-US" b="1" dirty="0"/>
           </a:p>
         </p:txBody>
       </p:sp>
@@ -4470,14 +4481,13 @@
           <a:lstStyle/>
           <a:p>
             <a:r>
-              <a:rPr lang="en-US" altLang="ko-KR" b="0" dirty="0"/>
+              <a:rPr lang="en-US" altLang="ko-KR" dirty="0"/>
               <a:t>5.3.3 </a:t>
             </a:r>
             <a:r>
-              <a:rPr lang="ko-KR" altLang="en-US" b="0" dirty="0"/>
+              <a:rPr lang="ko-KR" altLang="en-US" dirty="0"/>
               <a:t>값 전달 방식과 변수의 생명 시간</a:t>
             </a:r>
-            <a:endParaRPr lang="ko-KR" altLang="en-US" dirty="0"/>
           </a:p>
         </p:txBody>
       </p:sp>
@@ -5115,7 +5125,7 @@
           <a:lstStyle/>
           <a:p>
             <a:r>
-              <a:rPr lang="en-US" altLang="ko-KR" sz="2400" b="0" i="0" u="none" strike="noStrike" dirty="0">
+              <a:rPr lang="en-US" altLang="ko-KR" sz="2400" b="1" i="0" u="none" strike="noStrike" dirty="0">
                 <a:solidFill>
                   <a:srgbClr val="A626A4"/>
                 </a:solidFill>
@@ -5125,7 +5135,7 @@
               <a:t>void</a:t>
             </a:r>
             <a:r>
-              <a:rPr lang="en-US" altLang="ko-KR" sz="2400" b="0" i="0" u="none" strike="noStrike" dirty="0">
+              <a:rPr lang="en-US" altLang="ko-KR" sz="2400" b="1" i="0" u="none" strike="noStrike" dirty="0">
                 <a:solidFill>
                   <a:srgbClr val="383A42"/>
                 </a:solidFill>
@@ -5135,7 +5145,7 @@
               <a:t> </a:t>
             </a:r>
             <a:r>
-              <a:rPr lang="en-US" altLang="ko-KR" sz="2400" b="0" i="0" u="none" strike="noStrike" dirty="0" err="1">
+              <a:rPr lang="en-US" altLang="ko-KR" sz="2400" b="1" i="0" u="none" strike="noStrike" dirty="0" err="1">
                 <a:solidFill>
                   <a:srgbClr val="4078F2"/>
                 </a:solidFill>
@@ -5145,7 +5155,7 @@
               <a:t>ShowMessage</a:t>
             </a:r>
             <a:r>
-              <a:rPr lang="en-US" altLang="ko-KR" sz="2400" b="0" i="0" u="none" strike="noStrike" dirty="0">
+              <a:rPr lang="en-US" altLang="ko-KR" sz="2400" b="1" i="0" u="none" strike="noStrike" dirty="0">
                 <a:solidFill>
                   <a:srgbClr val="383A42"/>
                 </a:solidFill>
@@ -5155,7 +5165,7 @@
               <a:t>(</a:t>
             </a:r>
             <a:r>
-              <a:rPr lang="en-US" altLang="ko-KR" sz="2400" b="0" i="0" u="none" strike="noStrike" dirty="0">
+              <a:rPr lang="en-US" altLang="ko-KR" sz="2400" b="1" i="0" u="none" strike="noStrike" dirty="0">
                 <a:solidFill>
                   <a:srgbClr val="A626A4"/>
                 </a:solidFill>
@@ -5165,7 +5175,7 @@
               <a:t>void</a:t>
             </a:r>
             <a:r>
-              <a:rPr lang="en-US" altLang="ko-KR" sz="2400" b="0" i="0" u="none" strike="noStrike" dirty="0">
+              <a:rPr lang="en-US" altLang="ko-KR" sz="2400" b="1" i="0" u="none" strike="noStrike" dirty="0">
                 <a:solidFill>
                   <a:srgbClr val="383A42"/>
                 </a:solidFill>
@@ -5175,7 +5185,7 @@
               <a:t>)</a:t>
             </a:r>
             <a:br>
-              <a:rPr lang="en-US" altLang="ko-KR" sz="2400" b="0" i="0" u="none" strike="noStrike" dirty="0">
+              <a:rPr lang="en-US" altLang="ko-KR" sz="2400" b="1" i="0" u="none" strike="noStrike" dirty="0">
                 <a:solidFill>
                   <a:srgbClr val="383A42"/>
                 </a:solidFill>
@@ -5184,7 +5194,7 @@
               </a:rPr>
             </a:br>
             <a:r>
-              <a:rPr lang="en-US" altLang="ko-KR" sz="2400" b="0" i="0" u="none" strike="noStrike" dirty="0">
+              <a:rPr lang="en-US" altLang="ko-KR" sz="2400" b="1" i="0" u="none" strike="noStrike" dirty="0">
                 <a:solidFill>
                   <a:srgbClr val="383A42"/>
                 </a:solidFill>
@@ -5194,7 +5204,7 @@
               <a:t>{</a:t>
             </a:r>
             <a:br>
-              <a:rPr lang="en-US" altLang="ko-KR" sz="2400" b="0" i="0" u="none" strike="noStrike" dirty="0">
+              <a:rPr lang="en-US" altLang="ko-KR" sz="2400" b="1" i="0" u="none" strike="noStrike" dirty="0">
                 <a:solidFill>
                   <a:srgbClr val="383A42"/>
                 </a:solidFill>
@@ -5203,7 +5213,7 @@
               </a:rPr>
             </a:br>
             <a:r>
-              <a:rPr lang="en-US" altLang="ko-KR" sz="2400" b="0" i="0" u="none" strike="noStrike" dirty="0">
+              <a:rPr lang="en-US" altLang="ko-KR" sz="2400" b="1" i="0" u="none" strike="noStrike" dirty="0">
                 <a:solidFill>
                   <a:srgbClr val="383A42"/>
                 </a:solidFill>
@@ -5213,7 +5223,7 @@
               <a:t>    </a:t>
             </a:r>
             <a:r>
-              <a:rPr lang="en-US" altLang="ko-KR" sz="2400" b="0" i="0" u="none" strike="noStrike" dirty="0">
+              <a:rPr lang="en-US" altLang="ko-KR" sz="2400" b="1" i="0" u="none" strike="noStrike" dirty="0">
                 <a:solidFill>
                   <a:srgbClr val="C18401"/>
                 </a:solidFill>
@@ -5223,7 +5233,7 @@
               <a:t>printf</a:t>
             </a:r>
             <a:r>
-              <a:rPr lang="en-US" altLang="ko-KR" sz="2400" b="0" i="0" u="none" strike="noStrike" dirty="0">
+              <a:rPr lang="en-US" altLang="ko-KR" sz="2400" b="1" i="0" u="none" strike="noStrike" dirty="0">
                 <a:solidFill>
                   <a:srgbClr val="383A42"/>
                 </a:solidFill>
@@ -5233,7 +5243,7 @@
               <a:t>(</a:t>
             </a:r>
             <a:r>
-              <a:rPr lang="en-US" altLang="ko-KR" sz="2400" b="0" i="0" u="none" strike="noStrike" dirty="0">
+              <a:rPr lang="en-US" altLang="ko-KR" sz="2400" b="1" i="0" u="none" strike="noStrike" dirty="0">
                 <a:solidFill>
                   <a:srgbClr val="50A14F"/>
                 </a:solidFill>
@@ -5243,7 +5253,7 @@
               <a:t>"</a:t>
             </a:r>
             <a:r>
-              <a:rPr lang="ko-KR" altLang="en-US" sz="2400" b="0" i="0" u="none" strike="noStrike" dirty="0">
+              <a:rPr lang="ko-KR" altLang="en-US" sz="2400" b="1" i="0" u="none" strike="noStrike" dirty="0">
                 <a:solidFill>
                   <a:srgbClr val="50A14F"/>
                 </a:solidFill>
@@ -5253,7 +5263,7 @@
               <a:t>메시지를 출력합니다</a:t>
             </a:r>
             <a:r>
-              <a:rPr lang="en-US" altLang="ko-KR" sz="2400" b="0" i="0" u="none" strike="noStrike" dirty="0">
+              <a:rPr lang="en-US" altLang="ko-KR" sz="2400" b="1" i="0" u="none" strike="noStrike" dirty="0">
                 <a:solidFill>
                   <a:srgbClr val="50A14F"/>
                 </a:solidFill>
@@ -5263,7 +5273,7 @@
               <a:t>.\n"</a:t>
             </a:r>
             <a:r>
-              <a:rPr lang="en-US" altLang="ko-KR" sz="2400" b="0" i="0" u="none" strike="noStrike" dirty="0">
+              <a:rPr lang="en-US" altLang="ko-KR" sz="2400" b="1" i="0" u="none" strike="noStrike" dirty="0">
                 <a:solidFill>
                   <a:srgbClr val="383A42"/>
                 </a:solidFill>
@@ -5273,7 +5283,7 @@
               <a:t>);</a:t>
             </a:r>
             <a:br>
-              <a:rPr lang="en-US" altLang="ko-KR" sz="2400" b="0" i="0" u="none" strike="noStrike" dirty="0">
+              <a:rPr lang="en-US" altLang="ko-KR" sz="2400" b="1" i="0" u="none" strike="noStrike" dirty="0">
                 <a:solidFill>
                   <a:srgbClr val="383A42"/>
                 </a:solidFill>
@@ -5282,7 +5292,7 @@
               </a:rPr>
             </a:br>
             <a:r>
-              <a:rPr lang="en-US" altLang="ko-KR" sz="2400" b="0" i="0" u="none" strike="noStrike" dirty="0">
+              <a:rPr lang="en-US" altLang="ko-KR" sz="2400" b="1" i="0" u="none" strike="noStrike" dirty="0">
                 <a:solidFill>
                   <a:srgbClr val="383A42"/>
                 </a:solidFill>
@@ -5291,7 +5301,7 @@
               </a:rPr>
               <a:t>}</a:t>
             </a:r>
-            <a:endParaRPr lang="ko-KR" altLang="en-US" dirty="0"/>
+            <a:endParaRPr lang="ko-KR" altLang="en-US" b="1" dirty="0"/>
           </a:p>
         </p:txBody>
       </p:sp>
@@ -5347,16 +5357,16 @@
           <a:lstStyle/>
           <a:p>
             <a:r>
-              <a:rPr lang="en-US" altLang="ko-KR" b="0" dirty="0"/>
+              <a:rPr lang="en-US" altLang="ko-KR" dirty="0"/>
               <a:t>5.5 </a:t>
             </a:r>
             <a:r>
-              <a:rPr lang="ko-KR" altLang="en-US" b="0" dirty="0"/>
+              <a:rPr lang="ko-KR" altLang="en-US" dirty="0"/>
               <a:t>랜덤 함수 </a:t>
             </a:r>
             <a:r>
-              <a:rPr lang="en-US" altLang="ko-KR" b="0" dirty="0"/>
-              <a:t>(rand())</a:t>
+              <a:rPr lang="en-US" altLang="ko-KR" dirty="0"/>
+              <a:t>rand()</a:t>
             </a:r>
             <a:endParaRPr lang="ko-KR" altLang="en-US" dirty="0"/>
           </a:p>
@@ -5675,16 +5685,16 @@
           <a:lstStyle/>
           <a:p>
             <a:r>
-              <a:rPr lang="en-US" altLang="ko-KR" b="0" dirty="0"/>
+              <a:rPr lang="en-US" altLang="ko-KR" dirty="0"/>
               <a:t>5.5 </a:t>
             </a:r>
             <a:r>
-              <a:rPr lang="ko-KR" altLang="en-US" b="0" dirty="0"/>
+              <a:rPr lang="ko-KR" altLang="en-US" dirty="0"/>
               <a:t>랜덤 함수 </a:t>
             </a:r>
             <a:r>
-              <a:rPr lang="en-US" altLang="ko-KR" b="0" dirty="0"/>
-              <a:t>(rand())</a:t>
+              <a:rPr lang="en-US" altLang="ko-KR" dirty="0"/>
+              <a:t>srand()</a:t>
             </a:r>
             <a:endParaRPr lang="ko-KR" altLang="en-US" dirty="0"/>
           </a:p>
@@ -5938,16 +5948,16 @@
           <a:lstStyle/>
           <a:p>
             <a:r>
-              <a:rPr lang="en-US" altLang="ko-KR" b="0" dirty="0"/>
+              <a:rPr lang="en-US" altLang="ko-KR" dirty="0"/>
               <a:t>5.6 </a:t>
             </a:r>
             <a:r>
-              <a:rPr lang="ko-KR" altLang="en-US" b="0" dirty="0"/>
+              <a:rPr lang="ko-KR" altLang="en-US" dirty="0"/>
               <a:t>타임 함수 </a:t>
             </a:r>
             <a:r>
-              <a:rPr lang="en-US" altLang="ko-KR" b="0" dirty="0"/>
-              <a:t>(time())</a:t>
+              <a:rPr lang="en-US" altLang="ko-KR" dirty="0"/>
+              <a:t>time()</a:t>
             </a:r>
             <a:endParaRPr lang="ko-KR" altLang="en-US" dirty="0"/>
           </a:p>
@@ -6193,7 +6203,7 @@
           <a:lstStyle/>
           <a:p>
             <a:r>
-              <a:rPr lang="en-US" altLang="ko-KR" sz="2000" b="0" i="0" u="none" strike="noStrike" dirty="0">
+              <a:rPr lang="en-US" altLang="ko-KR" sz="2000" b="1" i="0" u="none" strike="noStrike" dirty="0">
                 <a:solidFill>
                   <a:srgbClr val="A626A4"/>
                 </a:solidFill>
@@ -6203,7 +6213,7 @@
               <a:t>int</a:t>
             </a:r>
             <a:r>
-              <a:rPr lang="en-US" altLang="ko-KR" sz="2000" b="0" i="0" u="none" strike="noStrike" dirty="0">
+              <a:rPr lang="en-US" altLang="ko-KR" sz="2000" b="1" i="0" u="none" strike="noStrike" dirty="0">
                 <a:solidFill>
                   <a:srgbClr val="383A42"/>
                 </a:solidFill>
@@ -6213,7 +6223,7 @@
               <a:t> </a:t>
             </a:r>
             <a:r>
-              <a:rPr lang="en-US" altLang="ko-KR" sz="2000" b="0" i="0" u="none" strike="noStrike" dirty="0">
+              <a:rPr lang="en-US" altLang="ko-KR" sz="2000" b="1" i="0" u="none" strike="noStrike" dirty="0">
                 <a:solidFill>
                   <a:srgbClr val="4078F2"/>
                 </a:solidFill>
@@ -6223,7 +6233,7 @@
               <a:t>GetRandom</a:t>
             </a:r>
             <a:r>
-              <a:rPr lang="en-US" altLang="ko-KR" sz="2000" b="0" i="0" u="none" strike="noStrike" dirty="0">
+              <a:rPr lang="en-US" altLang="ko-KR" sz="2000" b="1" i="0" u="none" strike="noStrike" dirty="0">
                 <a:solidFill>
                   <a:srgbClr val="383A42"/>
                 </a:solidFill>
@@ -6233,7 +6243,7 @@
               <a:t>(</a:t>
             </a:r>
             <a:r>
-              <a:rPr lang="en-US" altLang="ko-KR" sz="2000" b="0" i="0" u="none" strike="noStrike" dirty="0">
+              <a:rPr lang="en-US" altLang="ko-KR" sz="2000" b="1" i="0" u="none" strike="noStrike" dirty="0">
                 <a:solidFill>
                   <a:srgbClr val="A626A4"/>
                 </a:solidFill>
@@ -6243,7 +6253,7 @@
               <a:t>int</a:t>
             </a:r>
             <a:r>
-              <a:rPr lang="en-US" altLang="ko-KR" sz="2000" b="0" i="0" u="none" strike="noStrike" dirty="0">
+              <a:rPr lang="en-US" altLang="ko-KR" sz="2000" b="1" i="0" u="none" strike="noStrike" dirty="0">
                 <a:solidFill>
                   <a:srgbClr val="383A42"/>
                 </a:solidFill>
@@ -6253,7 +6263,7 @@
               <a:t> minVal, </a:t>
             </a:r>
             <a:r>
-              <a:rPr lang="en-US" altLang="ko-KR" sz="2000" b="0" i="0" u="none" strike="noStrike" dirty="0">
+              <a:rPr lang="en-US" altLang="ko-KR" sz="2000" b="1" i="0" u="none" strike="noStrike" dirty="0">
                 <a:solidFill>
                   <a:srgbClr val="A626A4"/>
                 </a:solidFill>
@@ -6263,7 +6273,7 @@
               <a:t>int</a:t>
             </a:r>
             <a:r>
-              <a:rPr lang="en-US" altLang="ko-KR" sz="2000" b="0" i="0" u="none" strike="noStrike" dirty="0">
+              <a:rPr lang="en-US" altLang="ko-KR" sz="2000" b="1" i="0" u="none" strike="noStrike" dirty="0">
                 <a:solidFill>
                   <a:srgbClr val="383A42"/>
                 </a:solidFill>
@@ -6273,7 +6283,7 @@
               <a:t> maxVal)</a:t>
             </a:r>
             <a:br>
-              <a:rPr lang="en-US" altLang="ko-KR" sz="2000" b="0" i="0" u="none" strike="noStrike" dirty="0">
+              <a:rPr lang="en-US" altLang="ko-KR" sz="2000" b="1" i="0" u="none" strike="noStrike" dirty="0">
                 <a:solidFill>
                   <a:srgbClr val="383A42"/>
                 </a:solidFill>
@@ -6282,7 +6292,7 @@
               </a:rPr>
             </a:br>
             <a:r>
-              <a:rPr lang="en-US" altLang="ko-KR" sz="2000" b="0" i="0" u="none" strike="noStrike" dirty="0">
+              <a:rPr lang="en-US" altLang="ko-KR" sz="2000" b="1" i="0" u="none" strike="noStrike" dirty="0">
                 <a:solidFill>
                   <a:srgbClr val="383A42"/>
                 </a:solidFill>
@@ -6292,7 +6302,7 @@
               <a:t>{</a:t>
             </a:r>
             <a:br>
-              <a:rPr lang="en-US" altLang="ko-KR" sz="2000" b="0" i="0" u="none" strike="noStrike" dirty="0">
+              <a:rPr lang="en-US" altLang="ko-KR" sz="2000" b="1" i="0" u="none" strike="noStrike" dirty="0">
                 <a:solidFill>
                   <a:srgbClr val="383A42"/>
                 </a:solidFill>
@@ -6301,7 +6311,7 @@
               </a:rPr>
             </a:br>
             <a:r>
-              <a:rPr lang="en-US" altLang="ko-KR" sz="2000" b="0" i="0" u="none" strike="noStrike" dirty="0">
+              <a:rPr lang="en-US" altLang="ko-KR" sz="2000" b="1" i="0" u="none" strike="noStrike" dirty="0">
                 <a:solidFill>
                   <a:srgbClr val="383A42"/>
                 </a:solidFill>
@@ -6311,7 +6321,7 @@
               <a:t>    </a:t>
             </a:r>
             <a:r>
-              <a:rPr lang="en-US" altLang="ko-KR" sz="2000" b="0" i="0" u="none" strike="noStrike" dirty="0">
+              <a:rPr lang="en-US" altLang="ko-KR" sz="2000" b="1" i="0" u="none" strike="noStrike" dirty="0">
                 <a:solidFill>
                   <a:srgbClr val="A626A4"/>
                 </a:solidFill>
@@ -6321,7 +6331,7 @@
               <a:t>return</a:t>
             </a:r>
             <a:r>
-              <a:rPr lang="en-US" altLang="ko-KR" sz="2000" b="0" i="0" u="none" strike="noStrike" dirty="0">
+              <a:rPr lang="en-US" altLang="ko-KR" sz="2000" b="1" i="0" u="none" strike="noStrike" dirty="0">
                 <a:solidFill>
                   <a:srgbClr val="383A42"/>
                 </a:solidFill>
@@ -6331,7 +6341,7 @@
               <a:t> minVal + rand() % (maxVal - minVal + </a:t>
             </a:r>
             <a:r>
-              <a:rPr lang="en-US" altLang="ko-KR" sz="2000" b="0" i="0" u="none" strike="noStrike" dirty="0">
+              <a:rPr lang="en-US" altLang="ko-KR" sz="2000" b="1" i="0" u="none" strike="noStrike" dirty="0">
                 <a:solidFill>
                   <a:srgbClr val="986801"/>
                 </a:solidFill>
@@ -6341,7 +6351,7 @@
               <a:t>1</a:t>
             </a:r>
             <a:r>
-              <a:rPr lang="en-US" altLang="ko-KR" sz="2000" b="0" i="0" u="none" strike="noStrike" dirty="0">
+              <a:rPr lang="en-US" altLang="ko-KR" sz="2000" b="1" i="0" u="none" strike="noStrike" dirty="0">
                 <a:solidFill>
                   <a:srgbClr val="383A42"/>
                 </a:solidFill>
@@ -6351,7 +6361,7 @@
               <a:t>);</a:t>
             </a:r>
             <a:br>
-              <a:rPr lang="en-US" altLang="ko-KR" sz="2000" b="0" i="0" u="none" strike="noStrike" dirty="0">
+              <a:rPr lang="en-US" altLang="ko-KR" sz="2000" b="1" i="0" u="none" strike="noStrike" dirty="0">
                 <a:solidFill>
                   <a:srgbClr val="383A42"/>
                 </a:solidFill>
@@ -6360,7 +6370,7 @@
               </a:rPr>
             </a:br>
             <a:r>
-              <a:rPr lang="en-US" altLang="ko-KR" sz="2000" b="0" i="0" u="none" strike="noStrike" dirty="0">
+              <a:rPr lang="en-US" altLang="ko-KR" sz="2000" b="1" i="0" u="none" strike="noStrike" dirty="0">
                 <a:solidFill>
                   <a:srgbClr val="383A42"/>
                 </a:solidFill>
@@ -6369,7 +6379,7 @@
               </a:rPr>
               <a:t>}</a:t>
             </a:r>
-            <a:endParaRPr lang="ko-KR" altLang="en-US" sz="2000" dirty="0"/>
+            <a:endParaRPr lang="ko-KR" altLang="en-US" sz="2000" b="1" dirty="0"/>
           </a:p>
         </p:txBody>
       </p:sp>
@@ -6775,7 +6785,7 @@
         </p:nvSpPr>
         <p:spPr>
           <a:xfrm>
-            <a:off x="5687367" y="2867818"/>
+            <a:off x="4139952" y="2472531"/>
             <a:ext cx="3456633" cy="3693319"/>
           </a:xfrm>
           <a:prstGeom prst="rect">
@@ -6784,6 +6794,13 @@
           <a:solidFill>
             <a:srgbClr val="FFFFCC"/>
           </a:solidFill>
+          <a:ln w="38100">
+            <a:solidFill>
+              <a:schemeClr val="bg1">
+                <a:lumMod val="75000"/>
+              </a:schemeClr>
+            </a:solidFill>
+          </a:ln>
         </p:spPr>
         <p:txBody>
           <a:bodyPr wrap="square">
@@ -6797,9 +6814,10 @@
                   <a:srgbClr val="383A42"/>
                 </a:solidFill>
                 <a:effectLst/>
-                <a:latin typeface="Consolas" panose="020B0609020204030204" pitchFamily="49" charset="0"/>
-              </a:rPr>
-              <a:t>┌───────────────────────┐</a:t>
+                <a:latin typeface="D2Coding" panose="020B0609020101020101" pitchFamily="49" charset="-127"/>
+                <a:ea typeface="D2Coding" panose="020B0609020101020101" pitchFamily="49" charset="-127"/>
+              </a:rPr>
+              <a:t> ┌───────────────────────┐</a:t>
             </a:r>
             <a:br>
               <a:rPr lang="en-US" altLang="ko-KR" sz="1800" b="0" i="0" u="none" strike="noStrike" dirty="0">
@@ -6807,7 +6825,8 @@
                   <a:srgbClr val="383A42"/>
                 </a:solidFill>
                 <a:effectLst/>
-                <a:latin typeface="Consolas" panose="020B0609020204030204" pitchFamily="49" charset="0"/>
+                <a:latin typeface="D2Coding" panose="020B0609020101020101" pitchFamily="49" charset="-127"/>
+                <a:ea typeface="D2Coding" panose="020B0609020101020101" pitchFamily="49" charset="-127"/>
               </a:rPr>
             </a:br>
             <a:r>
@@ -6816,9 +6835,54 @@
                   <a:srgbClr val="383A42"/>
                 </a:solidFill>
                 <a:effectLst/>
-                <a:latin typeface="Consolas" panose="020B0609020204030204" pitchFamily="49" charset="0"/>
-              </a:rPr>
-              <a:t>│ Code / Text Segment   │</a:t>
+                <a:latin typeface="D2Coding" panose="020B0609020101020101" pitchFamily="49" charset="-127"/>
+                <a:ea typeface="D2Coding" panose="020B0609020101020101" pitchFamily="49" charset="-127"/>
+              </a:rPr>
+              <a:t> │ </a:t>
+            </a:r>
+            <a:r>
+              <a:rPr lang="en-US" altLang="ko-KR" sz="1800" b="0" i="0" u="none" strike="noStrike" dirty="0">
+                <a:solidFill>
+                  <a:srgbClr val="0000FF"/>
+                </a:solidFill>
+                <a:effectLst/>
+                <a:latin typeface="D2Coding" panose="020B0609020101020101" pitchFamily="49" charset="-127"/>
+                <a:ea typeface="D2Coding" panose="020B0609020101020101" pitchFamily="49" charset="-127"/>
+              </a:rPr>
+              <a:t>Code</a:t>
+            </a:r>
+            <a:r>
+              <a:rPr lang="en-US" altLang="ko-KR" sz="1800" b="0" i="0" u="none" strike="noStrike" dirty="0">
+                <a:solidFill>
+                  <a:srgbClr val="383A42"/>
+                </a:solidFill>
+                <a:effectLst/>
+                <a:latin typeface="D2Coding" panose="020B0609020101020101" pitchFamily="49" charset="-127"/>
+                <a:ea typeface="D2Coding" panose="020B0609020101020101" pitchFamily="49" charset="-127"/>
+              </a:rPr>
+              <a:t> / </a:t>
+            </a:r>
+            <a:r>
+              <a:rPr lang="en-US" altLang="ko-KR" sz="1800" b="0" i="0" u="none" strike="noStrike" dirty="0">
+                <a:solidFill>
+                  <a:srgbClr val="0000FF"/>
+                </a:solidFill>
+                <a:effectLst/>
+                <a:latin typeface="D2Coding" panose="020B0609020101020101" pitchFamily="49" charset="-127"/>
+                <a:ea typeface="D2Coding" panose="020B0609020101020101" pitchFamily="49" charset="-127"/>
+              </a:rPr>
+              <a:t>Text</a:t>
+            </a:r>
+            <a:r>
+              <a:rPr lang="en-US" altLang="ko-KR" sz="1800" b="0" i="0" u="none" strike="noStrike" dirty="0">
+                <a:solidFill>
+                  <a:srgbClr val="383A42"/>
+                </a:solidFill>
+                <a:effectLst/>
+                <a:latin typeface="D2Coding" panose="020B0609020101020101" pitchFamily="49" charset="-127"/>
+                <a:ea typeface="D2Coding" panose="020B0609020101020101" pitchFamily="49" charset="-127"/>
+              </a:rPr>
+              <a:t> Segment   │</a:t>
             </a:r>
             <a:br>
               <a:rPr lang="en-US" altLang="ko-KR" sz="1800" b="0" i="0" u="none" strike="noStrike" dirty="0">
@@ -6826,7 +6890,8 @@
                   <a:srgbClr val="383A42"/>
                 </a:solidFill>
                 <a:effectLst/>
-                <a:latin typeface="Consolas" panose="020B0609020204030204" pitchFamily="49" charset="0"/>
+                <a:latin typeface="D2Coding" panose="020B0609020101020101" pitchFamily="49" charset="-127"/>
+                <a:ea typeface="D2Coding" panose="020B0609020101020101" pitchFamily="49" charset="-127"/>
               </a:rPr>
             </a:br>
             <a:r>
@@ -6835,9 +6900,10 @@
                   <a:srgbClr val="383A42"/>
                 </a:solidFill>
                 <a:effectLst/>
-                <a:latin typeface="Consolas" panose="020B0609020204030204" pitchFamily="49" charset="0"/>
-              </a:rPr>
-              <a:t>├───────────────────────┤</a:t>
+                <a:latin typeface="D2Coding" panose="020B0609020101020101" pitchFamily="49" charset="-127"/>
+                <a:ea typeface="D2Coding" panose="020B0609020101020101" pitchFamily="49" charset="-127"/>
+              </a:rPr>
+              <a:t> ├───────────────────────┤</a:t>
             </a:r>
             <a:br>
               <a:rPr lang="en-US" altLang="ko-KR" sz="1800" b="0" i="0" u="none" strike="noStrike" dirty="0">
@@ -6845,7 +6911,8 @@
                   <a:srgbClr val="383A42"/>
                 </a:solidFill>
                 <a:effectLst/>
-                <a:latin typeface="Consolas" panose="020B0609020204030204" pitchFamily="49" charset="0"/>
+                <a:latin typeface="D2Coding" panose="020B0609020101020101" pitchFamily="49" charset="-127"/>
+                <a:ea typeface="D2Coding" panose="020B0609020101020101" pitchFamily="49" charset="-127"/>
               </a:rPr>
             </a:br>
             <a:r>
@@ -6854,9 +6921,54 @@
                   <a:srgbClr val="383A42"/>
                 </a:solidFill>
                 <a:effectLst/>
-                <a:latin typeface="Consolas" panose="020B0609020204030204" pitchFamily="49" charset="0"/>
-              </a:rPr>
-              <a:t>│ Global / Static Data  │</a:t>
+                <a:latin typeface="D2Coding" panose="020B0609020101020101" pitchFamily="49" charset="-127"/>
+                <a:ea typeface="D2Coding" panose="020B0609020101020101" pitchFamily="49" charset="-127"/>
+              </a:rPr>
+              <a:t> │ </a:t>
+            </a:r>
+            <a:r>
+              <a:rPr lang="en-US" altLang="ko-KR" sz="1800" b="0" i="0" u="none" strike="noStrike" dirty="0">
+                <a:solidFill>
+                  <a:srgbClr val="0000FF"/>
+                </a:solidFill>
+                <a:effectLst/>
+                <a:latin typeface="D2Coding" panose="020B0609020101020101" pitchFamily="49" charset="-127"/>
+                <a:ea typeface="D2Coding" panose="020B0609020101020101" pitchFamily="49" charset="-127"/>
+              </a:rPr>
+              <a:t>Global</a:t>
+            </a:r>
+            <a:r>
+              <a:rPr lang="en-US" altLang="ko-KR" sz="1800" b="0" i="0" u="none" strike="noStrike" dirty="0">
+                <a:solidFill>
+                  <a:srgbClr val="383A42"/>
+                </a:solidFill>
+                <a:effectLst/>
+                <a:latin typeface="D2Coding" panose="020B0609020101020101" pitchFamily="49" charset="-127"/>
+                <a:ea typeface="D2Coding" panose="020B0609020101020101" pitchFamily="49" charset="-127"/>
+              </a:rPr>
+              <a:t> / </a:t>
+            </a:r>
+            <a:r>
+              <a:rPr lang="en-US" altLang="ko-KR" sz="1800" b="0" i="0" u="none" strike="noStrike" dirty="0">
+                <a:solidFill>
+                  <a:srgbClr val="0000FF"/>
+                </a:solidFill>
+                <a:effectLst/>
+                <a:latin typeface="D2Coding" panose="020B0609020101020101" pitchFamily="49" charset="-127"/>
+                <a:ea typeface="D2Coding" panose="020B0609020101020101" pitchFamily="49" charset="-127"/>
+              </a:rPr>
+              <a:t>Static</a:t>
+            </a:r>
+            <a:r>
+              <a:rPr lang="en-US" altLang="ko-KR" sz="1800" b="0" i="0" u="none" strike="noStrike" dirty="0">
+                <a:solidFill>
+                  <a:srgbClr val="383A42"/>
+                </a:solidFill>
+                <a:effectLst/>
+                <a:latin typeface="D2Coding" panose="020B0609020101020101" pitchFamily="49" charset="-127"/>
+                <a:ea typeface="D2Coding" panose="020B0609020101020101" pitchFamily="49" charset="-127"/>
+              </a:rPr>
+              <a:t> Data  │</a:t>
             </a:r>
             <a:br>
               <a:rPr lang="en-US" altLang="ko-KR" sz="1800" b="0" i="0" u="none" strike="noStrike" dirty="0">
@@ -6864,7 +6976,8 @@
                   <a:srgbClr val="383A42"/>
                 </a:solidFill>
                 <a:effectLst/>
-                <a:latin typeface="Consolas" panose="020B0609020204030204" pitchFamily="49" charset="0"/>
+                <a:latin typeface="D2Coding" panose="020B0609020101020101" pitchFamily="49" charset="-127"/>
+                <a:ea typeface="D2Coding" panose="020B0609020101020101" pitchFamily="49" charset="-127"/>
               </a:rPr>
             </a:br>
             <a:r>
@@ -6873,9 +6986,10 @@
                   <a:srgbClr val="383A42"/>
                 </a:solidFill>
                 <a:effectLst/>
-                <a:latin typeface="Consolas" panose="020B0609020204030204" pitchFamily="49" charset="0"/>
-              </a:rPr>
-              <a:t>│ (.data / .bss)        │</a:t>
+                <a:latin typeface="D2Coding" panose="020B0609020101020101" pitchFamily="49" charset="-127"/>
+                <a:ea typeface="D2Coding" panose="020B0609020101020101" pitchFamily="49" charset="-127"/>
+              </a:rPr>
+              <a:t> │  (.data / .bss)       │</a:t>
             </a:r>
             <a:br>
               <a:rPr lang="en-US" altLang="ko-KR" sz="1800" b="0" i="0" u="none" strike="noStrike" dirty="0">
@@ -6883,7 +6997,8 @@
                   <a:srgbClr val="383A42"/>
                 </a:solidFill>
                 <a:effectLst/>
-                <a:latin typeface="Consolas" panose="020B0609020204030204" pitchFamily="49" charset="0"/>
+                <a:latin typeface="D2Coding" panose="020B0609020101020101" pitchFamily="49" charset="-127"/>
+                <a:ea typeface="D2Coding" panose="020B0609020101020101" pitchFamily="49" charset="-127"/>
               </a:rPr>
             </a:br>
             <a:r>
@@ -6892,9 +7007,10 @@
                   <a:srgbClr val="383A42"/>
                 </a:solidFill>
                 <a:effectLst/>
-                <a:latin typeface="Consolas" panose="020B0609020204030204" pitchFamily="49" charset="0"/>
-              </a:rPr>
-              <a:t>├───────────────────────┤</a:t>
+                <a:latin typeface="D2Coding" panose="020B0609020101020101" pitchFamily="49" charset="-127"/>
+                <a:ea typeface="D2Coding" panose="020B0609020101020101" pitchFamily="49" charset="-127"/>
+              </a:rPr>
+              <a:t> ├───────────────────────┤</a:t>
             </a:r>
             <a:br>
               <a:rPr lang="en-US" altLang="ko-KR" sz="1800" b="0" i="0" u="none" strike="noStrike" dirty="0">
@@ -6902,7 +7018,8 @@
                   <a:srgbClr val="383A42"/>
                 </a:solidFill>
                 <a:effectLst/>
-                <a:latin typeface="Consolas" panose="020B0609020204030204" pitchFamily="49" charset="0"/>
+                <a:latin typeface="D2Coding" panose="020B0609020101020101" pitchFamily="49" charset="-127"/>
+                <a:ea typeface="D2Coding" panose="020B0609020101020101" pitchFamily="49" charset="-127"/>
               </a:rPr>
             </a:br>
             <a:r>
@@ -6911,17 +7028,41 @@
                   <a:srgbClr val="383A42"/>
                 </a:solidFill>
                 <a:effectLst/>
-                <a:latin typeface="Consolas" panose="020B0609020204030204" pitchFamily="49" charset="0"/>
-              </a:rPr>
-              <a:t>│   Heap (</a:t>
+                <a:latin typeface="D2Coding" panose="020B0609020101020101" pitchFamily="49" charset="-127"/>
+                <a:ea typeface="D2Coding" panose="020B0609020101020101" pitchFamily="49" charset="-127"/>
+              </a:rPr>
+              <a:t> │    </a:t>
             </a:r>
             <a:r>
               <a:rPr lang="en-US" altLang="ko-KR" sz="1800" b="0" i="0" u="none" strike="noStrike" dirty="0">
                 <a:solidFill>
+                  <a:srgbClr val="0000FF"/>
+                </a:solidFill>
+                <a:effectLst/>
+                <a:latin typeface="D2Coding" panose="020B0609020101020101" pitchFamily="49" charset="-127"/>
+                <a:ea typeface="D2Coding" panose="020B0609020101020101" pitchFamily="49" charset="-127"/>
+              </a:rPr>
+              <a:t>Heap</a:t>
+            </a:r>
+            <a:r>
+              <a:rPr lang="en-US" altLang="ko-KR" sz="1800" b="0" i="0" u="none" strike="noStrike" dirty="0">
+                <a:solidFill>
+                  <a:srgbClr val="383A42"/>
+                </a:solidFill>
+                <a:effectLst/>
+                <a:latin typeface="D2Coding" panose="020B0609020101020101" pitchFamily="49" charset="-127"/>
+                <a:ea typeface="D2Coding" panose="020B0609020101020101" pitchFamily="49" charset="-127"/>
+              </a:rPr>
+              <a:t> (</a:t>
+            </a:r>
+            <a:r>
+              <a:rPr lang="en-US" altLang="ko-KR" sz="1800" b="0" i="0" u="none" strike="noStrike" dirty="0">
+                <a:solidFill>
                   <a:srgbClr val="C18401"/>
                 </a:solidFill>
                 <a:effectLst/>
-                <a:latin typeface="Consolas" panose="020B0609020204030204" pitchFamily="49" charset="0"/>
+                <a:latin typeface="D2Coding" panose="020B0609020101020101" pitchFamily="49" charset="-127"/>
+                <a:ea typeface="D2Coding" panose="020B0609020101020101" pitchFamily="49" charset="-127"/>
               </a:rPr>
               <a:t>malloc</a:t>
             </a:r>
@@ -6931,9 +7072,10 @@
                   <a:srgbClr val="383A42"/>
                 </a:solidFill>
                 <a:effectLst/>
-                <a:latin typeface="Consolas" panose="020B0609020204030204" pitchFamily="49" charset="0"/>
-              </a:rPr>
-              <a:t>)       │</a:t>
+                <a:latin typeface="D2Coding" panose="020B0609020101020101" pitchFamily="49" charset="-127"/>
+                <a:ea typeface="D2Coding" panose="020B0609020101020101" pitchFamily="49" charset="-127"/>
+              </a:rPr>
+              <a:t>)      │</a:t>
             </a:r>
             <a:br>
               <a:rPr lang="en-US" altLang="ko-KR" sz="1800" b="0" i="0" u="none" strike="noStrike" dirty="0">
@@ -6941,7 +7083,8 @@
                   <a:srgbClr val="383A42"/>
                 </a:solidFill>
                 <a:effectLst/>
-                <a:latin typeface="Consolas" panose="020B0609020204030204" pitchFamily="49" charset="0"/>
+                <a:latin typeface="D2Coding" panose="020B0609020101020101" pitchFamily="49" charset="-127"/>
+                <a:ea typeface="D2Coding" panose="020B0609020101020101" pitchFamily="49" charset="-127"/>
               </a:rPr>
             </a:br>
             <a:r>
@@ -6950,9 +7093,10 @@
                   <a:srgbClr val="383A42"/>
                 </a:solidFill>
                 <a:effectLst/>
-                <a:latin typeface="Consolas" panose="020B0609020204030204" pitchFamily="49" charset="0"/>
-              </a:rPr>
-              <a:t>│         ↑             │</a:t>
+                <a:latin typeface="D2Coding" panose="020B0609020101020101" pitchFamily="49" charset="-127"/>
+                <a:ea typeface="D2Coding" panose="020B0609020101020101" pitchFamily="49" charset="-127"/>
+              </a:rPr>
+              <a:t> │          ↑            │</a:t>
             </a:r>
             <a:br>
               <a:rPr lang="en-US" altLang="ko-KR" sz="1800" b="0" i="0" u="none" strike="noStrike" dirty="0">
@@ -6960,7 +7104,8 @@
                   <a:srgbClr val="383A42"/>
                 </a:solidFill>
                 <a:effectLst/>
-                <a:latin typeface="Consolas" panose="020B0609020204030204" pitchFamily="49" charset="0"/>
+                <a:latin typeface="D2Coding" panose="020B0609020101020101" pitchFamily="49" charset="-127"/>
+                <a:ea typeface="D2Coding" panose="020B0609020101020101" pitchFamily="49" charset="-127"/>
               </a:rPr>
             </a:br>
             <a:r>
@@ -6969,9 +7114,10 @@
                   <a:srgbClr val="383A42"/>
                 </a:solidFill>
                 <a:effectLst/>
-                <a:latin typeface="Consolas" panose="020B0609020204030204" pitchFamily="49" charset="0"/>
-              </a:rPr>
-              <a:t>│         │             │</a:t>
+                <a:latin typeface="D2Coding" panose="020B0609020101020101" pitchFamily="49" charset="-127"/>
+                <a:ea typeface="D2Coding" panose="020B0609020101020101" pitchFamily="49" charset="-127"/>
+              </a:rPr>
+              <a:t> │          │            │</a:t>
             </a:r>
             <a:br>
               <a:rPr lang="en-US" altLang="ko-KR" sz="1800" b="0" i="0" u="none" strike="noStrike" dirty="0">
@@ -6979,7 +7125,8 @@
                   <a:srgbClr val="383A42"/>
                 </a:solidFill>
                 <a:effectLst/>
-                <a:latin typeface="Consolas" panose="020B0609020204030204" pitchFamily="49" charset="0"/>
+                <a:latin typeface="D2Coding" panose="020B0609020101020101" pitchFamily="49" charset="-127"/>
+                <a:ea typeface="D2Coding" panose="020B0609020101020101" pitchFamily="49" charset="-127"/>
               </a:rPr>
             </a:br>
             <a:r>
@@ -6988,9 +7135,10 @@
                   <a:srgbClr val="383A42"/>
                 </a:solidFill>
                 <a:effectLst/>
-                <a:latin typeface="Consolas" panose="020B0609020204030204" pitchFamily="49" charset="0"/>
-              </a:rPr>
-              <a:t>│         │             │</a:t>
+                <a:latin typeface="D2Coding" panose="020B0609020101020101" pitchFamily="49" charset="-127"/>
+                <a:ea typeface="D2Coding" panose="020B0609020101020101" pitchFamily="49" charset="-127"/>
+              </a:rPr>
+              <a:t> │          │            │</a:t>
             </a:r>
             <a:br>
               <a:rPr lang="en-US" altLang="ko-KR" sz="1800" b="0" i="0" u="none" strike="noStrike" dirty="0">
@@ -6998,7 +7146,8 @@
                   <a:srgbClr val="383A42"/>
                 </a:solidFill>
                 <a:effectLst/>
-                <a:latin typeface="Consolas" panose="020B0609020204030204" pitchFamily="49" charset="0"/>
+                <a:latin typeface="D2Coding" panose="020B0609020101020101" pitchFamily="49" charset="-127"/>
+                <a:ea typeface="D2Coding" panose="020B0609020101020101" pitchFamily="49" charset="-127"/>
               </a:rPr>
             </a:br>
             <a:r>
@@ -7007,9 +7156,10 @@
                   <a:srgbClr val="383A42"/>
                 </a:solidFill>
                 <a:effectLst/>
-                <a:latin typeface="Consolas" panose="020B0609020204030204" pitchFamily="49" charset="0"/>
-              </a:rPr>
-              <a:t>│         ↓             │</a:t>
+                <a:latin typeface="D2Coding" panose="020B0609020101020101" pitchFamily="49" charset="-127"/>
+                <a:ea typeface="D2Coding" panose="020B0609020101020101" pitchFamily="49" charset="-127"/>
+              </a:rPr>
+              <a:t> │          ↓            │</a:t>
             </a:r>
             <a:br>
               <a:rPr lang="en-US" altLang="ko-KR" sz="1800" b="0" i="0" u="none" strike="noStrike" dirty="0">
@@ -7017,7 +7167,8 @@
                   <a:srgbClr val="383A42"/>
                 </a:solidFill>
                 <a:effectLst/>
-                <a:latin typeface="Consolas" panose="020B0609020204030204" pitchFamily="49" charset="0"/>
+                <a:latin typeface="D2Coding" panose="020B0609020101020101" pitchFamily="49" charset="-127"/>
+                <a:ea typeface="D2Coding" panose="020B0609020101020101" pitchFamily="49" charset="-127"/>
               </a:rPr>
             </a:br>
             <a:r>
@@ -7026,9 +7177,32 @@
                   <a:srgbClr val="383A42"/>
                 </a:solidFill>
                 <a:effectLst/>
-                <a:latin typeface="Consolas" panose="020B0609020204030204" pitchFamily="49" charset="0"/>
-              </a:rPr>
-              <a:t>│ Stack (local vars)    │</a:t>
+                <a:latin typeface="D2Coding" panose="020B0609020101020101" pitchFamily="49" charset="-127"/>
+                <a:ea typeface="D2Coding" panose="020B0609020101020101" pitchFamily="49" charset="-127"/>
+              </a:rPr>
+              <a:t> │  </a:t>
+            </a:r>
+            <a:r>
+              <a:rPr lang="en-US" altLang="ko-KR" sz="1800" b="0" i="0" u="none" strike="noStrike" dirty="0">
+                <a:solidFill>
+                  <a:srgbClr val="0000FF"/>
+                </a:solidFill>
+                <a:effectLst/>
+                <a:latin typeface="D2Coding" panose="020B0609020101020101" pitchFamily="49" charset="-127"/>
+                <a:ea typeface="D2Coding" panose="020B0609020101020101" pitchFamily="49" charset="-127"/>
+              </a:rPr>
+              <a:t>Stack</a:t>
+            </a:r>
+            <a:r>
+              <a:rPr lang="en-US" altLang="ko-KR" sz="1800" b="0" i="0" u="none" strike="noStrike" dirty="0">
+                <a:solidFill>
+                  <a:srgbClr val="383A42"/>
+                </a:solidFill>
+                <a:effectLst/>
+                <a:latin typeface="D2Coding" panose="020B0609020101020101" pitchFamily="49" charset="-127"/>
+                <a:ea typeface="D2Coding" panose="020B0609020101020101" pitchFamily="49" charset="-127"/>
+              </a:rPr>
+              <a:t> (local vars)   │</a:t>
             </a:r>
             <a:br>
               <a:rPr lang="en-US" altLang="ko-KR" sz="1800" b="0" i="0" u="none" strike="noStrike" dirty="0">
@@ -7036,7 +7210,8 @@
                   <a:srgbClr val="383A42"/>
                 </a:solidFill>
                 <a:effectLst/>
-                <a:latin typeface="Consolas" panose="020B0609020204030204" pitchFamily="49" charset="0"/>
+                <a:latin typeface="D2Coding" panose="020B0609020101020101" pitchFamily="49" charset="-127"/>
+                <a:ea typeface="D2Coding" panose="020B0609020101020101" pitchFamily="49" charset="-127"/>
               </a:rPr>
             </a:br>
             <a:r>
@@ -7045,11 +7220,15 @@
                   <a:srgbClr val="383A42"/>
                 </a:solidFill>
                 <a:effectLst/>
-                <a:latin typeface="Consolas" panose="020B0609020204030204" pitchFamily="49" charset="0"/>
-              </a:rPr>
-              <a:t>└───────────────────────┘</a:t>
-            </a:r>
-            <a:endParaRPr lang="ko-KR" altLang="en-US" sz="1800" dirty="0"/>
+                <a:latin typeface="D2Coding" panose="020B0609020101020101" pitchFamily="49" charset="-127"/>
+                <a:ea typeface="D2Coding" panose="020B0609020101020101" pitchFamily="49" charset="-127"/>
+              </a:rPr>
+              <a:t> └───────────────────────┘</a:t>
+            </a:r>
+            <a:endParaRPr lang="ko-KR" altLang="en-US" sz="1800" dirty="0">
+              <a:latin typeface="D2Coding" panose="020B0609020101020101" pitchFamily="49" charset="-127"/>
+              <a:ea typeface="D2Coding" panose="020B0609020101020101" pitchFamily="49" charset="-127"/>
+            </a:endParaRPr>
           </a:p>
         </p:txBody>
       </p:sp>
@@ -7339,8 +7518,8 @@
         </p:nvSpPr>
         <p:spPr>
           <a:xfrm>
-            <a:off x="5903640" y="2627332"/>
-            <a:ext cx="3240360" cy="3970318"/>
+            <a:off x="5220072" y="1556792"/>
+            <a:ext cx="3528641" cy="4524315"/>
           </a:xfrm>
           <a:prstGeom prst="rect">
             <a:avLst/>
@@ -7348,6 +7527,13 @@
           <a:solidFill>
             <a:srgbClr val="FFFFCC"/>
           </a:solidFill>
+          <a:ln w="41275">
+            <a:solidFill>
+              <a:schemeClr val="bg1">
+                <a:lumMod val="75000"/>
+              </a:schemeClr>
+            </a:solidFill>
+          </a:ln>
         </p:spPr>
         <p:txBody>
           <a:bodyPr wrap="square">
@@ -7359,63 +7545,53 @@
               <a:buNone/>
             </a:pPr>
             <a:r>
-              <a:rPr lang="ko-KR" altLang="en-US" sz="1400" b="1" i="0" u="none" strike="noStrike" dirty="0">
-                <a:solidFill>
-                  <a:srgbClr val="383A42"/>
-                </a:solidFill>
-                <a:effectLst/>
-                <a:latin typeface="Consolas" panose="020B0609020204030204" pitchFamily="49" charset="0"/>
-              </a:rPr>
-              <a:t>    </a:t>
-            </a:r>
-            <a:r>
-              <a:rPr lang="ko-KR" altLang="en-US" sz="1400" b="1" i="0" u="none" strike="noStrike" dirty="0">
-                <a:solidFill>
-                  <a:srgbClr val="383A42"/>
-                </a:solidFill>
-                <a:effectLst/>
-                <a:latin typeface="+mn-ea"/>
-                <a:ea typeface="+mn-ea"/>
-              </a:rPr>
-              <a:t>메모리 주소 </a:t>
-            </a:r>
-            <a:r>
-              <a:rPr lang="en-US" altLang="ko-KR" sz="1400" b="1" i="0" u="none" strike="noStrike" dirty="0">
-                <a:solidFill>
-                  <a:srgbClr val="383A42"/>
-                </a:solidFill>
-                <a:effectLst/>
-                <a:latin typeface="+mn-ea"/>
-                <a:ea typeface="+mn-ea"/>
+              <a:rPr lang="ko-KR" altLang="en-US" sz="1600" b="1" i="0" u="none" strike="noStrike" dirty="0">
+                <a:solidFill>
+                  <a:srgbClr val="383A42"/>
+                </a:solidFill>
+                <a:effectLst/>
+                <a:latin typeface="D2Coding" panose="020B0609020101020101" pitchFamily="49" charset="-127"/>
+                <a:ea typeface="D2Coding" panose="020B0609020101020101" pitchFamily="49" charset="-127"/>
+              </a:rPr>
+              <a:t>      메모리 주소 </a:t>
+            </a:r>
+            <a:r>
+              <a:rPr lang="en-US" altLang="ko-KR" sz="1600" b="1" i="0" u="none" strike="noStrike" dirty="0">
+                <a:solidFill>
+                  <a:srgbClr val="383A42"/>
+                </a:solidFill>
+                <a:effectLst/>
+                <a:latin typeface="D2Coding" panose="020B0609020101020101" pitchFamily="49" charset="-127"/>
+                <a:ea typeface="D2Coding" panose="020B0609020101020101" pitchFamily="49" charset="-127"/>
               </a:rPr>
               <a:t>(</a:t>
             </a:r>
             <a:r>
-              <a:rPr lang="ko-KR" altLang="en-US" sz="1400" b="1" i="0" u="none" strike="noStrike" dirty="0">
-                <a:solidFill>
-                  <a:srgbClr val="383A42"/>
-                </a:solidFill>
-                <a:effectLst/>
-                <a:latin typeface="+mn-ea"/>
-                <a:ea typeface="+mn-ea"/>
+              <a:rPr lang="ko-KR" altLang="en-US" sz="1600" b="1" i="0" u="none" strike="noStrike" dirty="0">
+                <a:solidFill>
+                  <a:srgbClr val="383A42"/>
+                </a:solidFill>
+                <a:effectLst/>
+                <a:latin typeface="D2Coding" panose="020B0609020101020101" pitchFamily="49" charset="-127"/>
+                <a:ea typeface="D2Coding" panose="020B0609020101020101" pitchFamily="49" charset="-127"/>
               </a:rPr>
               <a:t>높은 주소</a:t>
             </a:r>
             <a:r>
-              <a:rPr lang="en-US" altLang="ko-KR" sz="1400" b="1" i="0" u="none" strike="noStrike" dirty="0">
-                <a:solidFill>
-                  <a:srgbClr val="383A42"/>
-                </a:solidFill>
-                <a:effectLst/>
-                <a:latin typeface="+mn-ea"/>
-                <a:ea typeface="+mn-ea"/>
+              <a:rPr lang="en-US" altLang="ko-KR" sz="1600" b="1" i="0" u="none" strike="noStrike" dirty="0">
+                <a:solidFill>
+                  <a:srgbClr val="383A42"/>
+                </a:solidFill>
+                <a:effectLst/>
+                <a:latin typeface="D2Coding" panose="020B0609020101020101" pitchFamily="49" charset="-127"/>
+                <a:ea typeface="D2Coding" panose="020B0609020101020101" pitchFamily="49" charset="-127"/>
               </a:rPr>
               <a:t>)</a:t>
             </a:r>
-            <a:endParaRPr lang="ko-KR" altLang="en-US" sz="1400" b="1" dirty="0">
+            <a:endParaRPr lang="ko-KR" altLang="en-US" sz="1600" b="1" dirty="0">
               <a:effectLst/>
-              <a:latin typeface="+mn-ea"/>
-              <a:ea typeface="+mn-ea"/>
+              <a:latin typeface="D2Coding" panose="020B0609020101020101" pitchFamily="49" charset="-127"/>
+              <a:ea typeface="D2Coding" panose="020B0609020101020101" pitchFamily="49" charset="-127"/>
             </a:endParaRPr>
           </a:p>
           <a:p>
@@ -7423,17 +7599,430 @@
               <a:buNone/>
             </a:pPr>
             <a:r>
-              <a:rPr lang="ko-KR" altLang="en-US" sz="1400" b="1" i="0" u="none" strike="noStrike" dirty="0">
-                <a:solidFill>
-                  <a:srgbClr val="383A42"/>
-                </a:solidFill>
-                <a:effectLst/>
-                <a:latin typeface="Consolas" panose="020B0609020204030204" pitchFamily="49" charset="0"/>
-              </a:rPr>
-              <a:t>            ↓</a:t>
-            </a:r>
-            <a:endParaRPr lang="ko-KR" altLang="en-US" sz="1400" b="1" dirty="0">
+              <a:rPr lang="ko-KR" altLang="en-US" sz="1600" b="1" i="0" u="none" strike="noStrike" dirty="0">
+                <a:solidFill>
+                  <a:srgbClr val="383A42"/>
+                </a:solidFill>
+                <a:effectLst/>
+                <a:latin typeface="D2Coding" panose="020B0609020101020101" pitchFamily="49" charset="-127"/>
+                <a:ea typeface="D2Coding" panose="020B0609020101020101" pitchFamily="49" charset="-127"/>
+              </a:rPr>
+              <a:t>              ↓</a:t>
+            </a:r>
+            <a:endParaRPr lang="ko-KR" altLang="en-US" sz="1600" b="1" dirty="0">
               <a:effectLst/>
+              <a:latin typeface="D2Coding" panose="020B0609020101020101" pitchFamily="49" charset="-127"/>
+              <a:ea typeface="D2Coding" panose="020B0609020101020101" pitchFamily="49" charset="-127"/>
+            </a:endParaRPr>
+          </a:p>
+          <a:p>
+            <a:r>
+              <a:rPr lang="ko-KR" altLang="en-US" sz="1600" b="1" i="0" u="none" strike="noStrike" dirty="0">
+                <a:solidFill>
+                  <a:srgbClr val="383A42"/>
+                </a:solidFill>
+                <a:effectLst/>
+                <a:latin typeface="D2Coding" panose="020B0609020101020101" pitchFamily="49" charset="-127"/>
+                <a:ea typeface="D2Coding" panose="020B0609020101020101" pitchFamily="49" charset="-127"/>
+              </a:rPr>
+              <a:t> ┌─────────────────────────</a:t>
+            </a:r>
+            <a:r>
+              <a:rPr lang="en-US" altLang="ko-KR" sz="1600" b="1" dirty="0">
+                <a:solidFill>
+                  <a:srgbClr val="383A42"/>
+                </a:solidFill>
+                <a:latin typeface="D2Coding" panose="020B0609020101020101" pitchFamily="49" charset="-127"/>
+                <a:ea typeface="D2Coding" panose="020B0609020101020101" pitchFamily="49" charset="-127"/>
+              </a:rPr>
+              <a:t>───</a:t>
+            </a:r>
+            <a:r>
+              <a:rPr lang="ko-KR" altLang="en-US" sz="1600" b="1" i="0" u="none" strike="noStrike" dirty="0">
+                <a:solidFill>
+                  <a:srgbClr val="383A42"/>
+                </a:solidFill>
+                <a:effectLst/>
+                <a:latin typeface="D2Coding" panose="020B0609020101020101" pitchFamily="49" charset="-127"/>
+                <a:ea typeface="D2Coding" panose="020B0609020101020101" pitchFamily="49" charset="-127"/>
+              </a:rPr>
+              <a:t>─┐</a:t>
+            </a:r>
+            <a:br>
+              <a:rPr lang="ko-KR" altLang="en-US" sz="1600" b="1" i="0" u="none" strike="noStrike" dirty="0">
+                <a:solidFill>
+                  <a:srgbClr val="383A42"/>
+                </a:solidFill>
+                <a:effectLst/>
+                <a:latin typeface="D2Coding" panose="020B0609020101020101" pitchFamily="49" charset="-127"/>
+                <a:ea typeface="D2Coding" panose="020B0609020101020101" pitchFamily="49" charset="-127"/>
+              </a:rPr>
+            </a:br>
+            <a:r>
+              <a:rPr lang="ko-KR" altLang="en-US" sz="1600" b="1" i="0" u="none" strike="noStrike" dirty="0">
+                <a:solidFill>
+                  <a:srgbClr val="383A42"/>
+                </a:solidFill>
+                <a:effectLst/>
+                <a:latin typeface="D2Coding" panose="020B0609020101020101" pitchFamily="49" charset="-127"/>
+                <a:ea typeface="D2Coding" panose="020B0609020101020101" pitchFamily="49" charset="-127"/>
+              </a:rPr>
+              <a:t> │  이전 함수의 </a:t>
+            </a:r>
+            <a:r>
+              <a:rPr lang="en-US" altLang="ko-KR" sz="1600" b="1" i="0" u="none" strike="noStrike" dirty="0">
+                <a:solidFill>
+                  <a:srgbClr val="383A42"/>
+                </a:solidFill>
+                <a:effectLst/>
+                <a:latin typeface="D2Coding" panose="020B0609020101020101" pitchFamily="49" charset="-127"/>
+                <a:ea typeface="D2Coding" panose="020B0609020101020101" pitchFamily="49" charset="-127"/>
+              </a:rPr>
+              <a:t>Stack Frame    │</a:t>
+            </a:r>
+            <a:br>
+              <a:rPr lang="en-US" altLang="ko-KR" sz="1600" b="1" i="0" u="none" strike="noStrike" dirty="0">
+                <a:solidFill>
+                  <a:srgbClr val="383A42"/>
+                </a:solidFill>
+                <a:effectLst/>
+                <a:latin typeface="D2Coding" panose="020B0609020101020101" pitchFamily="49" charset="-127"/>
+                <a:ea typeface="D2Coding" panose="020B0609020101020101" pitchFamily="49" charset="-127"/>
+              </a:rPr>
+            </a:br>
+            <a:r>
+              <a:rPr lang="en-US" altLang="ko-KR" sz="1600" b="1" i="0" u="none" strike="noStrike" dirty="0">
+                <a:solidFill>
+                  <a:srgbClr val="383A42"/>
+                </a:solidFill>
+                <a:effectLst/>
+                <a:latin typeface="D2Coding" panose="020B0609020101020101" pitchFamily="49" charset="-127"/>
+                <a:ea typeface="D2Coding" panose="020B0609020101020101" pitchFamily="49" charset="-127"/>
+              </a:rPr>
+              <a:t> ├───────────────────────</a:t>
+            </a:r>
+            <a:r>
+              <a:rPr lang="en-US" altLang="ko-KR" sz="1600" b="1" dirty="0">
+                <a:solidFill>
+                  <a:srgbClr val="383A42"/>
+                </a:solidFill>
+                <a:latin typeface="D2Coding" panose="020B0609020101020101" pitchFamily="49" charset="-127"/>
+                <a:ea typeface="D2Coding" panose="020B0609020101020101" pitchFamily="49" charset="-127"/>
+              </a:rPr>
+              <a:t>───</a:t>
+            </a:r>
+            <a:r>
+              <a:rPr lang="en-US" altLang="ko-KR" sz="1600" b="1" i="0" u="none" strike="noStrike" dirty="0">
+                <a:solidFill>
+                  <a:srgbClr val="383A42"/>
+                </a:solidFill>
+                <a:effectLst/>
+                <a:latin typeface="D2Coding" panose="020B0609020101020101" pitchFamily="49" charset="-127"/>
+                <a:ea typeface="D2Coding" panose="020B0609020101020101" pitchFamily="49" charset="-127"/>
+              </a:rPr>
+              <a:t>───┤</a:t>
+            </a:r>
+            <a:br>
+              <a:rPr lang="en-US" altLang="ko-KR" sz="1600" b="1" i="0" u="none" strike="noStrike" dirty="0">
+                <a:solidFill>
+                  <a:srgbClr val="383A42"/>
+                </a:solidFill>
+                <a:effectLst/>
+                <a:latin typeface="D2Coding" panose="020B0609020101020101" pitchFamily="49" charset="-127"/>
+                <a:ea typeface="D2Coding" panose="020B0609020101020101" pitchFamily="49" charset="-127"/>
+              </a:rPr>
+            </a:br>
+            <a:r>
+              <a:rPr lang="en-US" altLang="ko-KR" sz="1600" b="1" i="0" u="none" strike="noStrike" dirty="0">
+                <a:solidFill>
+                  <a:srgbClr val="383A42"/>
+                </a:solidFill>
+                <a:effectLst/>
+                <a:latin typeface="D2Coding" panose="020B0609020101020101" pitchFamily="49" charset="-127"/>
+                <a:ea typeface="D2Coding" panose="020B0609020101020101" pitchFamily="49" charset="-127"/>
+              </a:rPr>
+              <a:t> │  </a:t>
+            </a:r>
+            <a:r>
+              <a:rPr lang="ko-KR" altLang="en-US" sz="1600" b="1" i="0" u="none" strike="noStrike" dirty="0">
+                <a:solidFill>
+                  <a:srgbClr val="383A42"/>
+                </a:solidFill>
+                <a:effectLst/>
+                <a:latin typeface="D2Coding" panose="020B0609020101020101" pitchFamily="49" charset="-127"/>
+                <a:ea typeface="D2Coding" panose="020B0609020101020101" pitchFamily="49" charset="-127"/>
+              </a:rPr>
+              <a:t>반환 주소</a:t>
+            </a:r>
+            <a:r>
+              <a:rPr lang="en-US" altLang="ko-KR" sz="1600" b="1" i="0" u="none" strike="noStrike" dirty="0">
+                <a:solidFill>
+                  <a:srgbClr val="383A42"/>
+                </a:solidFill>
+                <a:effectLst/>
+                <a:latin typeface="D2Coding" panose="020B0609020101020101" pitchFamily="49" charset="-127"/>
+                <a:ea typeface="D2Coding" panose="020B0609020101020101" pitchFamily="49" charset="-127"/>
+              </a:rPr>
+              <a:t>(Return Address)  │</a:t>
+            </a:r>
+            <a:br>
+              <a:rPr lang="en-US" altLang="ko-KR" sz="1600" b="1" i="0" u="none" strike="noStrike" dirty="0">
+                <a:solidFill>
+                  <a:srgbClr val="383A42"/>
+                </a:solidFill>
+                <a:effectLst/>
+                <a:latin typeface="D2Coding" panose="020B0609020101020101" pitchFamily="49" charset="-127"/>
+                <a:ea typeface="D2Coding" panose="020B0609020101020101" pitchFamily="49" charset="-127"/>
+              </a:rPr>
+            </a:br>
+            <a:r>
+              <a:rPr lang="en-US" altLang="ko-KR" sz="1600" b="1" i="0" u="none" strike="noStrike" dirty="0">
+                <a:solidFill>
+                  <a:srgbClr val="383A42"/>
+                </a:solidFill>
+                <a:effectLst/>
+                <a:latin typeface="D2Coding" panose="020B0609020101020101" pitchFamily="49" charset="-127"/>
+                <a:ea typeface="D2Coding" panose="020B0609020101020101" pitchFamily="49" charset="-127"/>
+              </a:rPr>
+              <a:t> ├───────────────────────</a:t>
+            </a:r>
+            <a:r>
+              <a:rPr lang="en-US" altLang="ko-KR" sz="1600" b="1" dirty="0">
+                <a:solidFill>
+                  <a:srgbClr val="383A42"/>
+                </a:solidFill>
+                <a:latin typeface="D2Coding" panose="020B0609020101020101" pitchFamily="49" charset="-127"/>
+                <a:ea typeface="D2Coding" panose="020B0609020101020101" pitchFamily="49" charset="-127"/>
+              </a:rPr>
+              <a:t>───</a:t>
+            </a:r>
+            <a:r>
+              <a:rPr lang="en-US" altLang="ko-KR" sz="1600" b="1" i="0" u="none" strike="noStrike" dirty="0">
+                <a:solidFill>
+                  <a:srgbClr val="383A42"/>
+                </a:solidFill>
+                <a:effectLst/>
+                <a:latin typeface="D2Coding" panose="020B0609020101020101" pitchFamily="49" charset="-127"/>
+                <a:ea typeface="D2Coding" panose="020B0609020101020101" pitchFamily="49" charset="-127"/>
+              </a:rPr>
+              <a:t>───┤</a:t>
+            </a:r>
+            <a:br>
+              <a:rPr lang="en-US" altLang="ko-KR" sz="1600" b="1" i="0" u="none" strike="noStrike" dirty="0">
+                <a:solidFill>
+                  <a:srgbClr val="383A42"/>
+                </a:solidFill>
+                <a:effectLst/>
+                <a:latin typeface="D2Coding" panose="020B0609020101020101" pitchFamily="49" charset="-127"/>
+                <a:ea typeface="D2Coding" panose="020B0609020101020101" pitchFamily="49" charset="-127"/>
+              </a:rPr>
+            </a:br>
+            <a:r>
+              <a:rPr lang="en-US" altLang="ko-KR" sz="1600" b="1" i="0" u="none" strike="noStrike" dirty="0">
+                <a:solidFill>
+                  <a:srgbClr val="383A42"/>
+                </a:solidFill>
+                <a:effectLst/>
+                <a:latin typeface="D2Coding" panose="020B0609020101020101" pitchFamily="49" charset="-127"/>
+                <a:ea typeface="D2Coding" panose="020B0609020101020101" pitchFamily="49" charset="-127"/>
+              </a:rPr>
+              <a:t> │       </a:t>
+            </a:r>
+            <a:r>
+              <a:rPr lang="ko-KR" altLang="en-US" sz="1600" b="1" i="0" u="none" strike="noStrike" dirty="0">
+                <a:solidFill>
+                  <a:srgbClr val="383A42"/>
+                </a:solidFill>
+                <a:effectLst/>
+                <a:latin typeface="D2Coding" panose="020B0609020101020101" pitchFamily="49" charset="-127"/>
+                <a:ea typeface="D2Coding" panose="020B0609020101020101" pitchFamily="49" charset="-127"/>
+              </a:rPr>
+              <a:t>함수 매개변수         │</a:t>
+            </a:r>
+            <a:br>
+              <a:rPr lang="ko-KR" altLang="en-US" sz="1600" b="1" i="0" u="none" strike="noStrike" dirty="0">
+                <a:solidFill>
+                  <a:srgbClr val="383A42"/>
+                </a:solidFill>
+                <a:effectLst/>
+                <a:latin typeface="D2Coding" panose="020B0609020101020101" pitchFamily="49" charset="-127"/>
+                <a:ea typeface="D2Coding" panose="020B0609020101020101" pitchFamily="49" charset="-127"/>
+              </a:rPr>
+            </a:br>
+            <a:r>
+              <a:rPr lang="ko-KR" altLang="en-US" sz="1600" b="1" i="0" u="none" strike="noStrike" dirty="0">
+                <a:solidFill>
+                  <a:srgbClr val="383A42"/>
+                </a:solidFill>
+                <a:effectLst/>
+                <a:latin typeface="D2Coding" panose="020B0609020101020101" pitchFamily="49" charset="-127"/>
+                <a:ea typeface="D2Coding" panose="020B0609020101020101" pitchFamily="49" charset="-127"/>
+              </a:rPr>
+              <a:t> │       </a:t>
+            </a:r>
+            <a:r>
+              <a:rPr lang="en-US" altLang="ko-KR" sz="1600" b="1" i="0" u="none" strike="noStrike" dirty="0">
+                <a:solidFill>
+                  <a:srgbClr val="383A42"/>
+                </a:solidFill>
+                <a:effectLst/>
+                <a:latin typeface="D2Coding" panose="020B0609020101020101" pitchFamily="49" charset="-127"/>
+                <a:ea typeface="D2Coding" panose="020B0609020101020101" pitchFamily="49" charset="-127"/>
+              </a:rPr>
+              <a:t>(Parameters)          │</a:t>
+            </a:r>
+            <a:br>
+              <a:rPr lang="en-US" altLang="ko-KR" sz="1600" b="1" i="0" u="none" strike="noStrike" dirty="0">
+                <a:solidFill>
+                  <a:srgbClr val="383A42"/>
+                </a:solidFill>
+                <a:effectLst/>
+                <a:latin typeface="D2Coding" panose="020B0609020101020101" pitchFamily="49" charset="-127"/>
+                <a:ea typeface="D2Coding" panose="020B0609020101020101" pitchFamily="49" charset="-127"/>
+              </a:rPr>
+            </a:br>
+            <a:r>
+              <a:rPr lang="en-US" altLang="ko-KR" sz="1600" b="1" i="0" u="none" strike="noStrike" dirty="0">
+                <a:solidFill>
+                  <a:srgbClr val="383A42"/>
+                </a:solidFill>
+                <a:effectLst/>
+                <a:latin typeface="D2Coding" panose="020B0609020101020101" pitchFamily="49" charset="-127"/>
+                <a:ea typeface="D2Coding" panose="020B0609020101020101" pitchFamily="49" charset="-127"/>
+              </a:rPr>
+              <a:t> ├─────────────────────</a:t>
+            </a:r>
+            <a:r>
+              <a:rPr lang="en-US" altLang="ko-KR" sz="1600" b="1" dirty="0">
+                <a:solidFill>
+                  <a:srgbClr val="383A42"/>
+                </a:solidFill>
+                <a:latin typeface="D2Coding" panose="020B0609020101020101" pitchFamily="49" charset="-127"/>
+                <a:ea typeface="D2Coding" panose="020B0609020101020101" pitchFamily="49" charset="-127"/>
+              </a:rPr>
+              <a:t>───</a:t>
+            </a:r>
+            <a:r>
+              <a:rPr lang="en-US" altLang="ko-KR" sz="1600" b="1" i="0" u="none" strike="noStrike" dirty="0">
+                <a:solidFill>
+                  <a:srgbClr val="383A42"/>
+                </a:solidFill>
+                <a:effectLst/>
+                <a:latin typeface="D2Coding" panose="020B0609020101020101" pitchFamily="49" charset="-127"/>
+                <a:ea typeface="D2Coding" panose="020B0609020101020101" pitchFamily="49" charset="-127"/>
+              </a:rPr>
+              <a:t>─────┤</a:t>
+            </a:r>
+            <a:br>
+              <a:rPr lang="en-US" altLang="ko-KR" sz="1600" b="1" i="0" u="none" strike="noStrike" dirty="0">
+                <a:solidFill>
+                  <a:srgbClr val="383A42"/>
+                </a:solidFill>
+                <a:effectLst/>
+                <a:latin typeface="D2Coding" panose="020B0609020101020101" pitchFamily="49" charset="-127"/>
+                <a:ea typeface="D2Coding" panose="020B0609020101020101" pitchFamily="49" charset="-127"/>
+              </a:rPr>
+            </a:br>
+            <a:r>
+              <a:rPr lang="en-US" altLang="ko-KR" sz="1600" b="1" i="0" u="none" strike="noStrike" dirty="0">
+                <a:solidFill>
+                  <a:srgbClr val="383A42"/>
+                </a:solidFill>
+                <a:effectLst/>
+                <a:latin typeface="D2Coding" panose="020B0609020101020101" pitchFamily="49" charset="-127"/>
+                <a:ea typeface="D2Coding" panose="020B0609020101020101" pitchFamily="49" charset="-127"/>
+              </a:rPr>
+              <a:t> │        </a:t>
+            </a:r>
+            <a:r>
+              <a:rPr lang="ko-KR" altLang="en-US" sz="1600" b="1" i="0" u="none" strike="noStrike" dirty="0">
+                <a:solidFill>
+                  <a:srgbClr val="383A42"/>
+                </a:solidFill>
+                <a:effectLst/>
+                <a:latin typeface="D2Coding" panose="020B0609020101020101" pitchFamily="49" charset="-127"/>
+                <a:ea typeface="D2Coding" panose="020B0609020101020101" pitchFamily="49" charset="-127"/>
+              </a:rPr>
+              <a:t>지역 변수            │</a:t>
+            </a:r>
+            <a:br>
+              <a:rPr lang="ko-KR" altLang="en-US" sz="1600" b="1" i="0" u="none" strike="noStrike" dirty="0">
+                <a:solidFill>
+                  <a:srgbClr val="383A42"/>
+                </a:solidFill>
+                <a:effectLst/>
+                <a:latin typeface="D2Coding" panose="020B0609020101020101" pitchFamily="49" charset="-127"/>
+                <a:ea typeface="D2Coding" panose="020B0609020101020101" pitchFamily="49" charset="-127"/>
+              </a:rPr>
+            </a:br>
+            <a:r>
+              <a:rPr lang="ko-KR" altLang="en-US" sz="1600" b="1" i="0" u="none" strike="noStrike" dirty="0">
+                <a:solidFill>
+                  <a:srgbClr val="383A42"/>
+                </a:solidFill>
+                <a:effectLst/>
+                <a:latin typeface="D2Coding" panose="020B0609020101020101" pitchFamily="49" charset="-127"/>
+                <a:ea typeface="D2Coding" panose="020B0609020101020101" pitchFamily="49" charset="-127"/>
+              </a:rPr>
+              <a:t> │     </a:t>
+            </a:r>
+            <a:r>
+              <a:rPr lang="en-US" altLang="ko-KR" sz="1600" b="1" i="0" u="none" strike="noStrike" dirty="0">
+                <a:solidFill>
+                  <a:srgbClr val="383A42"/>
+                </a:solidFill>
+                <a:effectLst/>
+                <a:latin typeface="D2Coding" panose="020B0609020101020101" pitchFamily="49" charset="-127"/>
+                <a:ea typeface="D2Coding" panose="020B0609020101020101" pitchFamily="49" charset="-127"/>
+              </a:rPr>
+              <a:t>(Local Variables)       │</a:t>
+            </a:r>
+            <a:br>
+              <a:rPr lang="en-US" altLang="ko-KR" sz="1600" b="1" i="0" u="none" strike="noStrike" dirty="0">
+                <a:solidFill>
+                  <a:srgbClr val="383A42"/>
+                </a:solidFill>
+                <a:effectLst/>
+                <a:latin typeface="D2Coding" panose="020B0609020101020101" pitchFamily="49" charset="-127"/>
+                <a:ea typeface="D2Coding" panose="020B0609020101020101" pitchFamily="49" charset="-127"/>
+              </a:rPr>
+            </a:br>
+            <a:r>
+              <a:rPr lang="en-US" altLang="ko-KR" sz="1600" b="1" i="0" u="none" strike="noStrike" dirty="0">
+                <a:solidFill>
+                  <a:srgbClr val="383A42"/>
+                </a:solidFill>
+                <a:effectLst/>
+                <a:latin typeface="D2Coding" panose="020B0609020101020101" pitchFamily="49" charset="-127"/>
+                <a:ea typeface="D2Coding" panose="020B0609020101020101" pitchFamily="49" charset="-127"/>
+              </a:rPr>
+              <a:t> ├─────────────────────────</a:t>
+            </a:r>
+            <a:r>
+              <a:rPr lang="en-US" altLang="ko-KR" sz="1600" b="1" dirty="0">
+                <a:solidFill>
+                  <a:srgbClr val="383A42"/>
+                </a:solidFill>
+                <a:latin typeface="D2Coding" panose="020B0609020101020101" pitchFamily="49" charset="-127"/>
+                <a:ea typeface="D2Coding" panose="020B0609020101020101" pitchFamily="49" charset="-127"/>
+              </a:rPr>
+              <a:t>───</a:t>
+            </a:r>
+            <a:r>
+              <a:rPr lang="en-US" altLang="ko-KR" sz="1600" b="1" i="0" u="none" strike="noStrike" dirty="0">
+                <a:solidFill>
+                  <a:srgbClr val="383A42"/>
+                </a:solidFill>
+                <a:effectLst/>
+                <a:latin typeface="D2Coding" panose="020B0609020101020101" pitchFamily="49" charset="-127"/>
+                <a:ea typeface="D2Coding" panose="020B0609020101020101" pitchFamily="49" charset="-127"/>
+              </a:rPr>
+              <a:t>─┤</a:t>
+            </a:r>
+            <a:endParaRPr lang="ko-KR" altLang="en-US" sz="1600" b="1" dirty="0">
+              <a:effectLst/>
+              <a:latin typeface="D2Coding" panose="020B0609020101020101" pitchFamily="49" charset="-127"/>
+              <a:ea typeface="D2Coding" panose="020B0609020101020101" pitchFamily="49" charset="-127"/>
             </a:endParaRPr>
           </a:p>
           <a:p>
@@ -7441,360 +8030,42 @@
               <a:buNone/>
             </a:pPr>
             <a:r>
-              <a:rPr lang="ko-KR" altLang="en-US" sz="1400" b="1" i="0" u="none" strike="noStrike" dirty="0">
-                <a:solidFill>
-                  <a:srgbClr val="383A42"/>
-                </a:solidFill>
-                <a:effectLst/>
-                <a:latin typeface="Consolas" panose="020B0609020204030204" pitchFamily="49" charset="0"/>
-              </a:rPr>
-              <a:t>┌──────────────────────────┐</a:t>
-            </a:r>
-            <a:br>
-              <a:rPr lang="ko-KR" altLang="en-US" sz="1400" b="1" i="0" u="none" strike="noStrike" dirty="0">
-                <a:solidFill>
-                  <a:srgbClr val="383A42"/>
-                </a:solidFill>
-                <a:effectLst/>
-                <a:latin typeface="Consolas" panose="020B0609020204030204" pitchFamily="49" charset="0"/>
-              </a:rPr>
-            </a:br>
-            <a:r>
-              <a:rPr lang="ko-KR" altLang="en-US" sz="1400" b="1" i="0" u="none" strike="noStrike" dirty="0">
-                <a:solidFill>
-                  <a:srgbClr val="383A42"/>
-                </a:solidFill>
-                <a:effectLst/>
-                <a:latin typeface="Consolas" panose="020B0609020204030204" pitchFamily="49" charset="0"/>
-              </a:rPr>
-              <a:t>│ 이전 함수의 </a:t>
-            </a:r>
-            <a:r>
-              <a:rPr lang="en-US" altLang="ko-KR" sz="1400" b="1" i="0" u="none" strike="noStrike" dirty="0">
-                <a:solidFill>
-                  <a:srgbClr val="383A42"/>
-                </a:solidFill>
-                <a:effectLst/>
-                <a:latin typeface="Consolas" panose="020B0609020204030204" pitchFamily="49" charset="0"/>
-              </a:rPr>
-              <a:t>Stack Frame   │</a:t>
-            </a:r>
-            <a:br>
-              <a:rPr lang="en-US" altLang="ko-KR" sz="1400" b="1" i="0" u="none" strike="noStrike" dirty="0">
-                <a:solidFill>
-                  <a:srgbClr val="383A42"/>
-                </a:solidFill>
-                <a:effectLst/>
-                <a:latin typeface="Consolas" panose="020B0609020204030204" pitchFamily="49" charset="0"/>
-              </a:rPr>
-            </a:br>
-            <a:r>
-              <a:rPr lang="en-US" altLang="ko-KR" sz="1400" b="1" i="0" u="none" strike="noStrike" dirty="0">
-                <a:solidFill>
-                  <a:srgbClr val="383A42"/>
-                </a:solidFill>
-                <a:effectLst/>
-                <a:latin typeface="Consolas" panose="020B0609020204030204" pitchFamily="49" charset="0"/>
-              </a:rPr>
-              <a:t>├──────────────────────────┤</a:t>
-            </a:r>
-            <a:br>
-              <a:rPr lang="en-US" altLang="ko-KR" sz="1400" b="1" i="0" u="none" strike="noStrike" dirty="0">
-                <a:solidFill>
-                  <a:srgbClr val="383A42"/>
-                </a:solidFill>
-                <a:effectLst/>
-                <a:latin typeface="Consolas" panose="020B0609020204030204" pitchFamily="49" charset="0"/>
-              </a:rPr>
-            </a:br>
-            <a:r>
-              <a:rPr lang="en-US" altLang="ko-KR" sz="1400" b="1" i="0" u="none" strike="noStrike" dirty="0">
-                <a:solidFill>
-                  <a:srgbClr val="383A42"/>
-                </a:solidFill>
-                <a:effectLst/>
-                <a:latin typeface="Consolas" panose="020B0609020204030204" pitchFamily="49" charset="0"/>
-              </a:rPr>
-              <a:t>│ </a:t>
-            </a:r>
-            <a:r>
-              <a:rPr lang="ko-KR" altLang="en-US" sz="1400" b="1" i="0" u="none" strike="noStrike" dirty="0">
-                <a:solidFill>
-                  <a:srgbClr val="383A42"/>
-                </a:solidFill>
-                <a:effectLst/>
-                <a:latin typeface="Consolas" panose="020B0609020204030204" pitchFamily="49" charset="0"/>
-              </a:rPr>
-              <a:t>반환 주소</a:t>
-            </a:r>
-            <a:r>
-              <a:rPr lang="en-US" altLang="ko-KR" sz="1400" b="1" i="0" u="none" strike="noStrike" dirty="0">
-                <a:solidFill>
-                  <a:srgbClr val="383A42"/>
-                </a:solidFill>
-                <a:effectLst/>
-                <a:latin typeface="Consolas" panose="020B0609020204030204" pitchFamily="49" charset="0"/>
-              </a:rPr>
-              <a:t>(Return Address) │</a:t>
-            </a:r>
-            <a:br>
-              <a:rPr lang="en-US" altLang="ko-KR" sz="1400" b="1" i="0" u="none" strike="noStrike" dirty="0">
-                <a:solidFill>
-                  <a:srgbClr val="383A42"/>
-                </a:solidFill>
-                <a:effectLst/>
-                <a:latin typeface="Consolas" panose="020B0609020204030204" pitchFamily="49" charset="0"/>
-              </a:rPr>
-            </a:br>
-            <a:r>
-              <a:rPr lang="en-US" altLang="ko-KR" sz="1400" b="1" i="0" u="none" strike="noStrike" dirty="0">
-                <a:solidFill>
-                  <a:srgbClr val="383A42"/>
-                </a:solidFill>
-                <a:effectLst/>
-                <a:latin typeface="Consolas" panose="020B0609020204030204" pitchFamily="49" charset="0"/>
-              </a:rPr>
-              <a:t>├──────────────────────────┤</a:t>
-            </a:r>
-            <a:br>
-              <a:rPr lang="en-US" altLang="ko-KR" sz="1400" b="1" i="0" u="none" strike="noStrike" dirty="0">
-                <a:solidFill>
-                  <a:srgbClr val="383A42"/>
-                </a:solidFill>
-                <a:effectLst/>
-                <a:latin typeface="Consolas" panose="020B0609020204030204" pitchFamily="49" charset="0"/>
-              </a:rPr>
-            </a:br>
-            <a:r>
-              <a:rPr lang="en-US" altLang="ko-KR" sz="1400" b="1" i="0" u="none" strike="noStrike" dirty="0">
-                <a:solidFill>
-                  <a:srgbClr val="383A42"/>
-                </a:solidFill>
-                <a:effectLst/>
-                <a:latin typeface="Consolas" panose="020B0609020204030204" pitchFamily="49" charset="0"/>
-              </a:rPr>
-              <a:t>│     </a:t>
-            </a:r>
-            <a:r>
-              <a:rPr lang="ko-KR" altLang="en-US" sz="1400" b="1" i="0" u="none" strike="noStrike" dirty="0">
-                <a:solidFill>
-                  <a:srgbClr val="383A42"/>
-                </a:solidFill>
-                <a:effectLst/>
-                <a:latin typeface="가을체" panose="02030600000101010101" pitchFamily="18" charset="-127"/>
-                <a:ea typeface="가을체" panose="02030600000101010101" pitchFamily="18" charset="-127"/>
-              </a:rPr>
-              <a:t>함수 매개변수</a:t>
-            </a:r>
-            <a:r>
-              <a:rPr lang="ko-KR" altLang="en-US" sz="1400" b="1" i="0" u="none" strike="noStrike" dirty="0">
-                <a:solidFill>
-                  <a:srgbClr val="383A42"/>
-                </a:solidFill>
-                <a:effectLst/>
-                <a:latin typeface="Consolas" panose="020B0609020204030204" pitchFamily="49" charset="0"/>
-              </a:rPr>
-              <a:t>           │</a:t>
-            </a:r>
-            <a:br>
-              <a:rPr lang="ko-KR" altLang="en-US" sz="1400" b="1" i="0" u="none" strike="noStrike" dirty="0">
-                <a:solidFill>
-                  <a:srgbClr val="383A42"/>
-                </a:solidFill>
-                <a:effectLst/>
-                <a:latin typeface="Consolas" panose="020B0609020204030204" pitchFamily="49" charset="0"/>
-              </a:rPr>
-            </a:br>
-            <a:r>
-              <a:rPr lang="ko-KR" altLang="en-US" sz="1400" b="1" i="0" u="none" strike="noStrike" dirty="0">
-                <a:solidFill>
-                  <a:srgbClr val="383A42"/>
-                </a:solidFill>
-                <a:effectLst/>
-                <a:latin typeface="Consolas" panose="020B0609020204030204" pitchFamily="49" charset="0"/>
-              </a:rPr>
-              <a:t>│     </a:t>
-            </a:r>
-            <a:r>
-              <a:rPr lang="en-US" altLang="ko-KR" sz="1400" b="1" i="0" u="none" strike="noStrike" dirty="0">
-                <a:solidFill>
-                  <a:srgbClr val="383A42"/>
-                </a:solidFill>
-                <a:effectLst/>
-                <a:latin typeface="Consolas" panose="020B0609020204030204" pitchFamily="49" charset="0"/>
-              </a:rPr>
-              <a:t>(Parameters)         │</a:t>
-            </a:r>
-            <a:br>
-              <a:rPr lang="en-US" altLang="ko-KR" sz="1400" b="1" i="0" u="none" strike="noStrike" dirty="0">
-                <a:solidFill>
-                  <a:srgbClr val="383A42"/>
-                </a:solidFill>
-                <a:effectLst/>
-                <a:latin typeface="Consolas" panose="020B0609020204030204" pitchFamily="49" charset="0"/>
-              </a:rPr>
-            </a:br>
-            <a:r>
-              <a:rPr lang="en-US" altLang="ko-KR" sz="1400" b="1" i="0" u="none" strike="noStrike" dirty="0">
-                <a:solidFill>
-                  <a:srgbClr val="383A42"/>
-                </a:solidFill>
-                <a:effectLst/>
-                <a:latin typeface="Consolas" panose="020B0609020204030204" pitchFamily="49" charset="0"/>
-              </a:rPr>
-              <a:t>├──────────────────────────┤</a:t>
-            </a:r>
-            <a:br>
-              <a:rPr lang="en-US" altLang="ko-KR" sz="1400" b="1" i="0" u="none" strike="noStrike" dirty="0">
-                <a:solidFill>
-                  <a:srgbClr val="383A42"/>
-                </a:solidFill>
-                <a:effectLst/>
-                <a:latin typeface="Consolas" panose="020B0609020204030204" pitchFamily="49" charset="0"/>
-              </a:rPr>
-            </a:br>
-            <a:r>
-              <a:rPr lang="en-US" altLang="ko-KR" sz="1400" b="1" i="0" u="none" strike="noStrike" dirty="0">
-                <a:solidFill>
-                  <a:srgbClr val="383A42"/>
-                </a:solidFill>
-                <a:effectLst/>
-                <a:latin typeface="Consolas" panose="020B0609020204030204" pitchFamily="49" charset="0"/>
-              </a:rPr>
-              <a:t>│     </a:t>
-            </a:r>
-            <a:r>
-              <a:rPr lang="ko-KR" altLang="en-US" sz="1400" b="1" i="0" u="none" strike="noStrike" dirty="0">
-                <a:solidFill>
-                  <a:srgbClr val="383A42"/>
-                </a:solidFill>
-                <a:effectLst/>
-                <a:latin typeface="+mn-ea"/>
-                <a:ea typeface="+mn-ea"/>
-              </a:rPr>
-              <a:t>지역 변수</a:t>
-            </a:r>
-            <a:r>
-              <a:rPr lang="ko-KR" altLang="en-US" sz="1400" b="1" i="0" u="none" strike="noStrike" dirty="0">
-                <a:solidFill>
-                  <a:srgbClr val="383A42"/>
-                </a:solidFill>
-                <a:effectLst/>
-                <a:latin typeface="Consolas" panose="020B0609020204030204" pitchFamily="49" charset="0"/>
-              </a:rPr>
-              <a:t>              │</a:t>
-            </a:r>
-            <a:br>
-              <a:rPr lang="ko-KR" altLang="en-US" sz="1400" b="1" i="0" u="none" strike="noStrike" dirty="0">
-                <a:solidFill>
-                  <a:srgbClr val="383A42"/>
-                </a:solidFill>
-                <a:effectLst/>
-                <a:latin typeface="Consolas" panose="020B0609020204030204" pitchFamily="49" charset="0"/>
-              </a:rPr>
-            </a:br>
-            <a:r>
-              <a:rPr lang="ko-KR" altLang="en-US" sz="1400" b="1" i="0" u="none" strike="noStrike" dirty="0">
-                <a:solidFill>
-                  <a:srgbClr val="383A42"/>
-                </a:solidFill>
-                <a:effectLst/>
-                <a:latin typeface="Consolas" panose="020B0609020204030204" pitchFamily="49" charset="0"/>
-              </a:rPr>
-              <a:t>│ </a:t>
-            </a:r>
-            <a:r>
-              <a:rPr lang="en-US" altLang="ko-KR" sz="1400" b="1" i="0" u="none" strike="noStrike" dirty="0">
-                <a:solidFill>
-                  <a:srgbClr val="383A42"/>
-                </a:solidFill>
-                <a:effectLst/>
-                <a:latin typeface="Consolas" panose="020B0609020204030204" pitchFamily="49" charset="0"/>
-              </a:rPr>
-              <a:t>(Local Variables)        │</a:t>
-            </a:r>
-            <a:br>
-              <a:rPr lang="en-US" altLang="ko-KR" sz="1400" b="1" i="0" u="none" strike="noStrike" dirty="0">
-                <a:solidFill>
-                  <a:srgbClr val="383A42"/>
-                </a:solidFill>
-                <a:effectLst/>
-                <a:latin typeface="Consolas" panose="020B0609020204030204" pitchFamily="49" charset="0"/>
-              </a:rPr>
-            </a:br>
-            <a:r>
-              <a:rPr lang="en-US" altLang="ko-KR" sz="1400" b="1" i="0" u="none" strike="noStrike" dirty="0">
-                <a:solidFill>
-                  <a:srgbClr val="383A42"/>
-                </a:solidFill>
-                <a:effectLst/>
-                <a:latin typeface="Consolas" panose="020B0609020204030204" pitchFamily="49" charset="0"/>
-              </a:rPr>
-              <a:t>├──────────────────────────┤</a:t>
-            </a:r>
-            <a:endParaRPr lang="ko-KR" altLang="en-US" sz="1400" b="1" dirty="0">
+              <a:rPr lang="ko-KR" altLang="en-US" sz="1600" b="1" i="0" u="none" strike="noStrike" dirty="0">
+                <a:solidFill>
+                  <a:srgbClr val="383A42"/>
+                </a:solidFill>
+                <a:effectLst/>
+                <a:latin typeface="D2Coding" panose="020B0609020101020101" pitchFamily="49" charset="-127"/>
+                <a:ea typeface="D2Coding" panose="020B0609020101020101" pitchFamily="49" charset="-127"/>
+              </a:rPr>
+              <a:t> │ 임시 데이터 </a:t>
+            </a:r>
+            <a:r>
+              <a:rPr lang="en-US" altLang="ko-KR" sz="1600" b="1" i="0" u="none" strike="noStrike" dirty="0">
+                <a:solidFill>
+                  <a:srgbClr val="383A42"/>
+                </a:solidFill>
+                <a:effectLst/>
+                <a:latin typeface="D2Coding" panose="020B0609020101020101" pitchFamily="49" charset="-127"/>
+                <a:ea typeface="D2Coding" panose="020B0609020101020101" pitchFamily="49" charset="-127"/>
+              </a:rPr>
+              <a:t>/ </a:t>
+            </a:r>
+            <a:r>
+              <a:rPr lang="ko-KR" altLang="en-US" sz="1600" b="1" i="0" u="none" strike="noStrike" dirty="0">
+                <a:solidFill>
+                  <a:srgbClr val="383A42"/>
+                </a:solidFill>
+                <a:effectLst/>
+                <a:latin typeface="D2Coding" panose="020B0609020101020101" pitchFamily="49" charset="-127"/>
+                <a:ea typeface="D2Coding" panose="020B0609020101020101" pitchFamily="49" charset="-127"/>
+              </a:rPr>
+              <a:t>저장 레지스터 │</a:t>
+            </a:r>
+            <a:endParaRPr lang="ko-KR" altLang="en-US" sz="1600" b="1" dirty="0">
               <a:effectLst/>
-            </a:endParaRPr>
-          </a:p>
-          <a:p>
-            <a:pPr rtl="0">
-              <a:buNone/>
-            </a:pPr>
-            <a:r>
-              <a:rPr lang="ko-KR" altLang="en-US" sz="1400" b="1" i="0" u="none" strike="noStrike" dirty="0">
-                <a:solidFill>
-                  <a:srgbClr val="383A42"/>
-                </a:solidFill>
-                <a:effectLst/>
-                <a:latin typeface="Consolas" panose="020B0609020204030204" pitchFamily="49" charset="0"/>
-              </a:rPr>
-              <a:t>│ </a:t>
-            </a:r>
-            <a:r>
-              <a:rPr lang="ko-KR" altLang="en-US" sz="1400" b="1" i="0" u="none" strike="noStrike" dirty="0">
-                <a:solidFill>
-                  <a:srgbClr val="383A42"/>
-                </a:solidFill>
-                <a:effectLst/>
-                <a:latin typeface="+mn-ea"/>
-                <a:ea typeface="+mn-ea"/>
-              </a:rPr>
-              <a:t>임시 데이터 </a:t>
-            </a:r>
-            <a:r>
-              <a:rPr lang="en-US" altLang="ko-KR" sz="1400" b="1" i="0" u="none" strike="noStrike" dirty="0">
-                <a:solidFill>
-                  <a:srgbClr val="383A42"/>
-                </a:solidFill>
-                <a:effectLst/>
-                <a:latin typeface="+mn-ea"/>
-                <a:ea typeface="+mn-ea"/>
-              </a:rPr>
-              <a:t>/ </a:t>
-            </a:r>
-            <a:r>
-              <a:rPr lang="ko-KR" altLang="en-US" sz="1400" b="1" i="0" u="none" strike="noStrike" dirty="0">
-                <a:solidFill>
-                  <a:srgbClr val="383A42"/>
-                </a:solidFill>
-                <a:effectLst/>
-                <a:latin typeface="+mn-ea"/>
-                <a:ea typeface="+mn-ea"/>
-              </a:rPr>
-              <a:t>저장 레지스터   </a:t>
-            </a:r>
-            <a:r>
-              <a:rPr lang="ko-KR" altLang="en-US" sz="1400" b="1" i="0" u="none" strike="noStrike" dirty="0">
-                <a:solidFill>
-                  <a:srgbClr val="383A42"/>
-                </a:solidFill>
-                <a:effectLst/>
-                <a:latin typeface="Consolas" panose="020B0609020204030204" pitchFamily="49" charset="0"/>
-              </a:rPr>
-              <a:t> │</a:t>
-            </a:r>
-            <a:endParaRPr lang="ko-KR" altLang="en-US" sz="1400" b="1" dirty="0">
-              <a:effectLst/>
+              <a:latin typeface="D2Coding" panose="020B0609020101020101" pitchFamily="49" charset="-127"/>
+              <a:ea typeface="D2Coding" panose="020B0609020101020101" pitchFamily="49" charset="-127"/>
             </a:endParaRPr>
           </a:p>
           <a:p>
@@ -7802,153 +8073,225 @@
               <a:buNone/>
             </a:pPr>
             <a:r>
-              <a:rPr lang="ko-KR" altLang="en-US" sz="1400" b="1" i="0" u="none" strike="noStrike" dirty="0">
-                <a:solidFill>
-                  <a:srgbClr val="383A42"/>
-                </a:solidFill>
-                <a:effectLst/>
-                <a:latin typeface="Consolas" panose="020B0609020204030204" pitchFamily="49" charset="0"/>
-              </a:rPr>
-              <a:t>└──────────────────────────┘</a:t>
+              <a:rPr lang="ko-KR" altLang="en-US" sz="1600" b="1" i="0" u="none" strike="noStrike" dirty="0">
+                <a:solidFill>
+                  <a:srgbClr val="383A42"/>
+                </a:solidFill>
+                <a:effectLst/>
+                <a:latin typeface="D2Coding" panose="020B0609020101020101" pitchFamily="49" charset="-127"/>
+                <a:ea typeface="D2Coding" panose="020B0609020101020101" pitchFamily="49" charset="-127"/>
+              </a:rPr>
+              <a:t> └───────────────</a:t>
+            </a:r>
+            <a:r>
+              <a:rPr lang="en-US" altLang="ko-KR" sz="1600" b="1" dirty="0">
+                <a:solidFill>
+                  <a:srgbClr val="383A42"/>
+                </a:solidFill>
+                <a:latin typeface="D2Coding" panose="020B0609020101020101" pitchFamily="49" charset="-127"/>
+                <a:ea typeface="D2Coding" panose="020B0609020101020101" pitchFamily="49" charset="-127"/>
+              </a:rPr>
+              <a:t>───</a:t>
+            </a:r>
+            <a:r>
+              <a:rPr lang="ko-KR" altLang="en-US" sz="1600" b="1" i="0" u="none" strike="noStrike" dirty="0">
+                <a:solidFill>
+                  <a:srgbClr val="383A42"/>
+                </a:solidFill>
+                <a:effectLst/>
+                <a:latin typeface="D2Coding" panose="020B0609020101020101" pitchFamily="49" charset="-127"/>
+                <a:ea typeface="D2Coding" panose="020B0609020101020101" pitchFamily="49" charset="-127"/>
+              </a:rPr>
+              <a:t>───────────┘</a:t>
             </a:r>
             <a:br>
-              <a:rPr lang="ko-KR" altLang="en-US" sz="1400" b="1" i="0" u="none" strike="noStrike" dirty="0">
-                <a:solidFill>
-                  <a:srgbClr val="383A42"/>
-                </a:solidFill>
-                <a:effectLst/>
-                <a:latin typeface="Consolas" panose="020B0609020204030204" pitchFamily="49" charset="0"/>
+              <a:rPr lang="ko-KR" altLang="en-US" sz="1600" b="1" i="0" u="none" strike="noStrike" dirty="0">
+                <a:solidFill>
+                  <a:srgbClr val="383A42"/>
+                </a:solidFill>
+                <a:effectLst/>
+                <a:latin typeface="D2Coding" panose="020B0609020101020101" pitchFamily="49" charset="-127"/>
+                <a:ea typeface="D2Coding" panose="020B0609020101020101" pitchFamily="49" charset="-127"/>
               </a:rPr>
             </a:br>
             <a:r>
-              <a:rPr lang="ko-KR" altLang="en-US" sz="1400" b="1" i="0" u="none" strike="noStrike" dirty="0">
-                <a:solidFill>
-                  <a:srgbClr val="383A42"/>
-                </a:solidFill>
-                <a:effectLst/>
-                <a:latin typeface="Consolas" panose="020B0609020204030204" pitchFamily="49" charset="0"/>
-              </a:rPr>
-              <a:t>          ↑</a:t>
+              <a:rPr lang="ko-KR" altLang="en-US" sz="1600" b="1" i="0" u="none" strike="noStrike" dirty="0">
+                <a:solidFill>
+                  <a:srgbClr val="383A42"/>
+                </a:solidFill>
+                <a:effectLst/>
+                <a:latin typeface="D2Coding" panose="020B0609020101020101" pitchFamily="49" charset="-127"/>
+                <a:ea typeface="D2Coding" panose="020B0609020101020101" pitchFamily="49" charset="-127"/>
+              </a:rPr>
+              <a:t>              ↑</a:t>
             </a:r>
             <a:br>
-              <a:rPr lang="ko-KR" altLang="en-US" sz="1400" b="1" i="0" u="none" strike="noStrike" dirty="0">
-                <a:solidFill>
-                  <a:srgbClr val="383A42"/>
-                </a:solidFill>
-                <a:effectLst/>
-                <a:latin typeface="Consolas" panose="020B0609020204030204" pitchFamily="49" charset="0"/>
+              <a:rPr lang="ko-KR" altLang="en-US" sz="1600" b="1" i="0" u="none" strike="noStrike" dirty="0">
+                <a:solidFill>
+                  <a:srgbClr val="383A42"/>
+                </a:solidFill>
+                <a:effectLst/>
+                <a:latin typeface="D2Coding" panose="020B0609020101020101" pitchFamily="49" charset="-127"/>
+                <a:ea typeface="D2Coding" panose="020B0609020101020101" pitchFamily="49" charset="-127"/>
               </a:rPr>
             </a:br>
             <a:r>
-              <a:rPr lang="ko-KR" altLang="en-US" sz="1400" b="1" i="0" u="none" strike="noStrike" dirty="0">
-                <a:solidFill>
-                  <a:srgbClr val="383A42"/>
-                </a:solidFill>
-                <a:effectLst/>
-                <a:latin typeface="Consolas" panose="020B0609020204030204" pitchFamily="49" charset="0"/>
-              </a:rPr>
-              <a:t>    </a:t>
-            </a:r>
-            <a:r>
-              <a:rPr lang="en-US" altLang="ko-KR" sz="1400" b="1" i="0" u="none" strike="noStrike" dirty="0">
-                <a:solidFill>
-                  <a:srgbClr val="383A42"/>
-                </a:solidFill>
-                <a:effectLst/>
-                <a:latin typeface="Consolas" panose="020B0609020204030204" pitchFamily="49" charset="0"/>
-              </a:rPr>
-              <a:t>Stack </a:t>
-            </a:r>
-            <a:r>
-              <a:rPr lang="en-US" altLang="ko-KR" sz="1400" b="1" i="0" u="none" strike="noStrike" dirty="0">
+              <a:rPr lang="ko-KR" altLang="en-US" sz="1600" b="1" i="0" u="none" strike="noStrike" dirty="0">
+                <a:solidFill>
+                  <a:srgbClr val="383A42"/>
+                </a:solidFill>
+                <a:effectLst/>
+                <a:latin typeface="D2Coding" panose="020B0609020101020101" pitchFamily="49" charset="-127"/>
+                <a:ea typeface="D2Coding" panose="020B0609020101020101" pitchFamily="49" charset="-127"/>
+              </a:rPr>
+              <a:t>       </a:t>
+            </a:r>
+            <a:r>
+              <a:rPr lang="en-US" altLang="ko-KR" sz="1600" b="1" i="0" u="none" strike="noStrike" dirty="0">
+                <a:solidFill>
+                  <a:srgbClr val="0000FF"/>
+                </a:solidFill>
+                <a:effectLst/>
+                <a:latin typeface="D2Coding" panose="020B0609020101020101" pitchFamily="49" charset="-127"/>
+                <a:ea typeface="D2Coding" panose="020B0609020101020101" pitchFamily="49" charset="-127"/>
+              </a:rPr>
+              <a:t>Stack</a:t>
+            </a:r>
+            <a:r>
+              <a:rPr lang="en-US" altLang="ko-KR" sz="1600" b="1" i="0" u="none" strike="noStrike" dirty="0">
+                <a:solidFill>
+                  <a:srgbClr val="383A42"/>
+                </a:solidFill>
+                <a:effectLst/>
+                <a:latin typeface="D2Coding" panose="020B0609020101020101" pitchFamily="49" charset="-127"/>
+                <a:ea typeface="D2Coding" panose="020B0609020101020101" pitchFamily="49" charset="-127"/>
+              </a:rPr>
+              <a:t> </a:t>
+            </a:r>
+            <a:r>
+              <a:rPr lang="en-US" altLang="ko-KR" sz="1600" b="1" i="0" u="none" strike="noStrike" dirty="0">
                 <a:solidFill>
                   <a:srgbClr val="4078F2"/>
                 </a:solidFill>
                 <a:effectLst/>
-                <a:latin typeface="Consolas" panose="020B0609020204030204" pitchFamily="49" charset="0"/>
+                <a:latin typeface="D2Coding" panose="020B0609020101020101" pitchFamily="49" charset="-127"/>
+                <a:ea typeface="D2Coding" panose="020B0609020101020101" pitchFamily="49" charset="-127"/>
               </a:rPr>
               <a:t>Pointer</a:t>
             </a:r>
             <a:r>
-              <a:rPr lang="ko-KR" altLang="en-US" sz="1400" b="1" i="0" u="none" strike="noStrike" dirty="0">
-                <a:solidFill>
-                  <a:srgbClr val="383A42"/>
-                </a:solidFill>
-                <a:effectLst/>
-                <a:latin typeface="Consolas" panose="020B0609020204030204" pitchFamily="49" charset="0"/>
+              <a:rPr lang="ko-KR" altLang="en-US" sz="1600" b="1" i="0" u="none" strike="noStrike" dirty="0">
+                <a:solidFill>
+                  <a:srgbClr val="383A42"/>
+                </a:solidFill>
+                <a:effectLst/>
+                <a:latin typeface="D2Coding" panose="020B0609020101020101" pitchFamily="49" charset="-127"/>
+                <a:ea typeface="D2Coding" panose="020B0609020101020101" pitchFamily="49" charset="-127"/>
               </a:rPr>
               <a:t> </a:t>
             </a:r>
             <a:r>
-              <a:rPr lang="en-US" altLang="ko-KR" sz="1400" b="1" i="0" u="none" strike="noStrike" dirty="0">
-                <a:solidFill>
-                  <a:srgbClr val="383A42"/>
-                </a:solidFill>
-                <a:effectLst/>
-                <a:latin typeface="Consolas" panose="020B0609020204030204" pitchFamily="49" charset="0"/>
-              </a:rPr>
-              <a:t>(SP)</a:t>
+              <a:rPr lang="en-US" altLang="ko-KR" sz="1600" b="1" i="0" u="none" strike="noStrike" dirty="0">
+                <a:solidFill>
+                  <a:srgbClr val="383A42"/>
+                </a:solidFill>
+                <a:effectLst/>
+                <a:latin typeface="D2Coding" panose="020B0609020101020101" pitchFamily="49" charset="-127"/>
+                <a:ea typeface="D2Coding" panose="020B0609020101020101" pitchFamily="49" charset="-127"/>
+              </a:rPr>
+              <a:t>(</a:t>
+            </a:r>
+            <a:r>
+              <a:rPr lang="en-US" altLang="ko-KR" sz="1600" b="1" i="0" u="none" strike="noStrike" dirty="0">
+                <a:solidFill>
+                  <a:srgbClr val="0000FF"/>
+                </a:solidFill>
+                <a:effectLst/>
+                <a:latin typeface="D2Coding" panose="020B0609020101020101" pitchFamily="49" charset="-127"/>
+                <a:ea typeface="D2Coding" panose="020B0609020101020101" pitchFamily="49" charset="-127"/>
+              </a:rPr>
+              <a:t>SP</a:t>
+            </a:r>
+            <a:r>
+              <a:rPr lang="en-US" altLang="ko-KR" sz="1600" b="1" i="0" u="none" strike="noStrike" dirty="0">
+                <a:solidFill>
+                  <a:srgbClr val="383A42"/>
+                </a:solidFill>
+                <a:effectLst/>
+                <a:latin typeface="D2Coding" panose="020B0609020101020101" pitchFamily="49" charset="-127"/>
+                <a:ea typeface="D2Coding" panose="020B0609020101020101" pitchFamily="49" charset="-127"/>
+              </a:rPr>
+              <a:t>)</a:t>
             </a:r>
             <a:br>
-              <a:rPr lang="en-US" altLang="ko-KR" sz="1400" b="1" i="0" u="none" strike="noStrike" dirty="0">
-                <a:solidFill>
-                  <a:srgbClr val="383A42"/>
-                </a:solidFill>
-                <a:effectLst/>
-                <a:latin typeface="Consolas" panose="020B0609020204030204" pitchFamily="49" charset="0"/>
+              <a:rPr lang="en-US" altLang="ko-KR" sz="1600" b="1" i="0" u="none" strike="noStrike" dirty="0">
+                <a:solidFill>
+                  <a:srgbClr val="383A42"/>
+                </a:solidFill>
+                <a:effectLst/>
+                <a:latin typeface="D2Coding" panose="020B0609020101020101" pitchFamily="49" charset="-127"/>
+                <a:ea typeface="D2Coding" panose="020B0609020101020101" pitchFamily="49" charset="-127"/>
               </a:rPr>
             </a:br>
             <a:r>
-              <a:rPr lang="en-US" altLang="ko-KR" sz="1400" b="1" i="0" u="none" strike="noStrike" dirty="0">
-                <a:solidFill>
-                  <a:srgbClr val="383A42"/>
-                </a:solidFill>
-                <a:effectLst/>
-                <a:latin typeface="Consolas" panose="020B0609020204030204" pitchFamily="49" charset="0"/>
-              </a:rPr>
-              <a:t>  </a:t>
-            </a:r>
-            <a:r>
-              <a:rPr lang="ko-KR" altLang="en-US" sz="1400" b="1" i="0" u="none" strike="noStrike" dirty="0">
-                <a:solidFill>
-                  <a:srgbClr val="383A42"/>
-                </a:solidFill>
-                <a:effectLst/>
-                <a:latin typeface="Consolas" panose="020B0609020204030204" pitchFamily="49" charset="0"/>
+              <a:rPr lang="en-US" altLang="ko-KR" sz="1600" b="1" i="0" u="none" strike="noStrike" dirty="0">
+                <a:solidFill>
+                  <a:srgbClr val="383A42"/>
+                </a:solidFill>
+                <a:effectLst/>
+                <a:latin typeface="D2Coding" panose="020B0609020101020101" pitchFamily="49" charset="-127"/>
+                <a:ea typeface="D2Coding" panose="020B0609020101020101" pitchFamily="49" charset="-127"/>
+              </a:rPr>
+              <a:t>    </a:t>
+            </a:r>
+            <a:r>
+              <a:rPr lang="ko-KR" altLang="en-US" sz="1600" b="1" i="0" u="none" strike="noStrike" dirty="0">
+                <a:solidFill>
+                  <a:srgbClr val="383A42"/>
+                </a:solidFill>
+                <a:effectLst/>
+                <a:latin typeface="D2Coding" panose="020B0609020101020101" pitchFamily="49" charset="-127"/>
+                <a:ea typeface="D2Coding" panose="020B0609020101020101" pitchFamily="49" charset="-127"/>
               </a:rPr>
               <a:t>메모리 주소 </a:t>
             </a:r>
             <a:r>
-              <a:rPr lang="en-US" altLang="ko-KR" sz="1400" b="1" i="0" u="none" strike="noStrike" dirty="0">
-                <a:solidFill>
-                  <a:srgbClr val="383A42"/>
-                </a:solidFill>
-                <a:effectLst/>
-                <a:latin typeface="Consolas" panose="020B0609020204030204" pitchFamily="49" charset="0"/>
+              <a:rPr lang="en-US" altLang="ko-KR" sz="1600" b="1" i="0" u="none" strike="noStrike" dirty="0">
+                <a:solidFill>
+                  <a:srgbClr val="383A42"/>
+                </a:solidFill>
+                <a:effectLst/>
+                <a:latin typeface="D2Coding" panose="020B0609020101020101" pitchFamily="49" charset="-127"/>
+                <a:ea typeface="D2Coding" panose="020B0609020101020101" pitchFamily="49" charset="-127"/>
               </a:rPr>
               <a:t>(</a:t>
             </a:r>
             <a:r>
-              <a:rPr lang="ko-KR" altLang="en-US" sz="1400" b="1" i="0" u="none" strike="noStrike" dirty="0">
-                <a:solidFill>
-                  <a:srgbClr val="383A42"/>
-                </a:solidFill>
-                <a:effectLst/>
-                <a:latin typeface="Consolas" panose="020B0609020204030204" pitchFamily="49" charset="0"/>
+              <a:rPr lang="ko-KR" altLang="en-US" sz="1600" b="1" i="0" u="none" strike="noStrike" dirty="0">
+                <a:solidFill>
+                  <a:srgbClr val="383A42"/>
+                </a:solidFill>
+                <a:effectLst/>
+                <a:latin typeface="D2Coding" panose="020B0609020101020101" pitchFamily="49" charset="-127"/>
+                <a:ea typeface="D2Coding" panose="020B0609020101020101" pitchFamily="49" charset="-127"/>
               </a:rPr>
               <a:t>낮은 주소</a:t>
             </a:r>
             <a:r>
-              <a:rPr lang="en-US" altLang="ko-KR" sz="1400" b="1" i="0" u="none" strike="noStrike" dirty="0">
-                <a:solidFill>
-                  <a:srgbClr val="383A42"/>
-                </a:solidFill>
-                <a:effectLst/>
-                <a:latin typeface="Consolas" panose="020B0609020204030204" pitchFamily="49" charset="0"/>
+              <a:rPr lang="en-US" altLang="ko-KR" sz="1600" b="1" i="0" u="none" strike="noStrike" dirty="0">
+                <a:solidFill>
+                  <a:srgbClr val="383A42"/>
+                </a:solidFill>
+                <a:effectLst/>
+                <a:latin typeface="D2Coding" panose="020B0609020101020101" pitchFamily="49" charset="-127"/>
+                <a:ea typeface="D2Coding" panose="020B0609020101020101" pitchFamily="49" charset="-127"/>
               </a:rPr>
               <a:t>)</a:t>
             </a:r>
-            <a:endParaRPr lang="ko-KR" altLang="en-US" sz="1400" b="1" dirty="0"/>
+            <a:endParaRPr lang="ko-KR" altLang="en-US" sz="1600" b="1" dirty="0">
+              <a:latin typeface="D2Coding" panose="020B0609020101020101" pitchFamily="49" charset="-127"/>
+              <a:ea typeface="D2Coding" panose="020B0609020101020101" pitchFamily="49" charset="-127"/>
+            </a:endParaRPr>
           </a:p>
         </p:txBody>
       </p:sp>
@@ -8004,14 +8347,13 @@
           <a:lstStyle/>
           <a:p>
             <a:r>
-              <a:rPr lang="en-US" altLang="ko-KR" b="0" dirty="0"/>
+              <a:rPr lang="en-US" altLang="ko-KR" dirty="0"/>
               <a:t>05. </a:t>
             </a:r>
             <a:r>
-              <a:rPr lang="ko-KR" altLang="en-US" b="0" dirty="0"/>
+              <a:rPr lang="ko-KR" altLang="en-US" dirty="0"/>
               <a:t>함수</a:t>
             </a:r>
-            <a:endParaRPr lang="ko-KR" altLang="en-US" dirty="0"/>
           </a:p>
         </p:txBody>
       </p:sp>
@@ -8037,43 +8379,43 @@
           <a:lstStyle/>
           <a:p>
             <a:r>
-              <a:rPr lang="ko-KR" altLang="en-US" sz="2400" b="0" dirty="0"/>
+              <a:rPr lang="ko-KR" altLang="en-US" sz="2400" dirty="0"/>
               <a:t>프로그램 실행의 기본 단위</a:t>
             </a:r>
-            <a:endParaRPr lang="en-US" altLang="ko-KR" sz="2400" b="0" dirty="0"/>
-          </a:p>
-          <a:p>
-            <a:r>
-              <a:rPr lang="ko-KR" altLang="en-US" sz="2400" b="0" dirty="0">
+            <a:endParaRPr lang="en-US" altLang="ko-KR" sz="2400" dirty="0"/>
+          </a:p>
+          <a:p>
+            <a:r>
+              <a:rPr lang="ko-KR" altLang="en-US" sz="2400" dirty="0">
                 <a:sym typeface="Wingdings" panose="05000000000000000000" pitchFamily="2" charset="2"/>
               </a:rPr>
               <a:t>입력 </a:t>
             </a:r>
             <a:r>
-              <a:rPr lang="en-US" altLang="ko-KR" sz="2400" b="0" dirty="0">
+              <a:rPr lang="en-US" altLang="ko-KR" sz="2400" dirty="0">
                 <a:sym typeface="Wingdings" panose="05000000000000000000" pitchFamily="2" charset="2"/>
               </a:rPr>
               <a:t> </a:t>
             </a:r>
             <a:r>
-              <a:rPr lang="ko-KR" altLang="en-US" sz="2400" b="0" dirty="0">
+              <a:rPr lang="ko-KR" altLang="en-US" sz="2400" dirty="0">
                 <a:sym typeface="Wingdings" panose="05000000000000000000" pitchFamily="2" charset="2"/>
               </a:rPr>
               <a:t>실행 </a:t>
             </a:r>
             <a:r>
-              <a:rPr lang="en-US" altLang="ko-KR" sz="2400" b="0" dirty="0">
+              <a:rPr lang="en-US" altLang="ko-KR" sz="2400" dirty="0">
                 <a:sym typeface="Wingdings" panose="05000000000000000000" pitchFamily="2" charset="2"/>
               </a:rPr>
               <a:t> </a:t>
             </a:r>
             <a:r>
-              <a:rPr lang="ko-KR" altLang="en-US" sz="2400" b="0" dirty="0">
+              <a:rPr lang="ko-KR" altLang="en-US" sz="2400" dirty="0">
                 <a:sym typeface="Wingdings" panose="05000000000000000000" pitchFamily="2" charset="2"/>
               </a:rPr>
               <a:t>결과</a:t>
             </a:r>
-            <a:endParaRPr lang="en-US" altLang="ko-KR" sz="2400" b="0" dirty="0"/>
+            <a:endParaRPr lang="en-US" altLang="ko-KR" sz="2400" dirty="0"/>
           </a:p>
         </p:txBody>
       </p:sp>
@@ -8267,15 +8609,19 @@
             <a:pPr lvl="1"/>
             <a:r>
               <a:rPr lang="en-US" altLang="ko-KR" dirty="0"/>
-              <a:t>Shadowing</a:t>
-            </a:r>
-          </a:p>
-          <a:p>
-            <a:pPr lvl="2"/>
+              <a:t>Shadowing: </a:t>
+            </a:r>
             <a:r>
               <a:rPr lang="ko-KR" altLang="en-US" dirty="0"/>
               <a:t>내부 블록 변수가 외부 변수를 가림</a:t>
             </a:r>
+            <a:endParaRPr lang="en-US" altLang="ko-KR" dirty="0"/>
+          </a:p>
+          <a:p>
+            <a:pPr lvl="1"/>
+            <a:endParaRPr lang="en-US" altLang="ko-KR" dirty="0"/>
+          </a:p>
+          <a:p>
             <a:endParaRPr lang="en-US" altLang="ko-KR" dirty="0"/>
           </a:p>
           <a:p>
@@ -8361,8 +8707,8 @@
         </p:nvSpPr>
         <p:spPr>
           <a:xfrm>
-            <a:off x="1468327" y="3008222"/>
-            <a:ext cx="3096344" cy="1200329"/>
+            <a:off x="971600" y="2708920"/>
+            <a:ext cx="6264696" cy="1938992"/>
           </a:xfrm>
           <a:prstGeom prst="rect">
             <a:avLst/>
@@ -8384,45 +8730,133 @@
           <a:lstStyle/>
           <a:p>
             <a:r>
-              <a:rPr lang="en-US" altLang="ko-KR" sz="1800" b="1" dirty="0">
-                <a:latin typeface="Consolas" panose="020B0609020204030204" pitchFamily="49" charset="0"/>
-              </a:rPr>
-              <a:t>int value = 10;</a:t>
+              <a:rPr lang="en-US" altLang="ko-KR" sz="2800" b="1" dirty="0">
+                <a:solidFill>
+                  <a:srgbClr val="0070C0"/>
+                </a:solidFill>
+                <a:latin typeface="Consolas" panose="020B0609020204030204" pitchFamily="49" charset="0"/>
+              </a:rPr>
+              <a:t>int</a:t>
+            </a:r>
+            <a:r>
+              <a:rPr lang="en-US" altLang="ko-KR" sz="2800" b="1" dirty="0">
+                <a:latin typeface="Consolas" panose="020B0609020204030204" pitchFamily="49" charset="0"/>
+              </a:rPr>
+              <a:t> </a:t>
+            </a:r>
+            <a:r>
+              <a:rPr lang="en-US" altLang="ko-KR" sz="3200" b="1" dirty="0">
+                <a:solidFill>
+                  <a:srgbClr val="0000FF"/>
+                </a:solidFill>
+                <a:latin typeface="Consolas" panose="020B0609020204030204" pitchFamily="49" charset="0"/>
+              </a:rPr>
+              <a:t>value</a:t>
+            </a:r>
+            <a:r>
+              <a:rPr lang="en-US" altLang="ko-KR" sz="2800" b="1" dirty="0">
+                <a:latin typeface="Consolas" panose="020B0609020204030204" pitchFamily="49" charset="0"/>
+              </a:rPr>
+              <a:t> = </a:t>
+            </a:r>
+            <a:r>
+              <a:rPr lang="en-US" altLang="ko-KR" sz="2800" b="1" dirty="0">
+                <a:solidFill>
+                  <a:schemeClr val="bg1">
+                    <a:lumMod val="50000"/>
+                  </a:schemeClr>
+                </a:solidFill>
+                <a:latin typeface="Consolas" panose="020B0609020204030204" pitchFamily="49" charset="0"/>
+              </a:rPr>
+              <a:t>10</a:t>
+            </a:r>
+            <a:r>
+              <a:rPr lang="en-US" altLang="ko-KR" sz="2800" b="1" dirty="0">
+                <a:latin typeface="Consolas" panose="020B0609020204030204" pitchFamily="49" charset="0"/>
+              </a:rPr>
+              <a:t>;</a:t>
             </a:r>
             <a:br>
-              <a:rPr lang="en-US" altLang="ko-KR" sz="1800" b="1" dirty="0">
+              <a:rPr lang="en-US" altLang="ko-KR" sz="2800" b="1" dirty="0">
                 <a:latin typeface="Consolas" panose="020B0609020204030204" pitchFamily="49" charset="0"/>
               </a:rPr>
             </a:br>
             <a:r>
-              <a:rPr lang="en-US" altLang="ko-KR" sz="1800" b="1" dirty="0">
+              <a:rPr lang="en-US" altLang="ko-KR" sz="2800" b="1" dirty="0">
                 <a:latin typeface="Consolas" panose="020B0609020204030204" pitchFamily="49" charset="0"/>
               </a:rPr>
               <a:t>{</a:t>
             </a:r>
             <a:br>
-              <a:rPr lang="en-US" altLang="ko-KR" sz="1800" b="1" dirty="0">
+              <a:rPr lang="en-US" altLang="ko-KR" sz="2800" b="1" dirty="0">
                 <a:latin typeface="Consolas" panose="020B0609020204030204" pitchFamily="49" charset="0"/>
               </a:rPr>
             </a:br>
             <a:r>
-              <a:rPr lang="en-US" altLang="ko-KR" sz="1800" b="1" dirty="0">
-                <a:latin typeface="Consolas" panose="020B0609020204030204" pitchFamily="49" charset="0"/>
-              </a:rPr>
-              <a:t>    int value = 20;</a:t>
+              <a:rPr lang="en-US" altLang="ko-KR" sz="2800" b="1" dirty="0">
+                <a:latin typeface="Consolas" panose="020B0609020204030204" pitchFamily="49" charset="0"/>
+              </a:rPr>
+              <a:t>    </a:t>
+            </a:r>
+            <a:r>
+              <a:rPr lang="en-US" altLang="ko-KR" sz="2800" b="1" dirty="0">
+                <a:solidFill>
+                  <a:srgbClr val="0070C0"/>
+                </a:solidFill>
+                <a:latin typeface="Consolas" panose="020B0609020204030204" pitchFamily="49" charset="0"/>
+              </a:rPr>
+              <a:t>int</a:t>
+            </a:r>
+            <a:r>
+              <a:rPr lang="en-US" altLang="ko-KR" sz="2800" b="1" dirty="0">
+                <a:latin typeface="Consolas" panose="020B0609020204030204" pitchFamily="49" charset="0"/>
+              </a:rPr>
+              <a:t> </a:t>
+            </a:r>
+            <a:r>
+              <a:rPr lang="en-US" altLang="ko-KR" sz="3200" b="1" dirty="0">
+                <a:solidFill>
+                  <a:srgbClr val="0000FF"/>
+                </a:solidFill>
+                <a:latin typeface="Consolas" panose="020B0609020204030204" pitchFamily="49" charset="0"/>
+              </a:rPr>
+              <a:t>value</a:t>
+            </a:r>
+            <a:r>
+              <a:rPr lang="en-US" altLang="ko-KR" sz="2800" b="1" dirty="0">
+                <a:latin typeface="Consolas" panose="020B0609020204030204" pitchFamily="49" charset="0"/>
+              </a:rPr>
+              <a:t> = </a:t>
+            </a:r>
+            <a:r>
+              <a:rPr lang="en-US" altLang="ko-KR" sz="2800" b="1" dirty="0">
+                <a:solidFill>
+                  <a:schemeClr val="bg1">
+                    <a:lumMod val="50000"/>
+                  </a:schemeClr>
+                </a:solidFill>
+                <a:latin typeface="Consolas" panose="020B0609020204030204" pitchFamily="49" charset="0"/>
+              </a:rPr>
+              <a:t>20</a:t>
+            </a:r>
+            <a:r>
+              <a:rPr lang="en-US" altLang="ko-KR" sz="2800" b="1" dirty="0">
+                <a:latin typeface="Consolas" panose="020B0609020204030204" pitchFamily="49" charset="0"/>
+              </a:rPr>
+              <a:t>;</a:t>
             </a:r>
             <a:br>
-              <a:rPr lang="en-US" altLang="ko-KR" sz="1800" b="1" dirty="0">
+              <a:rPr lang="en-US" altLang="ko-KR" sz="2800" b="1" dirty="0">
                 <a:latin typeface="Consolas" panose="020B0609020204030204" pitchFamily="49" charset="0"/>
               </a:rPr>
             </a:br>
             <a:r>
-              <a:rPr lang="en-US" altLang="ko-KR" sz="1800" b="1" dirty="0">
+              <a:rPr lang="en-US" altLang="ko-KR" sz="2800" b="1" dirty="0">
                 <a:latin typeface="Consolas" panose="020B0609020204030204" pitchFamily="49" charset="0"/>
               </a:rPr>
               <a:t>}</a:t>
             </a:r>
-            <a:endParaRPr lang="ko-KR" altLang="en-US" sz="1800" b="1" dirty="0">
+            <a:endParaRPr lang="ko-KR" altLang="en-US" sz="2800" b="1" dirty="0">
               <a:latin typeface="Consolas" panose="020B0609020204030204" pitchFamily="49" charset="0"/>
             </a:endParaRPr>
           </a:p>
@@ -8480,15 +8914,15 @@
           <a:lstStyle/>
           <a:p>
             <a:r>
-              <a:rPr lang="en-US" altLang="ko-KR" b="0" dirty="0"/>
+              <a:rPr lang="en-US" altLang="ko-KR" dirty="0"/>
               <a:t>5.7.4 </a:t>
             </a:r>
             <a:r>
-              <a:rPr lang="ko-KR" altLang="en-US" b="0" dirty="0"/>
+              <a:rPr lang="ko-KR" altLang="en-US" dirty="0"/>
               <a:t>전역 변수</a:t>
             </a:r>
             <a:r>
-              <a:rPr lang="en-US" altLang="ko-KR" b="0" dirty="0"/>
+              <a:rPr lang="en-US" altLang="ko-KR" dirty="0"/>
               <a:t>(Global Variable)</a:t>
             </a:r>
             <a:endParaRPr lang="ko-KR" altLang="en-US" dirty="0"/>
@@ -8677,19 +9111,15 @@
           <a:lstStyle/>
           <a:p>
             <a:r>
-              <a:rPr lang="en-US" altLang="ko-KR" b="0" dirty="0"/>
-              <a:t>5.7.5 </a:t>
-            </a:r>
-            <a:r>
               <a:rPr lang="en-US" altLang="ko-KR" dirty="0"/>
-              <a:t>static </a:t>
+              <a:t>5.7.5 static </a:t>
             </a:r>
             <a:r>
               <a:rPr lang="ko-KR" altLang="en-US" dirty="0"/>
               <a:t>변수</a:t>
             </a:r>
             <a:r>
-              <a:rPr lang="en-US" altLang="ko-KR" b="0" dirty="0"/>
+              <a:rPr lang="en-US" altLang="ko-KR" dirty="0"/>
               <a:t>(Global Variable)</a:t>
             </a:r>
             <a:endParaRPr lang="ko-KR" altLang="en-US" dirty="0"/>
@@ -8850,8 +9280,8 @@
         </p:nvSpPr>
         <p:spPr>
           <a:xfrm>
-            <a:off x="5831881" y="2775486"/>
-            <a:ext cx="3312119" cy="3785652"/>
+            <a:off x="4932040" y="2276872"/>
+            <a:ext cx="3384376" cy="3785652"/>
           </a:xfrm>
           <a:prstGeom prst="rect">
             <a:avLst/>
@@ -8859,6 +9289,13 @@
           <a:solidFill>
             <a:srgbClr val="FFFFCC"/>
           </a:solidFill>
+          <a:ln w="38100">
+            <a:solidFill>
+              <a:schemeClr val="bg1">
+                <a:lumMod val="50000"/>
+              </a:schemeClr>
+            </a:solidFill>
+          </a:ln>
         </p:spPr>
         <p:txBody>
           <a:bodyPr wrap="square">
@@ -8874,7 +9311,18 @@
                 <a:effectLst/>
                 <a:latin typeface="Consolas" panose="020B0609020204030204" pitchFamily="49" charset="0"/>
               </a:rPr>
-              <a:t>     프로그램 시작</a:t>
+              <a:t>       </a:t>
+            </a:r>
+            <a:r>
+              <a:rPr lang="ko-KR" altLang="en-US" sz="1600" b="0" i="0" u="none" strike="noStrike" dirty="0">
+                <a:solidFill>
+                  <a:srgbClr val="383A42"/>
+                </a:solidFill>
+                <a:effectLst/>
+                <a:latin typeface="D2Coding" panose="020B0609020101020101" pitchFamily="49" charset="-127"/>
+                <a:ea typeface="D2Coding" panose="020B0609020101020101" pitchFamily="49" charset="-127"/>
+              </a:rPr>
+              <a:t>프로그램 시작</a:t>
             </a:r>
             <a:br>
               <a:rPr lang="ko-KR" altLang="en-US" sz="1600" b="0" i="0" u="none" strike="noStrike" dirty="0">
@@ -8882,7 +9330,8 @@
                   <a:srgbClr val="383A42"/>
                 </a:solidFill>
                 <a:effectLst/>
-                <a:latin typeface="Consolas" panose="020B0609020204030204" pitchFamily="49" charset="0"/>
+                <a:latin typeface="D2Coding" panose="020B0609020101020101" pitchFamily="49" charset="-127"/>
+                <a:ea typeface="D2Coding" panose="020B0609020101020101" pitchFamily="49" charset="-127"/>
               </a:rPr>
             </a:br>
             <a:r>
@@ -8891,9 +9340,10 @@
                   <a:srgbClr val="383A42"/>
                 </a:solidFill>
                 <a:effectLst/>
-                <a:latin typeface="Consolas" panose="020B0609020204030204" pitchFamily="49" charset="0"/>
-              </a:rPr>
-              <a:t>        │ </a:t>
+                <a:latin typeface="D2Coding" panose="020B0609020101020101" pitchFamily="49" charset="-127"/>
+                <a:ea typeface="D2Coding" panose="020B0609020101020101" pitchFamily="49" charset="-127"/>
+              </a:rPr>
+              <a:t>            │ </a:t>
             </a:r>
             <a:r>
               <a:rPr lang="en-US" altLang="ko-KR" sz="1600" b="0" i="0" u="none" strike="noStrike" dirty="0">
@@ -8901,7 +9351,8 @@
                   <a:srgbClr val="A626A4"/>
                 </a:solidFill>
                 <a:effectLst/>
-                <a:latin typeface="Consolas" panose="020B0609020204030204" pitchFamily="49" charset="0"/>
+                <a:latin typeface="D2Coding" panose="020B0609020101020101" pitchFamily="49" charset="-127"/>
+                <a:ea typeface="D2Coding" panose="020B0609020101020101" pitchFamily="49" charset="-127"/>
               </a:rPr>
               <a:t>static</a:t>
             </a:r>
@@ -8911,7 +9362,8 @@
                   <a:srgbClr val="383A42"/>
                 </a:solidFill>
                 <a:effectLst/>
-                <a:latin typeface="Consolas" panose="020B0609020204030204" pitchFamily="49" charset="0"/>
+                <a:latin typeface="D2Coding" panose="020B0609020101020101" pitchFamily="49" charset="-127"/>
+                <a:ea typeface="D2Coding" panose="020B0609020101020101" pitchFamily="49" charset="-127"/>
               </a:rPr>
               <a:t> 변수 생성</a:t>
             </a:r>
@@ -8921,7 +9373,8 @@
                   <a:srgbClr val="383A42"/>
                 </a:solidFill>
                 <a:effectLst/>
-                <a:latin typeface="Consolas" panose="020B0609020204030204" pitchFamily="49" charset="0"/>
+                <a:latin typeface="D2Coding" panose="020B0609020101020101" pitchFamily="49" charset="-127"/>
+                <a:ea typeface="D2Coding" panose="020B0609020101020101" pitchFamily="49" charset="-127"/>
               </a:rPr>
             </a:br>
             <a:r>
@@ -8930,9 +9383,10 @@
                   <a:srgbClr val="383A42"/>
                 </a:solidFill>
                 <a:effectLst/>
-                <a:latin typeface="Consolas" panose="020B0609020204030204" pitchFamily="49" charset="0"/>
-              </a:rPr>
-              <a:t>        ↓</a:t>
+                <a:latin typeface="D2Coding" panose="020B0609020101020101" pitchFamily="49" charset="-127"/>
+                <a:ea typeface="D2Coding" panose="020B0609020101020101" pitchFamily="49" charset="-127"/>
+              </a:rPr>
+              <a:t>            ↓</a:t>
             </a:r>
             <a:br>
               <a:rPr lang="ko-KR" altLang="en-US" sz="1600" b="0" i="0" u="none" strike="noStrike" dirty="0">
@@ -8940,7 +9394,8 @@
                   <a:srgbClr val="383A42"/>
                 </a:solidFill>
                 <a:effectLst/>
-                <a:latin typeface="Consolas" panose="020B0609020204030204" pitchFamily="49" charset="0"/>
+                <a:latin typeface="D2Coding" panose="020B0609020101020101" pitchFamily="49" charset="-127"/>
+                <a:ea typeface="D2Coding" panose="020B0609020101020101" pitchFamily="49" charset="-127"/>
               </a:rPr>
             </a:br>
             <a:r>
@@ -8949,16 +9404,18 @@
                   <a:srgbClr val="383A42"/>
                 </a:solidFill>
                 <a:effectLst/>
-                <a:latin typeface="Consolas" panose="020B0609020204030204" pitchFamily="49" charset="0"/>
-              </a:rPr>
-              <a:t>┌────────────────</a:t>
+                <a:latin typeface="D2Coding" panose="020B0609020101020101" pitchFamily="49" charset="-127"/>
+                <a:ea typeface="D2Coding" panose="020B0609020101020101" pitchFamily="49" charset="-127"/>
+              </a:rPr>
+              <a:t>  ┌────────────────</a:t>
             </a:r>
             <a:r>
               <a:rPr lang="ko-KR" altLang="en-US" sz="1600" dirty="0">
                 <a:solidFill>
                   <a:srgbClr val="383A42"/>
                 </a:solidFill>
-                <a:latin typeface="Consolas" panose="020B0609020204030204" pitchFamily="49" charset="0"/>
+                <a:latin typeface="D2Coding" panose="020B0609020101020101" pitchFamily="49" charset="-127"/>
+                <a:ea typeface="D2Coding" panose="020B0609020101020101" pitchFamily="49" charset="-127"/>
               </a:rPr>
               <a:t>─</a:t>
             </a:r>
@@ -8968,9 +9425,31 @@
                   <a:srgbClr val="383A42"/>
                 </a:solidFill>
                 <a:effectLst/>
-                <a:latin typeface="Consolas" panose="020B0609020204030204" pitchFamily="49" charset="0"/>
-              </a:rPr>
-              <a:t>───────┐</a:t>
+                <a:latin typeface="D2Coding" panose="020B0609020101020101" pitchFamily="49" charset="-127"/>
+                <a:ea typeface="D2Coding" panose="020B0609020101020101" pitchFamily="49" charset="-127"/>
+              </a:rPr>
+              <a:t>────</a:t>
+            </a:r>
+            <a:r>
+              <a:rPr lang="ko-KR" altLang="en-US" sz="1600" dirty="0">
+                <a:solidFill>
+                  <a:srgbClr val="383A42"/>
+                </a:solidFill>
+                <a:latin typeface="D2Coding" panose="020B0609020101020101" pitchFamily="49" charset="-127"/>
+                <a:ea typeface="D2Coding" panose="020B0609020101020101" pitchFamily="49" charset="-127"/>
+              </a:rPr>
+              <a:t>──</a:t>
+            </a:r>
+            <a:r>
+              <a:rPr lang="ko-KR" altLang="en-US" sz="1600" b="0" i="0" u="none" strike="noStrike" dirty="0">
+                <a:solidFill>
+                  <a:srgbClr val="383A42"/>
+                </a:solidFill>
+                <a:effectLst/>
+                <a:latin typeface="D2Coding" panose="020B0609020101020101" pitchFamily="49" charset="-127"/>
+                <a:ea typeface="D2Coding" panose="020B0609020101020101" pitchFamily="49" charset="-127"/>
+              </a:rPr>
+              <a:t>──┐</a:t>
             </a:r>
             <a:br>
               <a:rPr lang="ko-KR" altLang="en-US" sz="1600" b="0" i="0" u="none" strike="noStrike" dirty="0">
@@ -8978,7 +9457,8 @@
                   <a:srgbClr val="383A42"/>
                 </a:solidFill>
                 <a:effectLst/>
-                <a:latin typeface="Consolas" panose="020B0609020204030204" pitchFamily="49" charset="0"/>
+                <a:latin typeface="D2Coding" panose="020B0609020101020101" pitchFamily="49" charset="-127"/>
+                <a:ea typeface="D2Coding" panose="020B0609020101020101" pitchFamily="49" charset="-127"/>
               </a:rPr>
             </a:br>
             <a:r>
@@ -8987,9 +9467,10 @@
                   <a:srgbClr val="383A42"/>
                 </a:solidFill>
                 <a:effectLst/>
-                <a:latin typeface="Consolas" panose="020B0609020204030204" pitchFamily="49" charset="0"/>
-              </a:rPr>
-              <a:t>│ </a:t>
+                <a:latin typeface="D2Coding" panose="020B0609020101020101" pitchFamily="49" charset="-127"/>
+                <a:ea typeface="D2Coding" panose="020B0609020101020101" pitchFamily="49" charset="-127"/>
+              </a:rPr>
+              <a:t>  │ </a:t>
             </a:r>
             <a:r>
               <a:rPr lang="en-US" altLang="ko-KR" sz="1600" b="0" i="0" u="none" strike="noStrike" dirty="0">
@@ -8997,7 +9478,8 @@
                   <a:srgbClr val="A626A4"/>
                 </a:solidFill>
                 <a:effectLst/>
-                <a:latin typeface="Consolas" panose="020B0609020204030204" pitchFamily="49" charset="0"/>
+                <a:latin typeface="D2Coding" panose="020B0609020101020101" pitchFamily="49" charset="-127"/>
+                <a:ea typeface="D2Coding" panose="020B0609020101020101" pitchFamily="49" charset="-127"/>
               </a:rPr>
               <a:t>static</a:t>
             </a:r>
@@ -9007,7 +9489,8 @@
                   <a:srgbClr val="383A42"/>
                 </a:solidFill>
                 <a:effectLst/>
-                <a:latin typeface="Consolas" panose="020B0609020204030204" pitchFamily="49" charset="0"/>
+                <a:latin typeface="D2Coding" panose="020B0609020101020101" pitchFamily="49" charset="-127"/>
+                <a:ea typeface="D2Coding" panose="020B0609020101020101" pitchFamily="49" charset="-127"/>
               </a:rPr>
               <a:t> 변수 </a:t>
             </a:r>
@@ -9017,7 +9500,8 @@
                   <a:srgbClr val="383A42"/>
                 </a:solidFill>
                 <a:effectLst/>
-                <a:latin typeface="Consolas" panose="020B0609020204030204" pitchFamily="49" charset="0"/>
+                <a:latin typeface="D2Coding" panose="020B0609020101020101" pitchFamily="49" charset="-127"/>
+                <a:ea typeface="D2Coding" panose="020B0609020101020101" pitchFamily="49" charset="-127"/>
               </a:rPr>
               <a:t>(</a:t>
             </a:r>
@@ -9027,7 +9511,8 @@
                   <a:srgbClr val="383A42"/>
                 </a:solidFill>
                 <a:effectLst/>
-                <a:latin typeface="Consolas" panose="020B0609020204030204" pitchFamily="49" charset="0"/>
+                <a:latin typeface="D2Coding" panose="020B0609020101020101" pitchFamily="49" charset="-127"/>
+                <a:ea typeface="D2Coding" panose="020B0609020101020101" pitchFamily="49" charset="-127"/>
               </a:rPr>
               <a:t>정적 영역</a:t>
             </a:r>
@@ -9037,7 +9522,8 @@
                   <a:srgbClr val="383A42"/>
                 </a:solidFill>
                 <a:effectLst/>
-                <a:latin typeface="Consolas" panose="020B0609020204030204" pitchFamily="49" charset="0"/>
+                <a:latin typeface="D2Coding" panose="020B0609020101020101" pitchFamily="49" charset="-127"/>
+                <a:ea typeface="D2Coding" panose="020B0609020101020101" pitchFamily="49" charset="-127"/>
               </a:rPr>
               <a:t>) │</a:t>
             </a:r>
@@ -9047,7 +9533,8 @@
                   <a:srgbClr val="383A42"/>
                 </a:solidFill>
                 <a:effectLst/>
-                <a:latin typeface="Consolas" panose="020B0609020204030204" pitchFamily="49" charset="0"/>
+                <a:latin typeface="D2Coding" panose="020B0609020101020101" pitchFamily="49" charset="-127"/>
+                <a:ea typeface="D2Coding" panose="020B0609020101020101" pitchFamily="49" charset="-127"/>
               </a:rPr>
             </a:br>
             <a:r>
@@ -9056,9 +9543,10 @@
                   <a:srgbClr val="383A42"/>
                 </a:solidFill>
                 <a:effectLst/>
-                <a:latin typeface="Consolas" panose="020B0609020204030204" pitchFamily="49" charset="0"/>
-              </a:rPr>
-              <a:t>│                        │</a:t>
+                <a:latin typeface="D2Coding" panose="020B0609020101020101" pitchFamily="49" charset="-127"/>
+                <a:ea typeface="D2Coding" panose="020B0609020101020101" pitchFamily="49" charset="-127"/>
+              </a:rPr>
+              <a:t>  │                         │</a:t>
             </a:r>
             <a:br>
               <a:rPr lang="en-US" altLang="ko-KR" sz="1600" b="0" i="0" u="none" strike="noStrike" dirty="0">
@@ -9066,7 +9554,8 @@
                   <a:srgbClr val="383A42"/>
                 </a:solidFill>
                 <a:effectLst/>
-                <a:latin typeface="Consolas" panose="020B0609020204030204" pitchFamily="49" charset="0"/>
+                <a:latin typeface="D2Coding" panose="020B0609020101020101" pitchFamily="49" charset="-127"/>
+                <a:ea typeface="D2Coding" panose="020B0609020101020101" pitchFamily="49" charset="-127"/>
               </a:rPr>
             </a:br>
             <a:r>
@@ -9075,9 +9564,10 @@
                   <a:srgbClr val="383A42"/>
                 </a:solidFill>
                 <a:effectLst/>
-                <a:latin typeface="Consolas" panose="020B0609020204030204" pitchFamily="49" charset="0"/>
-              </a:rPr>
-              <a:t>│ </a:t>
+                <a:latin typeface="D2Coding" panose="020B0609020101020101" pitchFamily="49" charset="-127"/>
+                <a:ea typeface="D2Coding" panose="020B0609020101020101" pitchFamily="49" charset="-127"/>
+              </a:rPr>
+              <a:t>  │ </a:t>
             </a:r>
             <a:r>
               <a:rPr lang="ko-KR" altLang="en-US" sz="1600" b="0" i="0" u="none" strike="noStrike" dirty="0">
@@ -9085,9 +9575,10 @@
                   <a:srgbClr val="383A42"/>
                 </a:solidFill>
                 <a:effectLst/>
-                <a:latin typeface="Consolas" panose="020B0609020204030204" pitchFamily="49" charset="0"/>
-              </a:rPr>
-              <a:t>프로그램 전체 동안 유지  │</a:t>
+                <a:latin typeface="D2Coding" panose="020B0609020101020101" pitchFamily="49" charset="-127"/>
+                <a:ea typeface="D2Coding" panose="020B0609020101020101" pitchFamily="49" charset="-127"/>
+              </a:rPr>
+              <a:t>프로그램 전체 동안 유지 │</a:t>
             </a:r>
             <a:br>
               <a:rPr lang="ko-KR" altLang="en-US" sz="1600" b="0" i="0" u="none" strike="noStrike" dirty="0">
@@ -9095,7 +9586,8 @@
                   <a:srgbClr val="383A42"/>
                 </a:solidFill>
                 <a:effectLst/>
-                <a:latin typeface="Consolas" panose="020B0609020204030204" pitchFamily="49" charset="0"/>
+                <a:latin typeface="D2Coding" panose="020B0609020101020101" pitchFamily="49" charset="-127"/>
+                <a:ea typeface="D2Coding" panose="020B0609020101020101" pitchFamily="49" charset="-127"/>
               </a:rPr>
             </a:br>
             <a:r>
@@ -9104,9 +9596,10 @@
                   <a:srgbClr val="383A42"/>
                 </a:solidFill>
                 <a:effectLst/>
-                <a:latin typeface="Consolas" panose="020B0609020204030204" pitchFamily="49" charset="0"/>
-              </a:rPr>
-              <a:t>│                        │</a:t>
+                <a:latin typeface="D2Coding" panose="020B0609020101020101" pitchFamily="49" charset="-127"/>
+                <a:ea typeface="D2Coding" panose="020B0609020101020101" pitchFamily="49" charset="-127"/>
+              </a:rPr>
+              <a:t>  │                         │</a:t>
             </a:r>
             <a:br>
               <a:rPr lang="ko-KR" altLang="en-US" sz="1600" b="0" i="0" u="none" strike="noStrike" dirty="0">
@@ -9114,7 +9607,8 @@
                   <a:srgbClr val="383A42"/>
                 </a:solidFill>
                 <a:effectLst/>
-                <a:latin typeface="Consolas" panose="020B0609020204030204" pitchFamily="49" charset="0"/>
+                <a:latin typeface="D2Coding" panose="020B0609020101020101" pitchFamily="49" charset="-127"/>
+                <a:ea typeface="D2Coding" panose="020B0609020101020101" pitchFamily="49" charset="-127"/>
               </a:rPr>
             </a:br>
             <a:r>
@@ -9123,9 +9617,10 @@
                   <a:srgbClr val="383A42"/>
                 </a:solidFill>
                 <a:effectLst/>
-                <a:latin typeface="Consolas" panose="020B0609020204030204" pitchFamily="49" charset="0"/>
-              </a:rPr>
-              <a:t>│     함수 호출 </a:t>
+                <a:latin typeface="D2Coding" panose="020B0609020101020101" pitchFamily="49" charset="-127"/>
+                <a:ea typeface="D2Coding" panose="020B0609020101020101" pitchFamily="49" charset="-127"/>
+              </a:rPr>
+              <a:t>  │       함수 호출 </a:t>
             </a:r>
             <a:r>
               <a:rPr lang="en-US" altLang="ko-KR" sz="1600" b="0" i="0" u="none" strike="noStrike" dirty="0">
@@ -9133,7 +9628,8 @@
                   <a:srgbClr val="986801"/>
                 </a:solidFill>
                 <a:effectLst/>
-                <a:latin typeface="Consolas" panose="020B0609020204030204" pitchFamily="49" charset="0"/>
+                <a:latin typeface="D2Coding" panose="020B0609020101020101" pitchFamily="49" charset="-127"/>
+                <a:ea typeface="D2Coding" panose="020B0609020101020101" pitchFamily="49" charset="-127"/>
               </a:rPr>
               <a:t>1</a:t>
             </a:r>
@@ -9143,9 +9639,10 @@
                   <a:srgbClr val="383A42"/>
                 </a:solidFill>
                 <a:effectLst/>
-                <a:latin typeface="Consolas" panose="020B0609020204030204" pitchFamily="49" charset="0"/>
-              </a:rPr>
-              <a:t>         │</a:t>
+                <a:latin typeface="D2Coding" panose="020B0609020101020101" pitchFamily="49" charset="-127"/>
+                <a:ea typeface="D2Coding" panose="020B0609020101020101" pitchFamily="49" charset="-127"/>
+              </a:rPr>
+              <a:t>       │</a:t>
             </a:r>
             <a:br>
               <a:rPr lang="ko-KR" altLang="en-US" sz="1600" b="0" i="0" u="none" strike="noStrike" dirty="0">
@@ -9153,7 +9650,8 @@
                   <a:srgbClr val="383A42"/>
                 </a:solidFill>
                 <a:effectLst/>
-                <a:latin typeface="Consolas" panose="020B0609020204030204" pitchFamily="49" charset="0"/>
+                <a:latin typeface="D2Coding" panose="020B0609020101020101" pitchFamily="49" charset="-127"/>
+                <a:ea typeface="D2Coding" panose="020B0609020101020101" pitchFamily="49" charset="-127"/>
               </a:rPr>
             </a:br>
             <a:r>
@@ -9162,9 +9660,10 @@
                   <a:srgbClr val="383A42"/>
                 </a:solidFill>
                 <a:effectLst/>
-                <a:latin typeface="Consolas" panose="020B0609020204030204" pitchFamily="49" charset="0"/>
-              </a:rPr>
-              <a:t>│     함수 호출 </a:t>
+                <a:latin typeface="D2Coding" panose="020B0609020101020101" pitchFamily="49" charset="-127"/>
+                <a:ea typeface="D2Coding" panose="020B0609020101020101" pitchFamily="49" charset="-127"/>
+              </a:rPr>
+              <a:t>  │       함수 호출 </a:t>
             </a:r>
             <a:r>
               <a:rPr lang="en-US" altLang="ko-KR" sz="1600" b="0" i="0" u="none" strike="noStrike" dirty="0">
@@ -9172,7 +9671,8 @@
                   <a:srgbClr val="986801"/>
                 </a:solidFill>
                 <a:effectLst/>
-                <a:latin typeface="Consolas" panose="020B0609020204030204" pitchFamily="49" charset="0"/>
+                <a:latin typeface="D2Coding" panose="020B0609020101020101" pitchFamily="49" charset="-127"/>
+                <a:ea typeface="D2Coding" panose="020B0609020101020101" pitchFamily="49" charset="-127"/>
               </a:rPr>
               <a:t>2</a:t>
             </a:r>
@@ -9182,9 +9682,10 @@
                   <a:srgbClr val="383A42"/>
                 </a:solidFill>
                 <a:effectLst/>
-                <a:latin typeface="Consolas" panose="020B0609020204030204" pitchFamily="49" charset="0"/>
-              </a:rPr>
-              <a:t>         │</a:t>
+                <a:latin typeface="D2Coding" panose="020B0609020101020101" pitchFamily="49" charset="-127"/>
+                <a:ea typeface="D2Coding" panose="020B0609020101020101" pitchFamily="49" charset="-127"/>
+              </a:rPr>
+              <a:t>       │</a:t>
             </a:r>
             <a:br>
               <a:rPr lang="ko-KR" altLang="en-US" sz="1600" b="0" i="0" u="none" strike="noStrike" dirty="0">
@@ -9192,7 +9693,8 @@
                   <a:srgbClr val="383A42"/>
                 </a:solidFill>
                 <a:effectLst/>
-                <a:latin typeface="Consolas" panose="020B0609020204030204" pitchFamily="49" charset="0"/>
+                <a:latin typeface="D2Coding" panose="020B0609020101020101" pitchFamily="49" charset="-127"/>
+                <a:ea typeface="D2Coding" panose="020B0609020101020101" pitchFamily="49" charset="-127"/>
               </a:rPr>
             </a:br>
             <a:r>
@@ -9201,9 +9703,10 @@
                   <a:srgbClr val="383A42"/>
                 </a:solidFill>
                 <a:effectLst/>
-                <a:latin typeface="Consolas" panose="020B0609020204030204" pitchFamily="49" charset="0"/>
-              </a:rPr>
-              <a:t>│     함수 호출 </a:t>
+                <a:latin typeface="D2Coding" panose="020B0609020101020101" pitchFamily="49" charset="-127"/>
+                <a:ea typeface="D2Coding" panose="020B0609020101020101" pitchFamily="49" charset="-127"/>
+              </a:rPr>
+              <a:t>  │       함수 호출 </a:t>
             </a:r>
             <a:r>
               <a:rPr lang="en-US" altLang="ko-KR" sz="1600" b="0" i="0" u="none" strike="noStrike" dirty="0">
@@ -9211,7 +9714,8 @@
                   <a:srgbClr val="986801"/>
                 </a:solidFill>
                 <a:effectLst/>
-                <a:latin typeface="Consolas" panose="020B0609020204030204" pitchFamily="49" charset="0"/>
+                <a:latin typeface="D2Coding" panose="020B0609020101020101" pitchFamily="49" charset="-127"/>
+                <a:ea typeface="D2Coding" panose="020B0609020101020101" pitchFamily="49" charset="-127"/>
               </a:rPr>
               <a:t>3</a:t>
             </a:r>
@@ -9221,9 +9725,10 @@
                   <a:srgbClr val="383A42"/>
                 </a:solidFill>
                 <a:effectLst/>
-                <a:latin typeface="Consolas" panose="020B0609020204030204" pitchFamily="49" charset="0"/>
-              </a:rPr>
-              <a:t>         │</a:t>
+                <a:latin typeface="D2Coding" panose="020B0609020101020101" pitchFamily="49" charset="-127"/>
+                <a:ea typeface="D2Coding" panose="020B0609020101020101" pitchFamily="49" charset="-127"/>
+              </a:rPr>
+              <a:t>       │</a:t>
             </a:r>
             <a:br>
               <a:rPr lang="ko-KR" altLang="en-US" sz="1600" b="0" i="0" u="none" strike="noStrike" dirty="0">
@@ -9231,7 +9736,8 @@
                   <a:srgbClr val="383A42"/>
                 </a:solidFill>
                 <a:effectLst/>
-                <a:latin typeface="Consolas" panose="020B0609020204030204" pitchFamily="49" charset="0"/>
+                <a:latin typeface="D2Coding" panose="020B0609020101020101" pitchFamily="49" charset="-127"/>
+                <a:ea typeface="D2Coding" panose="020B0609020101020101" pitchFamily="49" charset="-127"/>
               </a:rPr>
             </a:br>
             <a:r>
@@ -9240,9 +9746,10 @@
                   <a:srgbClr val="383A42"/>
                 </a:solidFill>
                 <a:effectLst/>
-                <a:latin typeface="Consolas" panose="020B0609020204030204" pitchFamily="49" charset="0"/>
-              </a:rPr>
-              <a:t>│         </a:t>
+                <a:latin typeface="D2Coding" panose="020B0609020101020101" pitchFamily="49" charset="-127"/>
+                <a:ea typeface="D2Coding" panose="020B0609020101020101" pitchFamily="49" charset="-127"/>
+              </a:rPr>
+              <a:t>  │          </a:t>
             </a:r>
             <a:r>
               <a:rPr lang="en-US" altLang="ko-KR" sz="1600" b="0" i="0" u="none" strike="noStrike" dirty="0">
@@ -9250,9 +9757,10 @@
                   <a:srgbClr val="383A42"/>
                 </a:solidFill>
                 <a:effectLst/>
-                <a:latin typeface="Consolas" panose="020B0609020204030204" pitchFamily="49" charset="0"/>
-              </a:rPr>
-              <a:t>...            │</a:t>
+                <a:latin typeface="D2Coding" panose="020B0609020101020101" pitchFamily="49" charset="-127"/>
+                <a:ea typeface="D2Coding" panose="020B0609020101020101" pitchFamily="49" charset="-127"/>
+              </a:rPr>
+              <a:t>...            │</a:t>
             </a:r>
             <a:br>
               <a:rPr lang="en-US" altLang="ko-KR" sz="1600" b="0" i="0" u="none" strike="noStrike" dirty="0">
@@ -9260,7 +9768,8 @@
                   <a:srgbClr val="383A42"/>
                 </a:solidFill>
                 <a:effectLst/>
-                <a:latin typeface="Consolas" panose="020B0609020204030204" pitchFamily="49" charset="0"/>
+                <a:latin typeface="D2Coding" panose="020B0609020101020101" pitchFamily="49" charset="-127"/>
+                <a:ea typeface="D2Coding" panose="020B0609020101020101" pitchFamily="49" charset="-127"/>
               </a:rPr>
             </a:br>
             <a:r>
@@ -9269,16 +9778,18 @@
                   <a:srgbClr val="383A42"/>
                 </a:solidFill>
                 <a:effectLst/>
-                <a:latin typeface="Consolas" panose="020B0609020204030204" pitchFamily="49" charset="0"/>
-              </a:rPr>
-              <a:t>└────────────────────</a:t>
+                <a:latin typeface="D2Coding" panose="020B0609020101020101" pitchFamily="49" charset="-127"/>
+                <a:ea typeface="D2Coding" panose="020B0609020101020101" pitchFamily="49" charset="-127"/>
+              </a:rPr>
+              <a:t>  └────────────────────</a:t>
             </a:r>
             <a:r>
               <a:rPr lang="ko-KR" altLang="en-US" sz="1600" dirty="0">
                 <a:solidFill>
                   <a:srgbClr val="383A42"/>
                 </a:solidFill>
-                <a:latin typeface="Consolas" panose="020B0609020204030204" pitchFamily="49" charset="0"/>
+                <a:latin typeface="D2Coding" panose="020B0609020101020101" pitchFamily="49" charset="-127"/>
+                <a:ea typeface="D2Coding" panose="020B0609020101020101" pitchFamily="49" charset="-127"/>
               </a:rPr>
               <a:t>─</a:t>
             </a:r>
@@ -9288,9 +9799,31 @@
                   <a:srgbClr val="383A42"/>
                 </a:solidFill>
                 <a:effectLst/>
-                <a:latin typeface="Consolas" panose="020B0609020204030204" pitchFamily="49" charset="0"/>
-              </a:rPr>
-              <a:t>───┘</a:t>
+                <a:latin typeface="D2Coding" panose="020B0609020101020101" pitchFamily="49" charset="-127"/>
+                <a:ea typeface="D2Coding" panose="020B0609020101020101" pitchFamily="49" charset="-127"/>
+              </a:rPr>
+              <a:t>─</a:t>
+            </a:r>
+            <a:r>
+              <a:rPr lang="en-US" altLang="ko-KR" sz="1600" dirty="0">
+                <a:solidFill>
+                  <a:srgbClr val="383A42"/>
+                </a:solidFill>
+                <a:latin typeface="D2Coding" panose="020B0609020101020101" pitchFamily="49" charset="-127"/>
+                <a:ea typeface="D2Coding" panose="020B0609020101020101" pitchFamily="49" charset="-127"/>
+              </a:rPr>
+              <a:t>─</a:t>
+            </a:r>
+            <a:r>
+              <a:rPr lang="en-US" altLang="ko-KR" sz="1600" b="0" i="0" u="none" strike="noStrike" dirty="0">
+                <a:solidFill>
+                  <a:srgbClr val="383A42"/>
+                </a:solidFill>
+                <a:effectLst/>
+                <a:latin typeface="D2Coding" panose="020B0609020101020101" pitchFamily="49" charset="-127"/>
+                <a:ea typeface="D2Coding" panose="020B0609020101020101" pitchFamily="49" charset="-127"/>
+              </a:rPr>
+              <a:t>──┘</a:t>
             </a:r>
             <a:br>
               <a:rPr lang="en-US" altLang="ko-KR" sz="1600" b="0" i="0" u="none" strike="noStrike" dirty="0">
@@ -9298,7 +9831,8 @@
                   <a:srgbClr val="383A42"/>
                 </a:solidFill>
                 <a:effectLst/>
-                <a:latin typeface="Consolas" panose="020B0609020204030204" pitchFamily="49" charset="0"/>
+                <a:latin typeface="D2Coding" panose="020B0609020101020101" pitchFamily="49" charset="-127"/>
+                <a:ea typeface="D2Coding" panose="020B0609020101020101" pitchFamily="49" charset="-127"/>
               </a:rPr>
             </a:br>
             <a:r>
@@ -9307,9 +9841,10 @@
                   <a:srgbClr val="383A42"/>
                 </a:solidFill>
                 <a:effectLst/>
-                <a:latin typeface="Consolas" panose="020B0609020204030204" pitchFamily="49" charset="0"/>
-              </a:rPr>
-              <a:t>          ↑</a:t>
+                <a:latin typeface="D2Coding" panose="020B0609020101020101" pitchFamily="49" charset="-127"/>
+                <a:ea typeface="D2Coding" panose="020B0609020101020101" pitchFamily="49" charset="-127"/>
+              </a:rPr>
+              <a:t>            ↑</a:t>
             </a:r>
             <a:br>
               <a:rPr lang="en-US" altLang="ko-KR" sz="1600" b="0" i="0" u="none" strike="noStrike" dirty="0">
@@ -9317,7 +9852,8 @@
                   <a:srgbClr val="383A42"/>
                 </a:solidFill>
                 <a:effectLst/>
-                <a:latin typeface="Consolas" panose="020B0609020204030204" pitchFamily="49" charset="0"/>
+                <a:latin typeface="D2Coding" panose="020B0609020101020101" pitchFamily="49" charset="-127"/>
+                <a:ea typeface="D2Coding" panose="020B0609020101020101" pitchFamily="49" charset="-127"/>
               </a:rPr>
             </a:br>
             <a:r>
@@ -9326,9 +9862,10 @@
                   <a:srgbClr val="383A42"/>
                 </a:solidFill>
                 <a:effectLst/>
-                <a:latin typeface="Consolas" panose="020B0609020204030204" pitchFamily="49" charset="0"/>
-              </a:rPr>
-              <a:t>  </a:t>
+                <a:latin typeface="D2Coding" panose="020B0609020101020101" pitchFamily="49" charset="-127"/>
+                <a:ea typeface="D2Coding" panose="020B0609020101020101" pitchFamily="49" charset="-127"/>
+              </a:rPr>
+              <a:t>   </a:t>
             </a:r>
             <a:r>
               <a:rPr lang="ko-KR" altLang="en-US" sz="1600" b="0" i="0" u="none" strike="noStrike" dirty="0">
@@ -9336,12 +9873,25 @@
                   <a:srgbClr val="383A42"/>
                 </a:solidFill>
                 <a:effectLst/>
-                <a:latin typeface="Consolas" panose="020B0609020204030204" pitchFamily="49" charset="0"/>
+                <a:latin typeface="D2Coding" panose="020B0609020101020101" pitchFamily="49" charset="-127"/>
+                <a:ea typeface="D2Coding" panose="020B0609020101020101" pitchFamily="49" charset="-127"/>
               </a:rPr>
               <a:t>프로그램 종료 시 소멸</a:t>
             </a:r>
+            <a:r>
+              <a:rPr lang="en-US" altLang="ko-KR" sz="1600" b="0" i="0" u="none" strike="noStrike" dirty="0">
+                <a:solidFill>
+                  <a:srgbClr val="383A42"/>
+                </a:solidFill>
+                <a:effectLst/>
+                <a:latin typeface="D2Coding" panose="020B0609020101020101" pitchFamily="49" charset="-127"/>
+                <a:ea typeface="D2Coding" panose="020B0609020101020101" pitchFamily="49" charset="-127"/>
+              </a:rPr>
+              <a:t>5</a:t>
+            </a:r>
             <a:endParaRPr lang="ko-KR" altLang="en-US" sz="1600" dirty="0">
-              <a:latin typeface="Consolas" panose="020B0609020204030204" pitchFamily="49" charset="0"/>
+              <a:latin typeface="D2Coding" panose="020B0609020101020101" pitchFamily="49" charset="-127"/>
+              <a:ea typeface="D2Coding" panose="020B0609020101020101" pitchFamily="49" charset="-127"/>
             </a:endParaRPr>
           </a:p>
         </p:txBody>
@@ -9404,12 +9954,8 @@
           <a:lstStyle/>
           <a:p>
             <a:r>
-              <a:rPr lang="en-US" altLang="ko-KR" b="0" dirty="0"/>
-              <a:t>5.7.6 </a:t>
-            </a:r>
-            <a:r>
               <a:rPr lang="en-US" altLang="ko-KR" dirty="0"/>
-              <a:t>register </a:t>
+              <a:t>5.7.6 register </a:t>
             </a:r>
             <a:r>
               <a:rPr lang="ko-KR" altLang="en-US" dirty="0"/>
@@ -9599,14 +10145,13 @@
           <a:lstStyle/>
           <a:p>
             <a:r>
-              <a:rPr lang="en-US" altLang="ko-KR" b="0" dirty="0"/>
+              <a:rPr lang="en-US" altLang="ko-KR" dirty="0"/>
               <a:t>5.8 </a:t>
             </a:r>
             <a:r>
-              <a:rPr lang="ko-KR" altLang="en-US" b="0" dirty="0"/>
+              <a:rPr lang="ko-KR" altLang="en-US" dirty="0"/>
               <a:t>재귀 함수</a:t>
             </a:r>
-            <a:endParaRPr lang="ko-KR" altLang="en-US" dirty="0"/>
           </a:p>
         </p:txBody>
       </p:sp>
@@ -9892,14 +10437,13 @@
           <a:lstStyle/>
           <a:p>
             <a:r>
-              <a:rPr lang="en-US" altLang="ko-KR" b="0" dirty="0"/>
+              <a:rPr lang="en-US" altLang="ko-KR" dirty="0"/>
               <a:t>5.8 </a:t>
             </a:r>
             <a:r>
-              <a:rPr lang="ko-KR" altLang="en-US" b="0" dirty="0"/>
+              <a:rPr lang="ko-KR" altLang="en-US" dirty="0"/>
               <a:t>재귀 함수</a:t>
             </a:r>
-            <a:endParaRPr lang="ko-KR" altLang="en-US" dirty="0"/>
           </a:p>
         </p:txBody>
       </p:sp>
@@ -10043,7 +10587,7 @@
           <a:lstStyle/>
           <a:p>
             <a:r>
-              <a:rPr lang="ko-KR" altLang="en-US" sz="2400" b="0" i="0" u="none" strike="noStrike" dirty="0">
+              <a:rPr lang="ko-KR" altLang="en-US" sz="2400" b="1" i="0" u="none" strike="noStrike" dirty="0">
                 <a:solidFill>
                   <a:srgbClr val="383A42"/>
                 </a:solidFill>
@@ -10053,7 +10597,7 @@
               <a:t>반환형 함수이름</a:t>
             </a:r>
             <a:r>
-              <a:rPr lang="en-US" altLang="ko-KR" sz="2400" b="0" i="0" u="none" strike="noStrike" dirty="0">
+              <a:rPr lang="en-US" altLang="ko-KR" sz="2400" b="1" i="0" u="none" strike="noStrike" dirty="0">
                 <a:solidFill>
                   <a:srgbClr val="383A42"/>
                 </a:solidFill>
@@ -10063,7 +10607,7 @@
               <a:t>(</a:t>
             </a:r>
             <a:r>
-              <a:rPr lang="ko-KR" altLang="en-US" sz="2400" b="0" i="0" u="none" strike="noStrike" dirty="0">
+              <a:rPr lang="ko-KR" altLang="en-US" sz="2400" b="1" i="0" u="none" strike="noStrike" dirty="0">
                 <a:solidFill>
                   <a:srgbClr val="383A42"/>
                 </a:solidFill>
@@ -10073,7 +10617,7 @@
               <a:t>매개변수</a:t>
             </a:r>
             <a:r>
-              <a:rPr lang="en-US" altLang="ko-KR" sz="2400" b="0" i="0" u="none" strike="noStrike" dirty="0">
+              <a:rPr lang="en-US" altLang="ko-KR" sz="2400" b="1" i="0" u="none" strike="noStrike" dirty="0">
                 <a:solidFill>
                   <a:srgbClr val="383A42"/>
                 </a:solidFill>
@@ -10083,7 +10627,7 @@
               <a:t>)</a:t>
             </a:r>
             <a:br>
-              <a:rPr lang="en-US" altLang="ko-KR" sz="2400" b="0" i="0" u="none" strike="noStrike" dirty="0">
+              <a:rPr lang="en-US" altLang="ko-KR" sz="2400" b="1" i="0" u="none" strike="noStrike" dirty="0">
                 <a:solidFill>
                   <a:srgbClr val="383A42"/>
                 </a:solidFill>
@@ -10092,7 +10636,7 @@
               </a:rPr>
             </a:br>
             <a:r>
-              <a:rPr lang="en-US" altLang="ko-KR" sz="2400" b="0" i="0" u="none" strike="noStrike" dirty="0">
+              <a:rPr lang="en-US" altLang="ko-KR" sz="2400" b="1" i="0" u="none" strike="noStrike" dirty="0">
                 <a:solidFill>
                   <a:srgbClr val="383A42"/>
                 </a:solidFill>
@@ -10102,7 +10646,7 @@
               <a:t>{</a:t>
             </a:r>
             <a:br>
-              <a:rPr lang="en-US" altLang="ko-KR" sz="2400" b="0" i="0" u="none" strike="noStrike" dirty="0">
+              <a:rPr lang="en-US" altLang="ko-KR" sz="2400" b="1" i="0" u="none" strike="noStrike" dirty="0">
                 <a:solidFill>
                   <a:srgbClr val="383A42"/>
                 </a:solidFill>
@@ -10111,7 +10655,7 @@
               </a:rPr>
             </a:br>
             <a:r>
-              <a:rPr lang="en-US" altLang="ko-KR" sz="2400" b="0" i="0" u="none" strike="noStrike" dirty="0">
+              <a:rPr lang="en-US" altLang="ko-KR" sz="2400" b="1" i="0" u="none" strike="noStrike" dirty="0">
                 <a:solidFill>
                   <a:srgbClr val="383A42"/>
                 </a:solidFill>
@@ -10121,7 +10665,7 @@
               <a:t>    </a:t>
             </a:r>
             <a:r>
-              <a:rPr lang="en-US" altLang="ko-KR" sz="2400" b="0" i="0" u="none" strike="noStrike" dirty="0">
+              <a:rPr lang="en-US" altLang="ko-KR" sz="2400" b="1" i="0" u="none" strike="noStrike" dirty="0">
                 <a:solidFill>
                   <a:srgbClr val="A626A4"/>
                 </a:solidFill>
@@ -10131,7 +10675,7 @@
               <a:t>if</a:t>
             </a:r>
             <a:r>
-              <a:rPr lang="ko-KR" altLang="en-US" sz="2400" b="0" i="0" u="none" strike="noStrike" dirty="0">
+              <a:rPr lang="ko-KR" altLang="en-US" sz="2400" b="1" i="0" u="none" strike="noStrike" dirty="0">
                 <a:solidFill>
                   <a:srgbClr val="383A42"/>
                 </a:solidFill>
@@ -10141,7 +10685,7 @@
               <a:t> </a:t>
             </a:r>
             <a:r>
-              <a:rPr lang="en-US" altLang="ko-KR" sz="2400" b="0" i="0" u="none" strike="noStrike" dirty="0">
+              <a:rPr lang="en-US" altLang="ko-KR" sz="2400" b="1" i="0" u="none" strike="noStrike" dirty="0">
                 <a:solidFill>
                   <a:srgbClr val="383A42"/>
                 </a:solidFill>
@@ -10151,7 +10695,7 @@
               <a:t>(</a:t>
             </a:r>
             <a:r>
-              <a:rPr lang="ko-KR" altLang="en-US" sz="2400" b="0" i="0" u="none" strike="noStrike" dirty="0">
+              <a:rPr lang="ko-KR" altLang="en-US" sz="2400" b="1" i="0" u="none" strike="noStrike" dirty="0">
                 <a:solidFill>
                   <a:srgbClr val="383A42"/>
                 </a:solidFill>
@@ -10161,7 +10705,7 @@
               <a:t>종료 조건</a:t>
             </a:r>
             <a:r>
-              <a:rPr lang="en-US" altLang="ko-KR" sz="2400" b="0" i="0" u="none" strike="noStrike" dirty="0">
+              <a:rPr lang="en-US" altLang="ko-KR" sz="2400" b="1" i="0" u="none" strike="noStrike" dirty="0">
                 <a:solidFill>
                   <a:srgbClr val="383A42"/>
                 </a:solidFill>
@@ -10171,7 +10715,7 @@
               <a:t>)</a:t>
             </a:r>
             <a:br>
-              <a:rPr lang="en-US" altLang="ko-KR" sz="2400" b="0" i="0" u="none" strike="noStrike" dirty="0">
+              <a:rPr lang="en-US" altLang="ko-KR" sz="2400" b="1" i="0" u="none" strike="noStrike" dirty="0">
                 <a:solidFill>
                   <a:srgbClr val="383A42"/>
                 </a:solidFill>
@@ -10180,7 +10724,7 @@
               </a:rPr>
             </a:br>
             <a:r>
-              <a:rPr lang="en-US" altLang="ko-KR" sz="2400" b="0" i="0" u="none" strike="noStrike" dirty="0">
+              <a:rPr lang="en-US" altLang="ko-KR" sz="2400" b="1" i="0" u="none" strike="noStrike" dirty="0">
                 <a:solidFill>
                   <a:srgbClr val="383A42"/>
                 </a:solidFill>
@@ -10190,7 +10734,7 @@
               <a:t>        </a:t>
             </a:r>
             <a:r>
-              <a:rPr lang="en-US" altLang="ko-KR" sz="2400" b="0" i="0" u="none" strike="noStrike" dirty="0">
+              <a:rPr lang="en-US" altLang="ko-KR" sz="2400" b="1" i="0" u="none" strike="noStrike" dirty="0">
                 <a:solidFill>
                   <a:srgbClr val="A626A4"/>
                 </a:solidFill>
@@ -10200,7 +10744,7 @@
               <a:t>return</a:t>
             </a:r>
             <a:r>
-              <a:rPr lang="ko-KR" altLang="en-US" sz="2400" b="0" i="0" u="none" strike="noStrike" dirty="0">
+              <a:rPr lang="ko-KR" altLang="en-US" sz="2400" b="1" i="0" u="none" strike="noStrike" dirty="0">
                 <a:solidFill>
                   <a:srgbClr val="383A42"/>
                 </a:solidFill>
@@ -10210,7 +10754,7 @@
               <a:t> 어떤 값</a:t>
             </a:r>
             <a:r>
-              <a:rPr lang="en-US" altLang="ko-KR" sz="2400" b="0" i="0" u="none" strike="noStrike" dirty="0">
+              <a:rPr lang="en-US" altLang="ko-KR" sz="2400" b="1" i="0" u="none" strike="noStrike" dirty="0">
                 <a:solidFill>
                   <a:srgbClr val="383A42"/>
                 </a:solidFill>
@@ -10220,7 +10764,7 @@
               <a:t>;</a:t>
             </a:r>
             <a:br>
-              <a:rPr lang="en-US" altLang="ko-KR" sz="2400" b="0" i="0" u="none" strike="noStrike" dirty="0">
+              <a:rPr lang="en-US" altLang="ko-KR" sz="2400" b="1" i="0" u="none" strike="noStrike" dirty="0">
                 <a:solidFill>
                   <a:srgbClr val="383A42"/>
                 </a:solidFill>
@@ -10229,7 +10773,7 @@
               </a:rPr>
             </a:br>
             <a:br>
-              <a:rPr lang="en-US" altLang="ko-KR" sz="2400" b="0" i="0" u="none" strike="noStrike" dirty="0">
+              <a:rPr lang="en-US" altLang="ko-KR" sz="2400" b="1" i="0" u="none" strike="noStrike" dirty="0">
                 <a:solidFill>
                   <a:srgbClr val="383A42"/>
                 </a:solidFill>
@@ -10238,7 +10782,7 @@
               </a:rPr>
             </a:br>
             <a:r>
-              <a:rPr lang="en-US" altLang="ko-KR" sz="2400" b="0" i="0" u="none" strike="noStrike" dirty="0">
+              <a:rPr lang="en-US" altLang="ko-KR" sz="2400" b="1" i="0" u="none" strike="noStrike" dirty="0">
                 <a:solidFill>
                   <a:srgbClr val="383A42"/>
                 </a:solidFill>
@@ -10248,7 +10792,7 @@
               <a:t>    </a:t>
             </a:r>
             <a:r>
-              <a:rPr lang="en-US" altLang="ko-KR" sz="2400" b="0" i="0" u="none" strike="noStrike" dirty="0">
+              <a:rPr lang="en-US" altLang="ko-KR" sz="2400" b="1" i="0" u="none" strike="noStrike" dirty="0">
                 <a:solidFill>
                   <a:srgbClr val="A626A4"/>
                 </a:solidFill>
@@ -10258,7 +10802,7 @@
               <a:t>return</a:t>
             </a:r>
             <a:r>
-              <a:rPr lang="ko-KR" altLang="en-US" sz="2400" b="0" i="0" u="none" strike="noStrike" dirty="0">
+              <a:rPr lang="ko-KR" altLang="en-US" sz="2400" b="1" i="0" u="none" strike="noStrike" dirty="0">
                 <a:solidFill>
                   <a:srgbClr val="383A42"/>
                 </a:solidFill>
@@ -10268,7 +10812,7 @@
               <a:t> 함수이름</a:t>
             </a:r>
             <a:r>
-              <a:rPr lang="en-US" altLang="ko-KR" sz="2400" b="0" i="0" u="none" strike="noStrike" dirty="0">
+              <a:rPr lang="en-US" altLang="ko-KR" sz="2400" b="1" i="0" u="none" strike="noStrike" dirty="0">
                 <a:solidFill>
                   <a:srgbClr val="383A42"/>
                 </a:solidFill>
@@ -10278,7 +10822,7 @@
               <a:t>(</a:t>
             </a:r>
             <a:r>
-              <a:rPr lang="ko-KR" altLang="en-US" sz="2400" b="0" i="0" u="none" strike="noStrike" dirty="0">
+              <a:rPr lang="ko-KR" altLang="en-US" sz="2400" b="1" i="0" u="none" strike="noStrike" dirty="0">
                 <a:solidFill>
                   <a:srgbClr val="383A42"/>
                 </a:solidFill>
@@ -10288,7 +10832,7 @@
               <a:t>더 작은 값</a:t>
             </a:r>
             <a:r>
-              <a:rPr lang="en-US" altLang="ko-KR" sz="2400" b="0" i="0" u="none" strike="noStrike" dirty="0">
+              <a:rPr lang="en-US" altLang="ko-KR" sz="2400" b="1" i="0" u="none" strike="noStrike" dirty="0">
                 <a:solidFill>
                   <a:srgbClr val="383A42"/>
                 </a:solidFill>
@@ -10298,7 +10842,7 @@
               <a:t>);</a:t>
             </a:r>
             <a:br>
-              <a:rPr lang="en-US" altLang="ko-KR" sz="2400" b="0" i="0" u="none" strike="noStrike" dirty="0">
+              <a:rPr lang="en-US" altLang="ko-KR" sz="2400" b="1" i="0" u="none" strike="noStrike" dirty="0">
                 <a:solidFill>
                   <a:srgbClr val="383A42"/>
                 </a:solidFill>
@@ -10307,7 +10851,7 @@
               </a:rPr>
             </a:br>
             <a:r>
-              <a:rPr lang="en-US" altLang="ko-KR" sz="2400" b="0" i="0" u="none" strike="noStrike" dirty="0">
+              <a:rPr lang="en-US" altLang="ko-KR" sz="2400" b="1" i="0" u="none" strike="noStrike" dirty="0">
                 <a:solidFill>
                   <a:srgbClr val="383A42"/>
                 </a:solidFill>
@@ -10316,7 +10860,7 @@
               </a:rPr>
               <a:t>}</a:t>
             </a:r>
-            <a:endParaRPr lang="ko-KR" altLang="en-US" dirty="0"/>
+            <a:endParaRPr lang="ko-KR" altLang="en-US" b="1" dirty="0"/>
           </a:p>
         </p:txBody>
       </p:sp>
@@ -10357,7 +10901,7 @@
           <a:lstStyle/>
           <a:p>
             <a:r>
-              <a:rPr lang="en-US" altLang="ko-KR" sz="2400" b="0" i="0" u="none" strike="noStrike" dirty="0">
+              <a:rPr lang="en-US" altLang="ko-KR" sz="2400" b="1" i="0" u="none" strike="noStrike" dirty="0">
                 <a:solidFill>
                   <a:srgbClr val="383A42"/>
                 </a:solidFill>
@@ -10367,7 +10911,7 @@
               <a:t>Sum(n) = n + Sum(n - </a:t>
             </a:r>
             <a:r>
-              <a:rPr lang="en-US" altLang="ko-KR" sz="2400" b="0" i="0" u="none" strike="noStrike" dirty="0">
+              <a:rPr lang="en-US" altLang="ko-KR" sz="2400" b="1" i="0" u="none" strike="noStrike" dirty="0">
                 <a:solidFill>
                   <a:srgbClr val="986801"/>
                 </a:solidFill>
@@ -10377,7 +10921,7 @@
               <a:t>1</a:t>
             </a:r>
             <a:r>
-              <a:rPr lang="en-US" altLang="ko-KR" sz="2400" b="0" i="0" u="none" strike="noStrike" dirty="0">
+              <a:rPr lang="en-US" altLang="ko-KR" sz="2400" b="1" i="0" u="none" strike="noStrike" dirty="0">
                 <a:solidFill>
                   <a:srgbClr val="383A42"/>
                 </a:solidFill>
@@ -10387,7 +10931,7 @@
               <a:t>)</a:t>
             </a:r>
             <a:br>
-              <a:rPr lang="en-US" altLang="ko-KR" sz="2400" b="0" i="0" u="none" strike="noStrike" dirty="0">
+              <a:rPr lang="en-US" altLang="ko-KR" sz="2400" b="1" i="0" u="none" strike="noStrike" dirty="0">
                 <a:solidFill>
                   <a:srgbClr val="383A42"/>
                 </a:solidFill>
@@ -10396,7 +10940,7 @@
               </a:rPr>
             </a:br>
             <a:r>
-              <a:rPr lang="en-US" altLang="ko-KR" sz="2400" b="0" i="0" u="none" strike="noStrike" dirty="0">
+              <a:rPr lang="en-US" altLang="ko-KR" sz="2400" b="1" i="0" u="none" strike="noStrike" dirty="0">
                 <a:solidFill>
                   <a:srgbClr val="383A42"/>
                 </a:solidFill>
@@ -10406,7 +10950,7 @@
               <a:t>Sum(</a:t>
             </a:r>
             <a:r>
-              <a:rPr lang="en-US" altLang="ko-KR" sz="2400" b="0" i="0" u="none" strike="noStrike" dirty="0">
+              <a:rPr lang="en-US" altLang="ko-KR" sz="2400" b="1" i="0" u="none" strike="noStrike" dirty="0">
                 <a:solidFill>
                   <a:srgbClr val="986801"/>
                 </a:solidFill>
@@ -10416,7 +10960,7 @@
               <a:t>1</a:t>
             </a:r>
             <a:r>
-              <a:rPr lang="en-US" altLang="ko-KR" sz="2400" b="0" i="0" u="none" strike="noStrike" dirty="0">
+              <a:rPr lang="en-US" altLang="ko-KR" sz="2400" b="1" i="0" u="none" strike="noStrike" dirty="0">
                 <a:solidFill>
                   <a:srgbClr val="383A42"/>
                 </a:solidFill>
@@ -10426,7 +10970,7 @@
               <a:t>) = </a:t>
             </a:r>
             <a:r>
-              <a:rPr lang="en-US" altLang="ko-KR" sz="2400" b="0" i="0" u="none" strike="noStrike" dirty="0">
+              <a:rPr lang="en-US" altLang="ko-KR" sz="2400" b="1" i="0" u="none" strike="noStrike" dirty="0">
                 <a:solidFill>
                   <a:srgbClr val="986801"/>
                 </a:solidFill>
@@ -10436,7 +10980,7 @@
               <a:t>1</a:t>
             </a:r>
             <a:r>
-              <a:rPr lang="en-US" altLang="ko-KR" sz="2400" b="0" i="0" u="none" strike="noStrike" dirty="0">
+              <a:rPr lang="en-US" altLang="ko-KR" sz="2400" b="1" i="0" u="none" strike="noStrike" dirty="0">
                 <a:solidFill>
                   <a:srgbClr val="383A42"/>
                 </a:solidFill>
@@ -10446,7 +10990,7 @@
               <a:t>   (</a:t>
             </a:r>
             <a:r>
-              <a:rPr lang="ko-KR" altLang="en-US" sz="2400" b="0" i="0" u="none" strike="noStrike" dirty="0">
+              <a:rPr lang="ko-KR" altLang="en-US" sz="2400" b="1" i="0" u="none" strike="noStrike" dirty="0">
                 <a:solidFill>
                   <a:srgbClr val="383A42"/>
                 </a:solidFill>
@@ -10456,7 +11000,7 @@
               <a:t>종료 조건</a:t>
             </a:r>
             <a:r>
-              <a:rPr lang="en-US" altLang="ko-KR" sz="2400" b="0" i="0" u="none" strike="noStrike" dirty="0">
+              <a:rPr lang="en-US" altLang="ko-KR" sz="2400" b="1" i="0" u="none" strike="noStrike" dirty="0">
                 <a:solidFill>
                   <a:srgbClr val="383A42"/>
                 </a:solidFill>
@@ -10465,7 +11009,7 @@
               </a:rPr>
               <a:t>)</a:t>
             </a:r>
-            <a:endParaRPr lang="ko-KR" altLang="en-US" dirty="0"/>
+            <a:endParaRPr lang="ko-KR" altLang="en-US" b="1" dirty="0"/>
           </a:p>
         </p:txBody>
       </p:sp>
@@ -10527,30 +11071,29 @@
           <a:lstStyle/>
           <a:p>
             <a:r>
-              <a:rPr lang="en-US" altLang="ko-KR" b="0" dirty="0"/>
+              <a:rPr lang="en-US" altLang="ko-KR" dirty="0"/>
               <a:t>5.8 </a:t>
             </a:r>
             <a:r>
-              <a:rPr lang="ko-KR" altLang="en-US" b="0" dirty="0"/>
+              <a:rPr lang="ko-KR" altLang="en-US" dirty="0"/>
               <a:t>재귀 함수 </a:t>
             </a:r>
             <a:r>
-              <a:rPr lang="en-US" altLang="ko-KR" b="0" dirty="0"/>
+              <a:rPr lang="en-US" altLang="ko-KR" dirty="0"/>
               <a:t>- </a:t>
             </a:r>
             <a:r>
-              <a:rPr lang="ko-KR" altLang="en-US" b="0" dirty="0"/>
+              <a:rPr lang="ko-KR" altLang="en-US" dirty="0"/>
               <a:t>재귀 </a:t>
             </a:r>
             <a:r>
-              <a:rPr lang="en-US" altLang="ko-KR" b="0" dirty="0"/>
+              <a:rPr lang="en-US" altLang="ko-KR" dirty="0"/>
               <a:t>vs </a:t>
             </a:r>
             <a:r>
-              <a:rPr lang="ko-KR" altLang="en-US" b="0" dirty="0"/>
+              <a:rPr lang="ko-KR" altLang="en-US" dirty="0"/>
               <a:t>반복</a:t>
             </a:r>
-            <a:endParaRPr lang="ko-KR" altLang="en-US" dirty="0"/>
           </a:p>
         </p:txBody>
       </p:sp>
@@ -10738,14 +11281,13 @@
           <a:lstStyle/>
           <a:p>
             <a:r>
-              <a:rPr lang="en-US" altLang="ko-KR" b="0" dirty="0"/>
+              <a:rPr lang="en-US" altLang="ko-KR" dirty="0"/>
               <a:t>5. </a:t>
             </a:r>
             <a:r>
-              <a:rPr lang="ko-KR" altLang="en-US" b="0" dirty="0"/>
+              <a:rPr lang="ko-KR" altLang="en-US" dirty="0"/>
               <a:t>학습정리</a:t>
             </a:r>
-            <a:endParaRPr lang="ko-KR" altLang="en-US" dirty="0"/>
           </a:p>
         </p:txBody>
       </p:sp>
@@ -11027,14 +11569,13 @@
           <a:lstStyle/>
           <a:p>
             <a:r>
-              <a:rPr lang="en-US" altLang="ko-KR" b="0" dirty="0"/>
+              <a:rPr lang="en-US" altLang="ko-KR" dirty="0"/>
               <a:t>5. </a:t>
             </a:r>
             <a:r>
-              <a:rPr lang="ko-KR" altLang="en-US" b="0" dirty="0"/>
+              <a:rPr lang="ko-KR" altLang="en-US" dirty="0"/>
               <a:t>학습정리</a:t>
             </a:r>
-            <a:endParaRPr lang="ko-KR" altLang="en-US" dirty="0"/>
           </a:p>
         </p:txBody>
       </p:sp>
@@ -11273,14 +11814,13 @@
           <a:lstStyle/>
           <a:p>
             <a:r>
-              <a:rPr lang="en-US" altLang="ko-KR" b="0" dirty="0"/>
+              <a:rPr lang="en-US" altLang="ko-KR" dirty="0"/>
               <a:t>5. </a:t>
             </a:r>
             <a:r>
-              <a:rPr lang="ko-KR" altLang="en-US" b="0" dirty="0"/>
+              <a:rPr lang="ko-KR" altLang="en-US" dirty="0"/>
               <a:t>실습 및 과제</a:t>
             </a:r>
-            <a:endParaRPr lang="ko-KR" altLang="en-US" dirty="0"/>
           </a:p>
         </p:txBody>
       </p:sp>
@@ -11548,15 +12088,15 @@
           <a:lstStyle/>
           <a:p>
             <a:r>
-              <a:rPr lang="en-US" altLang="ko-KR" b="0" dirty="0"/>
+              <a:rPr lang="en-US" altLang="ko-KR" dirty="0"/>
               <a:t>5.1 </a:t>
             </a:r>
             <a:r>
-              <a:rPr lang="ko-KR" altLang="en-US" b="0" dirty="0"/>
+              <a:rPr lang="ko-KR" altLang="en-US" dirty="0"/>
               <a:t>함수 정의</a:t>
             </a:r>
             <a:r>
-              <a:rPr lang="en-US" altLang="ko-KR" b="0" dirty="0"/>
+              <a:rPr lang="en-US" altLang="ko-KR" dirty="0"/>
               <a:t>(Function Definition)</a:t>
             </a:r>
             <a:endParaRPr lang="ko-KR" altLang="en-US" dirty="0"/>
@@ -11814,14 +12354,13 @@
           <a:lstStyle/>
           <a:p>
             <a:r>
-              <a:rPr lang="en-US" altLang="ko-KR" b="0" dirty="0"/>
+              <a:rPr lang="en-US" altLang="ko-KR" dirty="0"/>
               <a:t>5.1 </a:t>
             </a:r>
             <a:r>
-              <a:rPr lang="ko-KR" altLang="en-US" b="0" dirty="0"/>
+              <a:rPr lang="ko-KR" altLang="en-US" dirty="0"/>
               <a:t>함수의 선언과 정의</a:t>
             </a:r>
-            <a:endParaRPr lang="ko-KR" altLang="en-US" dirty="0"/>
           </a:p>
         </p:txBody>
       </p:sp>
@@ -11957,7 +12496,7 @@
           <a:lstStyle/>
           <a:p>
             <a:r>
-              <a:rPr lang="ko-KR" altLang="en-US" sz="2400" b="0" i="0" u="none" strike="noStrike" dirty="0">
+              <a:rPr lang="ko-KR" altLang="en-US" sz="2400" b="1" i="0" u="none" strike="noStrike" dirty="0">
                 <a:solidFill>
                   <a:srgbClr val="383A42"/>
                 </a:solidFill>
@@ -11967,7 +12506,7 @@
               <a:t>반환형 함수이름</a:t>
             </a:r>
             <a:r>
-              <a:rPr lang="en-US" altLang="ko-KR" sz="2400" b="0" i="0" u="none" strike="noStrike" dirty="0">
+              <a:rPr lang="en-US" altLang="ko-KR" sz="2400" b="1" i="0" u="none" strike="noStrike" dirty="0">
                 <a:solidFill>
                   <a:srgbClr val="383A42"/>
                 </a:solidFill>
@@ -11977,7 +12516,7 @@
               <a:t>(</a:t>
             </a:r>
             <a:r>
-              <a:rPr lang="ko-KR" altLang="en-US" sz="2400" b="0" i="0" u="none" strike="noStrike" dirty="0">
+              <a:rPr lang="ko-KR" altLang="en-US" sz="2400" b="1" i="0" u="none" strike="noStrike" dirty="0">
                 <a:solidFill>
                   <a:srgbClr val="383A42"/>
                 </a:solidFill>
@@ -11987,7 +12526,7 @@
               <a:t>매개변수 목록</a:t>
             </a:r>
             <a:r>
-              <a:rPr lang="en-US" altLang="ko-KR" sz="2400" b="0" i="0" u="none" strike="noStrike" dirty="0">
+              <a:rPr lang="en-US" altLang="ko-KR" sz="2400" b="1" i="0" u="none" strike="noStrike" dirty="0">
                 <a:solidFill>
                   <a:srgbClr val="383A42"/>
                 </a:solidFill>
@@ -11997,7 +12536,7 @@
               <a:t>) </a:t>
             </a:r>
             <a:br>
-              <a:rPr lang="en-US" altLang="ko-KR" sz="2400" b="0" i="0" u="none" strike="noStrike" dirty="0">
+              <a:rPr lang="en-US" altLang="ko-KR" sz="2400" b="1" i="0" u="none" strike="noStrike" dirty="0">
                 <a:solidFill>
                   <a:srgbClr val="383A42"/>
                 </a:solidFill>
@@ -12006,7 +12545,7 @@
               </a:rPr>
             </a:br>
             <a:r>
-              <a:rPr lang="en-US" altLang="ko-KR" sz="2400" b="0" i="0" u="none" strike="noStrike" dirty="0">
+              <a:rPr lang="en-US" altLang="ko-KR" sz="2400" b="1" i="0" u="none" strike="noStrike" dirty="0">
                 <a:solidFill>
                   <a:srgbClr val="383A42"/>
                 </a:solidFill>
@@ -12016,7 +12555,7 @@
               <a:t>{</a:t>
             </a:r>
             <a:br>
-              <a:rPr lang="en-US" altLang="ko-KR" sz="2400" b="0" i="0" u="none" strike="noStrike" dirty="0">
+              <a:rPr lang="en-US" altLang="ko-KR" sz="2400" b="1" i="0" u="none" strike="noStrike" dirty="0">
                 <a:solidFill>
                   <a:srgbClr val="383A42"/>
                 </a:solidFill>
@@ -12025,7 +12564,7 @@
               </a:rPr>
             </a:br>
             <a:r>
-              <a:rPr lang="en-US" altLang="ko-KR" sz="2400" b="0" i="0" u="none" strike="noStrike" dirty="0">
+              <a:rPr lang="en-US" altLang="ko-KR" sz="2400" b="1" i="0" u="none" strike="noStrike" dirty="0">
                 <a:solidFill>
                   <a:srgbClr val="383A42"/>
                 </a:solidFill>
@@ -12035,7 +12574,7 @@
               <a:t>    </a:t>
             </a:r>
             <a:r>
-              <a:rPr lang="ko-KR" altLang="en-US" sz="2400" b="0" i="0" u="none" strike="noStrike" dirty="0">
+              <a:rPr lang="ko-KR" altLang="en-US" sz="2400" b="1" i="0" u="none" strike="noStrike" dirty="0">
                 <a:solidFill>
                   <a:srgbClr val="383A42"/>
                 </a:solidFill>
@@ -12045,7 +12584,7 @@
               <a:t>실행문</a:t>
             </a:r>
             <a:r>
-              <a:rPr lang="en-US" altLang="ko-KR" sz="2400" b="0" i="0" u="none" strike="noStrike" dirty="0">
+              <a:rPr lang="en-US" altLang="ko-KR" sz="2400" b="1" i="0" u="none" strike="noStrike" dirty="0">
                 <a:solidFill>
                   <a:srgbClr val="383A42"/>
                 </a:solidFill>
@@ -12055,7 +12594,7 @@
               <a:t>;</a:t>
             </a:r>
             <a:br>
-              <a:rPr lang="en-US" altLang="ko-KR" sz="2400" b="0" i="0" u="none" strike="noStrike" dirty="0">
+              <a:rPr lang="en-US" altLang="ko-KR" sz="2400" b="1" i="0" u="none" strike="noStrike" dirty="0">
                 <a:solidFill>
                   <a:srgbClr val="383A42"/>
                 </a:solidFill>
@@ -12064,7 +12603,7 @@
               </a:rPr>
             </a:br>
             <a:r>
-              <a:rPr lang="en-US" altLang="ko-KR" sz="2400" b="0" i="0" u="none" strike="noStrike" dirty="0">
+              <a:rPr lang="en-US" altLang="ko-KR" sz="2400" b="1" i="0" u="none" strike="noStrike" dirty="0">
                 <a:solidFill>
                   <a:srgbClr val="383A42"/>
                 </a:solidFill>
@@ -12074,7 +12613,7 @@
               <a:t>    </a:t>
             </a:r>
             <a:r>
-              <a:rPr lang="en-US" altLang="ko-KR" sz="2400" b="0" i="0" u="none" strike="noStrike" dirty="0">
+              <a:rPr lang="en-US" altLang="ko-KR" sz="2400" b="1" i="0" u="none" strike="noStrike" dirty="0">
                 <a:solidFill>
                   <a:srgbClr val="A626A4"/>
                 </a:solidFill>
@@ -12084,7 +12623,7 @@
               <a:t>return</a:t>
             </a:r>
             <a:r>
-              <a:rPr lang="ko-KR" altLang="en-US" sz="2400" b="0" i="0" u="none" strike="noStrike" dirty="0">
+              <a:rPr lang="ko-KR" altLang="en-US" sz="2400" b="1" i="0" u="none" strike="noStrike" dirty="0">
                 <a:solidFill>
                   <a:srgbClr val="383A42"/>
                 </a:solidFill>
@@ -12094,7 +12633,7 @@
               <a:t> 반환 값</a:t>
             </a:r>
             <a:r>
-              <a:rPr lang="en-US" altLang="ko-KR" sz="2400" b="0" i="0" u="none" strike="noStrike" dirty="0">
+              <a:rPr lang="en-US" altLang="ko-KR" sz="2400" b="1" i="0" u="none" strike="noStrike" dirty="0">
                 <a:solidFill>
                   <a:srgbClr val="383A42"/>
                 </a:solidFill>
@@ -12104,7 +12643,7 @@
               <a:t>;</a:t>
             </a:r>
             <a:br>
-              <a:rPr lang="en-US" altLang="ko-KR" sz="2400" b="0" i="0" u="none" strike="noStrike" dirty="0">
+              <a:rPr lang="en-US" altLang="ko-KR" sz="2400" b="1" i="0" u="none" strike="noStrike" dirty="0">
                 <a:solidFill>
                   <a:srgbClr val="383A42"/>
                 </a:solidFill>
@@ -12113,7 +12652,7 @@
               </a:rPr>
             </a:br>
             <a:r>
-              <a:rPr lang="en-US" altLang="ko-KR" sz="2400" b="0" i="0" u="none" strike="noStrike" dirty="0">
+              <a:rPr lang="en-US" altLang="ko-KR" sz="2400" b="1" i="0" u="none" strike="noStrike" dirty="0">
                 <a:solidFill>
                   <a:srgbClr val="383A42"/>
                 </a:solidFill>
@@ -12122,7 +12661,7 @@
               </a:rPr>
               <a:t>}</a:t>
             </a:r>
-            <a:endParaRPr lang="ko-KR" altLang="en-US" dirty="0"/>
+            <a:endParaRPr lang="ko-KR" altLang="en-US" b="1" dirty="0"/>
           </a:p>
         </p:txBody>
       </p:sp>
@@ -12163,7 +12702,7 @@
           <a:lstStyle/>
           <a:p>
             <a:r>
-              <a:rPr lang="ko-KR" altLang="en-US" sz="2400" b="0" i="0" u="none" strike="noStrike" dirty="0">
+              <a:rPr lang="ko-KR" altLang="en-US" sz="2400" b="1" i="0" u="none" strike="noStrike" dirty="0">
                 <a:solidFill>
                   <a:srgbClr val="383A42"/>
                 </a:solidFill>
@@ -12173,7 +12712,7 @@
               <a:t>반환형 함수이름</a:t>
             </a:r>
             <a:r>
-              <a:rPr lang="en-US" altLang="ko-KR" sz="2400" b="0" i="0" u="none" strike="noStrike" dirty="0">
+              <a:rPr lang="en-US" altLang="ko-KR" sz="2400" b="1" i="0" u="none" strike="noStrike" dirty="0">
                 <a:solidFill>
                   <a:srgbClr val="383A42"/>
                 </a:solidFill>
@@ -12183,7 +12722,7 @@
               <a:t>(</a:t>
             </a:r>
             <a:r>
-              <a:rPr lang="ko-KR" altLang="en-US" sz="2400" b="0" i="0" u="none" strike="noStrike" dirty="0">
+              <a:rPr lang="ko-KR" altLang="en-US" sz="2400" b="1" i="0" u="none" strike="noStrike" dirty="0">
                 <a:solidFill>
                   <a:srgbClr val="383A42"/>
                 </a:solidFill>
@@ -12193,7 +12732,7 @@
               <a:t>매개변수 목록</a:t>
             </a:r>
             <a:r>
-              <a:rPr lang="en-US" altLang="ko-KR" sz="2400" b="0" i="0" u="none" strike="noStrike" dirty="0">
+              <a:rPr lang="en-US" altLang="ko-KR" sz="2400" b="1" i="0" u="none" strike="noStrike" dirty="0">
                 <a:solidFill>
                   <a:srgbClr val="383A42"/>
                 </a:solidFill>
@@ -12203,7 +12742,7 @@
               <a:t>)</a:t>
             </a:r>
             <a:br>
-              <a:rPr lang="en-US" altLang="ko-KR" sz="2400" b="0" i="0" u="none" strike="noStrike" dirty="0">
+              <a:rPr lang="en-US" altLang="ko-KR" sz="2400" b="1" i="0" u="none" strike="noStrike" dirty="0">
                 <a:solidFill>
                   <a:srgbClr val="383A42"/>
                 </a:solidFill>
@@ -12212,7 +12751,7 @@
               </a:rPr>
             </a:br>
             <a:r>
-              <a:rPr lang="en-US" altLang="ko-KR" sz="2400" b="0" i="0" u="none" strike="noStrike" dirty="0">
+              <a:rPr lang="en-US" altLang="ko-KR" sz="2400" b="1" i="0" u="none" strike="noStrike" dirty="0">
                 <a:solidFill>
                   <a:srgbClr val="383A42"/>
                 </a:solidFill>
@@ -12222,7 +12761,7 @@
               <a:t>{</a:t>
             </a:r>
             <a:br>
-              <a:rPr lang="en-US" altLang="ko-KR" sz="2400" b="0" i="0" u="none" strike="noStrike" dirty="0">
+              <a:rPr lang="en-US" altLang="ko-KR" sz="2400" b="1" i="0" u="none" strike="noStrike" dirty="0">
                 <a:solidFill>
                   <a:srgbClr val="383A42"/>
                 </a:solidFill>
@@ -12231,7 +12770,7 @@
               </a:rPr>
             </a:br>
             <a:r>
-              <a:rPr lang="en-US" altLang="ko-KR" sz="2400" b="0" i="0" u="none" strike="noStrike" dirty="0">
+              <a:rPr lang="en-US" altLang="ko-KR" sz="2400" b="1" i="0" u="none" strike="noStrike" dirty="0">
                 <a:solidFill>
                   <a:srgbClr val="383A42"/>
                 </a:solidFill>
@@ -12241,7 +12780,7 @@
               <a:t>    </a:t>
             </a:r>
             <a:r>
-              <a:rPr lang="ko-KR" altLang="en-US" sz="2400" b="0" i="0" u="none" strike="noStrike" dirty="0">
+              <a:rPr lang="ko-KR" altLang="en-US" sz="2400" b="1" i="0" u="none" strike="noStrike" dirty="0">
                 <a:solidFill>
                   <a:srgbClr val="383A42"/>
                 </a:solidFill>
@@ -12251,7 +12790,7 @@
               <a:t>실행문</a:t>
             </a:r>
             <a:r>
-              <a:rPr lang="en-US" altLang="ko-KR" sz="2400" b="0" i="0" u="none" strike="noStrike" dirty="0">
+              <a:rPr lang="en-US" altLang="ko-KR" sz="2400" b="1" i="0" u="none" strike="noStrike" dirty="0">
                 <a:solidFill>
                   <a:srgbClr val="383A42"/>
                 </a:solidFill>
@@ -12261,7 +12800,7 @@
               <a:t>;</a:t>
             </a:r>
             <a:br>
-              <a:rPr lang="en-US" altLang="ko-KR" sz="2400" b="0" i="0" u="none" strike="noStrike" dirty="0">
+              <a:rPr lang="en-US" altLang="ko-KR" sz="2400" b="1" i="0" u="none" strike="noStrike" dirty="0">
                 <a:solidFill>
                   <a:srgbClr val="383A42"/>
                 </a:solidFill>
@@ -12270,7 +12809,7 @@
               </a:rPr>
             </a:br>
             <a:r>
-              <a:rPr lang="en-US" altLang="ko-KR" sz="2400" b="0" i="0" u="none" strike="noStrike" dirty="0">
+              <a:rPr lang="en-US" altLang="ko-KR" sz="2400" b="1" i="0" u="none" strike="noStrike" dirty="0">
                 <a:solidFill>
                   <a:srgbClr val="383A42"/>
                 </a:solidFill>
@@ -12280,7 +12819,7 @@
               <a:t>    </a:t>
             </a:r>
             <a:r>
-              <a:rPr lang="en-US" altLang="ko-KR" sz="2400" b="0" i="0" u="none" strike="noStrike" dirty="0">
+              <a:rPr lang="en-US" altLang="ko-KR" sz="2400" b="1" i="0" u="none" strike="noStrike" dirty="0">
                 <a:solidFill>
                   <a:srgbClr val="A626A4"/>
                 </a:solidFill>
@@ -12290,7 +12829,7 @@
               <a:t>return</a:t>
             </a:r>
             <a:r>
-              <a:rPr lang="ko-KR" altLang="en-US" sz="2400" b="0" i="0" u="none" strike="noStrike" dirty="0">
+              <a:rPr lang="ko-KR" altLang="en-US" sz="2400" b="1" i="0" u="none" strike="noStrike" dirty="0">
                 <a:solidFill>
                   <a:srgbClr val="383A42"/>
                 </a:solidFill>
@@ -12300,7 +12839,7 @@
               <a:t> 반환 값</a:t>
             </a:r>
             <a:r>
-              <a:rPr lang="en-US" altLang="ko-KR" sz="2400" b="0" i="0" u="none" strike="noStrike" dirty="0">
+              <a:rPr lang="en-US" altLang="ko-KR" sz="2400" b="1" i="0" u="none" strike="noStrike" dirty="0">
                 <a:solidFill>
                   <a:srgbClr val="383A42"/>
                 </a:solidFill>
@@ -12310,7 +12849,7 @@
               <a:t>;</a:t>
             </a:r>
             <a:br>
-              <a:rPr lang="en-US" altLang="ko-KR" sz="2400" b="0" i="0" u="none" strike="noStrike" dirty="0">
+              <a:rPr lang="en-US" altLang="ko-KR" sz="2400" b="1" i="0" u="none" strike="noStrike" dirty="0">
                 <a:solidFill>
                   <a:srgbClr val="383A42"/>
                 </a:solidFill>
@@ -12319,7 +12858,7 @@
               </a:rPr>
             </a:br>
             <a:r>
-              <a:rPr lang="en-US" altLang="ko-KR" sz="2400" b="0" i="0" u="none" strike="noStrike" dirty="0">
+              <a:rPr lang="en-US" altLang="ko-KR" sz="2400" b="1" i="0" u="none" strike="noStrike" dirty="0">
                 <a:solidFill>
                   <a:srgbClr val="383A42"/>
                 </a:solidFill>
@@ -12328,7 +12867,7 @@
               </a:rPr>
               <a:t>}</a:t>
             </a:r>
-            <a:endParaRPr lang="ko-KR" altLang="en-US" dirty="0"/>
+            <a:endParaRPr lang="ko-KR" altLang="en-US" b="1" dirty="0"/>
           </a:p>
         </p:txBody>
       </p:sp>
@@ -12390,22 +12929,21 @@
           <a:lstStyle/>
           <a:p>
             <a:r>
-              <a:rPr lang="en-US" altLang="ko-KR" b="0" dirty="0"/>
+              <a:rPr lang="en-US" altLang="ko-KR" dirty="0"/>
               <a:t>5.1 </a:t>
             </a:r>
             <a:r>
-              <a:rPr lang="ko-KR" altLang="en-US" b="0" dirty="0"/>
+              <a:rPr lang="ko-KR" altLang="en-US" dirty="0"/>
               <a:t>함수의 선언과 정의 </a:t>
             </a:r>
             <a:r>
-              <a:rPr lang="en-US" altLang="ko-KR" b="0" dirty="0"/>
+              <a:rPr lang="en-US" altLang="ko-KR" dirty="0"/>
               <a:t>– </a:t>
             </a:r>
             <a:r>
-              <a:rPr lang="ko-KR" altLang="en-US" b="0" dirty="0"/>
+              <a:rPr lang="ko-KR" altLang="en-US" dirty="0"/>
               <a:t>함수의 구현</a:t>
             </a:r>
-            <a:endParaRPr lang="ko-KR" altLang="en-US" dirty="0"/>
           </a:p>
         </p:txBody>
       </p:sp>
@@ -12723,22 +13261,21 @@
           <a:lstStyle/>
           <a:p>
             <a:r>
-              <a:rPr lang="en-US" altLang="ko-KR" b="0" dirty="0"/>
+              <a:rPr lang="en-US" altLang="ko-KR" dirty="0"/>
               <a:t>5.1 </a:t>
             </a:r>
             <a:r>
-              <a:rPr lang="ko-KR" altLang="en-US" b="0" dirty="0"/>
+              <a:rPr lang="ko-KR" altLang="en-US" dirty="0"/>
               <a:t>함수의 선언과 정의 </a:t>
             </a:r>
             <a:r>
-              <a:rPr lang="en-US" altLang="ko-KR" b="0" dirty="0"/>
+              <a:rPr lang="en-US" altLang="ko-KR" dirty="0"/>
               <a:t>- </a:t>
             </a:r>
             <a:r>
-              <a:rPr lang="ko-KR" altLang="en-US" b="0" dirty="0"/>
+              <a:rPr lang="ko-KR" altLang="en-US" dirty="0"/>
               <a:t>예</a:t>
             </a:r>
-            <a:endParaRPr lang="ko-KR" altLang="en-US" dirty="0"/>
           </a:p>
         </p:txBody>
       </p:sp>
@@ -12868,7 +13405,7 @@
           <a:lstStyle/>
           <a:p>
             <a:r>
-              <a:rPr lang="en-US" altLang="ko-KR" sz="2000" b="0" i="1" u="none" strike="noStrike" dirty="0">
+              <a:rPr lang="en-US" altLang="ko-KR" sz="2000" b="1" i="1" u="none" strike="noStrike" dirty="0">
                 <a:solidFill>
                   <a:srgbClr val="A0A1A7"/>
                 </a:solidFill>
@@ -12878,7 +13415,7 @@
               <a:t>// ShowCharacterStat </a:t>
             </a:r>
             <a:r>
-              <a:rPr lang="ko-KR" altLang="en-US" sz="2000" b="0" i="1" u="none" strike="noStrike" dirty="0">
+              <a:rPr lang="ko-KR" altLang="en-US" sz="2000" b="1" i="1" u="none" strike="noStrike" dirty="0">
                 <a:solidFill>
                   <a:srgbClr val="A0A1A7"/>
                 </a:solidFill>
@@ -12888,7 +13425,7 @@
               <a:t>함수 정의</a:t>
             </a:r>
             <a:br>
-              <a:rPr lang="ko-KR" altLang="en-US" sz="2000" b="0" i="0" u="none" strike="noStrike" dirty="0">
+              <a:rPr lang="ko-KR" altLang="en-US" sz="2000" b="1" i="0" u="none" strike="noStrike" dirty="0">
                 <a:solidFill>
                   <a:srgbClr val="383A42"/>
                 </a:solidFill>
@@ -12897,7 +13434,7 @@
               </a:rPr>
             </a:br>
             <a:r>
-              <a:rPr lang="en-US" altLang="ko-KR" sz="2000" b="0" i="0" u="none" strike="noStrike" dirty="0">
+              <a:rPr lang="en-US" altLang="ko-KR" sz="2000" b="1" i="0" u="none" strike="noStrike" dirty="0">
                 <a:solidFill>
                   <a:srgbClr val="A626A4"/>
                 </a:solidFill>
@@ -12907,7 +13444,7 @@
               <a:t>void</a:t>
             </a:r>
             <a:r>
-              <a:rPr lang="en-US" altLang="ko-KR" sz="2000" b="0" i="0" u="none" strike="noStrike" dirty="0">
+              <a:rPr lang="en-US" altLang="ko-KR" sz="2000" b="1" i="0" u="none" strike="noStrike" dirty="0">
                 <a:solidFill>
                   <a:srgbClr val="383A42"/>
                 </a:solidFill>
@@ -12917,7 +13454,7 @@
               <a:t> </a:t>
             </a:r>
             <a:r>
-              <a:rPr lang="en-US" altLang="ko-KR" sz="2000" b="0" i="0" u="none" strike="noStrike" dirty="0">
+              <a:rPr lang="en-US" altLang="ko-KR" sz="2000" b="1" i="0" u="none" strike="noStrike" dirty="0">
                 <a:solidFill>
                   <a:srgbClr val="4078F2"/>
                 </a:solidFill>
@@ -12927,7 +13464,7 @@
               <a:t>ShowCharacterStat</a:t>
             </a:r>
             <a:r>
-              <a:rPr lang="en-US" altLang="ko-KR" sz="2000" b="0" i="0" u="none" strike="noStrike" dirty="0">
+              <a:rPr lang="en-US" altLang="ko-KR" sz="2000" b="1" i="0" u="none" strike="noStrike" dirty="0">
                 <a:solidFill>
                   <a:srgbClr val="383A42"/>
                 </a:solidFill>
@@ -12937,7 +13474,7 @@
               <a:t>(</a:t>
             </a:r>
             <a:r>
-              <a:rPr lang="en-US" altLang="ko-KR" sz="2000" b="0" i="0" u="none" strike="noStrike" dirty="0">
+              <a:rPr lang="en-US" altLang="ko-KR" sz="2000" b="1" i="0" u="none" strike="noStrike" dirty="0">
                 <a:solidFill>
                   <a:srgbClr val="A626A4"/>
                 </a:solidFill>
@@ -12947,7 +13484,7 @@
               <a:t>float</a:t>
             </a:r>
             <a:r>
-              <a:rPr lang="en-US" altLang="ko-KR" sz="2000" b="0" i="0" u="none" strike="noStrike" dirty="0">
+              <a:rPr lang="en-US" altLang="ko-KR" sz="2000" b="1" i="0" u="none" strike="noStrike" dirty="0">
                 <a:solidFill>
                   <a:srgbClr val="383A42"/>
                 </a:solidFill>
@@ -12957,7 +13494,7 @@
               <a:t> playerHp, </a:t>
             </a:r>
             <a:r>
-              <a:rPr lang="en-US" altLang="ko-KR" sz="2000" b="0" i="0" u="none" strike="noStrike" dirty="0">
+              <a:rPr lang="en-US" altLang="ko-KR" sz="2000" b="1" i="0" u="none" strike="noStrike" dirty="0">
                 <a:solidFill>
                   <a:srgbClr val="A626A4"/>
                 </a:solidFill>
@@ -12967,7 +13504,7 @@
               <a:t>float</a:t>
             </a:r>
             <a:r>
-              <a:rPr lang="en-US" altLang="ko-KR" sz="2000" b="0" i="0" u="none" strike="noStrike" dirty="0">
+              <a:rPr lang="en-US" altLang="ko-KR" sz="2000" b="1" i="0" u="none" strike="noStrike" dirty="0">
                 <a:solidFill>
                   <a:srgbClr val="383A42"/>
                 </a:solidFill>
@@ -12977,7 +13514,7 @@
               <a:t> playerMp)</a:t>
             </a:r>
             <a:br>
-              <a:rPr lang="en-US" altLang="ko-KR" sz="2000" b="0" i="0" u="none" strike="noStrike" dirty="0">
+              <a:rPr lang="en-US" altLang="ko-KR" sz="2000" b="1" i="0" u="none" strike="noStrike" dirty="0">
                 <a:solidFill>
                   <a:srgbClr val="383A42"/>
                 </a:solidFill>
@@ -12986,7 +13523,7 @@
               </a:rPr>
             </a:br>
             <a:r>
-              <a:rPr lang="en-US" altLang="ko-KR" sz="2000" b="0" i="0" u="none" strike="noStrike" dirty="0">
+              <a:rPr lang="en-US" altLang="ko-KR" sz="2000" b="1" i="0" u="none" strike="noStrike" dirty="0">
                 <a:solidFill>
                   <a:srgbClr val="383A42"/>
                 </a:solidFill>
@@ -12996,7 +13533,7 @@
               <a:t>{</a:t>
             </a:r>
             <a:br>
-              <a:rPr lang="en-US" altLang="ko-KR" sz="2000" b="0" i="0" u="none" strike="noStrike" dirty="0">
+              <a:rPr lang="en-US" altLang="ko-KR" sz="2000" b="1" i="0" u="none" strike="noStrike" dirty="0">
                 <a:solidFill>
                   <a:srgbClr val="383A42"/>
                 </a:solidFill>
@@ -13005,7 +13542,7 @@
               </a:rPr>
             </a:br>
             <a:r>
-              <a:rPr lang="en-US" altLang="ko-KR" sz="2000" b="0" i="0" u="none" strike="noStrike" dirty="0">
+              <a:rPr lang="en-US" altLang="ko-KR" sz="2000" b="1" i="0" u="none" strike="noStrike" dirty="0">
                 <a:solidFill>
                   <a:srgbClr val="383A42"/>
                 </a:solidFill>
@@ -13015,7 +13552,7 @@
               <a:t>    </a:t>
             </a:r>
             <a:r>
-              <a:rPr lang="en-US" altLang="ko-KR" sz="2000" b="0" i="0" u="none" strike="noStrike" dirty="0">
+              <a:rPr lang="en-US" altLang="ko-KR" sz="2000" b="1" i="0" u="none" strike="noStrike" dirty="0">
                 <a:solidFill>
                   <a:srgbClr val="C18401"/>
                 </a:solidFill>
@@ -13025,7 +13562,7 @@
               <a:t>printf</a:t>
             </a:r>
             <a:r>
-              <a:rPr lang="en-US" altLang="ko-KR" sz="2000" b="0" i="0" u="none" strike="noStrike" dirty="0">
+              <a:rPr lang="en-US" altLang="ko-KR" sz="2000" b="1" i="0" u="none" strike="noStrike" dirty="0">
                 <a:solidFill>
                   <a:srgbClr val="383A42"/>
                 </a:solidFill>
@@ -13035,7 +13572,7 @@
               <a:t>(</a:t>
             </a:r>
             <a:r>
-              <a:rPr lang="en-US" altLang="ko-KR" sz="2000" b="0" i="0" u="none" strike="noStrike" dirty="0">
+              <a:rPr lang="en-US" altLang="ko-KR" sz="2000" b="1" i="0" u="none" strike="noStrike" dirty="0">
                 <a:solidFill>
                   <a:srgbClr val="50A14F"/>
                 </a:solidFill>
@@ -13045,7 +13582,7 @@
               <a:t>"Player Stat  ==============\n"</a:t>
             </a:r>
             <a:r>
-              <a:rPr lang="en-US" altLang="ko-KR" sz="2000" b="0" i="0" u="none" strike="noStrike" dirty="0">
+              <a:rPr lang="en-US" altLang="ko-KR" sz="2000" b="1" i="0" u="none" strike="noStrike" dirty="0">
                 <a:solidFill>
                   <a:srgbClr val="383A42"/>
                 </a:solidFill>
@@ -13055,7 +13592,7 @@
               <a:t>);</a:t>
             </a:r>
             <a:br>
-              <a:rPr lang="en-US" altLang="ko-KR" sz="2000" b="0" i="0" u="none" strike="noStrike" dirty="0">
+              <a:rPr lang="en-US" altLang="ko-KR" sz="2000" b="1" i="0" u="none" strike="noStrike" dirty="0">
                 <a:solidFill>
                   <a:srgbClr val="383A42"/>
                 </a:solidFill>
@@ -13064,7 +13601,7 @@
               </a:rPr>
             </a:br>
             <a:r>
-              <a:rPr lang="en-US" altLang="ko-KR" sz="2000" b="0" i="0" u="none" strike="noStrike" dirty="0">
+              <a:rPr lang="en-US" altLang="ko-KR" sz="2000" b="1" i="0" u="none" strike="noStrike" dirty="0">
                 <a:solidFill>
                   <a:srgbClr val="383A42"/>
                 </a:solidFill>
@@ -13074,7 +13611,7 @@
               <a:t>    </a:t>
             </a:r>
             <a:r>
-              <a:rPr lang="en-US" altLang="ko-KR" sz="2000" b="0" i="0" u="none" strike="noStrike" dirty="0">
+              <a:rPr lang="en-US" altLang="ko-KR" sz="2000" b="1" i="0" u="none" strike="noStrike" dirty="0">
                 <a:solidFill>
                   <a:srgbClr val="C18401"/>
                 </a:solidFill>
@@ -13084,7 +13621,7 @@
               <a:t>printf</a:t>
             </a:r>
             <a:r>
-              <a:rPr lang="en-US" altLang="ko-KR" sz="2000" b="0" i="0" u="none" strike="noStrike" dirty="0">
+              <a:rPr lang="en-US" altLang="ko-KR" sz="2000" b="1" i="0" u="none" strike="noStrike" dirty="0">
                 <a:solidFill>
                   <a:srgbClr val="383A42"/>
                 </a:solidFill>
@@ -13094,7 +13631,7 @@
               <a:t>(</a:t>
             </a:r>
             <a:r>
-              <a:rPr lang="en-US" altLang="ko-KR" sz="2000" b="0" i="0" u="none" strike="noStrike" dirty="0">
+              <a:rPr lang="en-US" altLang="ko-KR" sz="2000" b="1" i="0" u="none" strike="noStrike" dirty="0">
                 <a:solidFill>
                   <a:srgbClr val="50A14F"/>
                 </a:solidFill>
@@ -13104,7 +13641,7 @@
               <a:t>"HP: %f\n"</a:t>
             </a:r>
             <a:r>
-              <a:rPr lang="en-US" altLang="ko-KR" sz="2000" b="0" i="0" u="none" strike="noStrike" dirty="0">
+              <a:rPr lang="en-US" altLang="ko-KR" sz="2000" b="1" i="0" u="none" strike="noStrike" dirty="0">
                 <a:solidFill>
                   <a:srgbClr val="383A42"/>
                 </a:solidFill>
@@ -13114,7 +13651,7 @@
               <a:t>, playerHp);</a:t>
             </a:r>
             <a:br>
-              <a:rPr lang="en-US" altLang="ko-KR" sz="2000" b="0" i="0" u="none" strike="noStrike" dirty="0">
+              <a:rPr lang="en-US" altLang="ko-KR" sz="2000" b="1" i="0" u="none" strike="noStrike" dirty="0">
                 <a:solidFill>
                   <a:srgbClr val="383A42"/>
                 </a:solidFill>
@@ -13123,7 +13660,7 @@
               </a:rPr>
             </a:br>
             <a:r>
-              <a:rPr lang="en-US" altLang="ko-KR" sz="2000" b="0" i="0" u="none" strike="noStrike" dirty="0">
+              <a:rPr lang="en-US" altLang="ko-KR" sz="2000" b="1" i="0" u="none" strike="noStrike" dirty="0">
                 <a:solidFill>
                   <a:srgbClr val="383A42"/>
                 </a:solidFill>
@@ -13133,7 +13670,7 @@
               <a:t>    </a:t>
             </a:r>
             <a:r>
-              <a:rPr lang="en-US" altLang="ko-KR" sz="2000" b="0" i="0" u="none" strike="noStrike" dirty="0">
+              <a:rPr lang="en-US" altLang="ko-KR" sz="2000" b="1" i="0" u="none" strike="noStrike" dirty="0">
                 <a:solidFill>
                   <a:srgbClr val="C18401"/>
                 </a:solidFill>
@@ -13143,7 +13680,7 @@
               <a:t>printf</a:t>
             </a:r>
             <a:r>
-              <a:rPr lang="en-US" altLang="ko-KR" sz="2000" b="0" i="0" u="none" strike="noStrike" dirty="0">
+              <a:rPr lang="en-US" altLang="ko-KR" sz="2000" b="1" i="0" u="none" strike="noStrike" dirty="0">
                 <a:solidFill>
                   <a:srgbClr val="383A42"/>
                 </a:solidFill>
@@ -13153,7 +13690,7 @@
               <a:t>(</a:t>
             </a:r>
             <a:r>
-              <a:rPr lang="en-US" altLang="ko-KR" sz="2000" b="0" i="0" u="none" strike="noStrike" dirty="0">
+              <a:rPr lang="en-US" altLang="ko-KR" sz="2000" b="1" i="0" u="none" strike="noStrike" dirty="0">
                 <a:solidFill>
                   <a:srgbClr val="50A14F"/>
                 </a:solidFill>
@@ -13163,7 +13700,7 @@
               <a:t>"MP: %f\n"</a:t>
             </a:r>
             <a:r>
-              <a:rPr lang="en-US" altLang="ko-KR" sz="2000" b="0" i="0" u="none" strike="noStrike" dirty="0">
+              <a:rPr lang="en-US" altLang="ko-KR" sz="2000" b="1" i="0" u="none" strike="noStrike" dirty="0">
                 <a:solidFill>
                   <a:srgbClr val="383A42"/>
                 </a:solidFill>
@@ -13173,7 +13710,7 @@
               <a:t>, playerMp);</a:t>
             </a:r>
             <a:br>
-              <a:rPr lang="en-US" altLang="ko-KR" sz="2000" b="0" i="0" u="none" strike="noStrike" dirty="0">
+              <a:rPr lang="en-US" altLang="ko-KR" sz="2000" b="1" i="0" u="none" strike="noStrike" dirty="0">
                 <a:solidFill>
                   <a:srgbClr val="383A42"/>
                 </a:solidFill>
@@ -13182,7 +13719,7 @@
               </a:rPr>
             </a:br>
             <a:r>
-              <a:rPr lang="en-US" altLang="ko-KR" sz="2000" b="0" i="0" u="none" strike="noStrike" dirty="0">
+              <a:rPr lang="en-US" altLang="ko-KR" sz="2000" b="1" i="0" u="none" strike="noStrike" dirty="0">
                 <a:solidFill>
                   <a:srgbClr val="383A42"/>
                 </a:solidFill>
@@ -13191,7 +13728,7 @@
               </a:rPr>
               <a:t>}</a:t>
             </a:r>
-            <a:endParaRPr lang="ko-KR" altLang="en-US" sz="2000" dirty="0"/>
+            <a:endParaRPr lang="ko-KR" altLang="en-US" sz="2000" b="1" dirty="0"/>
           </a:p>
         </p:txBody>
       </p:sp>
@@ -13232,7 +13769,7 @@
           <a:lstStyle/>
           <a:p>
             <a:r>
-              <a:rPr lang="en-US" altLang="ko-KR" sz="2000" b="0" i="1" u="none" strike="noStrike" dirty="0">
+              <a:rPr lang="en-US" altLang="ko-KR" sz="2000" b="1" i="1" u="none" strike="noStrike" dirty="0">
                 <a:solidFill>
                   <a:srgbClr val="A0A1A7"/>
                 </a:solidFill>
@@ -13242,7 +13779,7 @@
               <a:t>// ShowCharacterStat </a:t>
             </a:r>
             <a:r>
-              <a:rPr lang="ko-KR" altLang="en-US" sz="2000" b="0" i="1" u="none" strike="noStrike" dirty="0">
+              <a:rPr lang="ko-KR" altLang="en-US" sz="2000" b="1" i="1" u="none" strike="noStrike" dirty="0">
                 <a:solidFill>
                   <a:srgbClr val="A0A1A7"/>
                 </a:solidFill>
@@ -13252,7 +13789,7 @@
               <a:t>함수 선언</a:t>
             </a:r>
             <a:br>
-              <a:rPr lang="ko-KR" altLang="en-US" sz="2000" b="0" i="0" u="none" strike="noStrike" dirty="0">
+              <a:rPr lang="ko-KR" altLang="en-US" sz="2000" b="1" i="0" u="none" strike="noStrike" dirty="0">
                 <a:solidFill>
                   <a:srgbClr val="383A42"/>
                 </a:solidFill>
@@ -13261,7 +13798,7 @@
               </a:rPr>
             </a:br>
             <a:r>
-              <a:rPr lang="en-US" altLang="ko-KR" sz="2000" b="0" i="0" u="none" strike="noStrike" dirty="0">
+              <a:rPr lang="en-US" altLang="ko-KR" sz="2000" b="1" i="0" u="none" strike="noStrike" dirty="0">
                 <a:solidFill>
                   <a:srgbClr val="A626A4"/>
                 </a:solidFill>
@@ -13271,7 +13808,7 @@
               <a:t>void</a:t>
             </a:r>
             <a:r>
-              <a:rPr lang="en-US" altLang="ko-KR" sz="2000" b="0" i="0" u="none" strike="noStrike" dirty="0">
+              <a:rPr lang="en-US" altLang="ko-KR" sz="2000" b="1" i="0" u="none" strike="noStrike" dirty="0">
                 <a:solidFill>
                   <a:srgbClr val="383A42"/>
                 </a:solidFill>
@@ -13281,7 +13818,7 @@
               <a:t> </a:t>
             </a:r>
             <a:r>
-              <a:rPr lang="en-US" altLang="ko-KR" sz="2000" b="0" i="0" u="none" strike="noStrike" dirty="0">
+              <a:rPr lang="en-US" altLang="ko-KR" sz="2000" b="1" i="0" u="none" strike="noStrike" dirty="0">
                 <a:solidFill>
                   <a:srgbClr val="4078F2"/>
                 </a:solidFill>
@@ -13291,7 +13828,7 @@
               <a:t>ShowCharacterStat</a:t>
             </a:r>
             <a:r>
-              <a:rPr lang="en-US" altLang="ko-KR" sz="2000" b="0" i="0" u="none" strike="noStrike" dirty="0">
+              <a:rPr lang="en-US" altLang="ko-KR" sz="2000" b="1" i="0" u="none" strike="noStrike" dirty="0">
                 <a:solidFill>
                   <a:srgbClr val="383A42"/>
                 </a:solidFill>
@@ -13301,7 +13838,7 @@
               <a:t>(</a:t>
             </a:r>
             <a:r>
-              <a:rPr lang="en-US" altLang="ko-KR" sz="2000" b="0" i="0" u="none" strike="noStrike" dirty="0">
+              <a:rPr lang="en-US" altLang="ko-KR" sz="2000" b="1" i="0" u="none" strike="noStrike" dirty="0">
                 <a:solidFill>
                   <a:srgbClr val="A626A4"/>
                 </a:solidFill>
@@ -13311,7 +13848,7 @@
               <a:t>float</a:t>
             </a:r>
             <a:r>
-              <a:rPr lang="en-US" altLang="ko-KR" sz="2000" b="0" i="0" u="none" strike="noStrike" dirty="0">
+              <a:rPr lang="en-US" altLang="ko-KR" sz="2000" b="1" i="0" u="none" strike="noStrike" dirty="0">
                 <a:solidFill>
                   <a:srgbClr val="383A42"/>
                 </a:solidFill>
@@ -13321,7 +13858,7 @@
               <a:t> playerHp, </a:t>
             </a:r>
             <a:r>
-              <a:rPr lang="en-US" altLang="ko-KR" sz="2000" b="0" i="0" u="none" strike="noStrike" dirty="0">
+              <a:rPr lang="en-US" altLang="ko-KR" sz="2000" b="1" i="0" u="none" strike="noStrike" dirty="0">
                 <a:solidFill>
                   <a:srgbClr val="A626A4"/>
                 </a:solidFill>
@@ -13331,7 +13868,7 @@
               <a:t>float</a:t>
             </a:r>
             <a:r>
-              <a:rPr lang="en-US" altLang="ko-KR" sz="2000" b="0" i="0" u="none" strike="noStrike" dirty="0">
+              <a:rPr lang="en-US" altLang="ko-KR" sz="2000" b="1" i="0" u="none" strike="noStrike" dirty="0">
                 <a:solidFill>
                   <a:srgbClr val="383A42"/>
                 </a:solidFill>
@@ -13340,7 +13877,7 @@
               </a:rPr>
               <a:t> playerMp);</a:t>
             </a:r>
-            <a:endParaRPr lang="ko-KR" altLang="en-US" sz="2000" dirty="0"/>
+            <a:endParaRPr lang="ko-KR" altLang="en-US" sz="2000" b="1" dirty="0"/>
           </a:p>
         </p:txBody>
       </p:sp>
@@ -13396,15 +13933,15 @@
           <a:lstStyle/>
           <a:p>
             <a:r>
-              <a:rPr lang="en-US" altLang="ko-KR" b="0" dirty="0"/>
+              <a:rPr lang="en-US" altLang="ko-KR" dirty="0"/>
               <a:t>5.2 </a:t>
             </a:r>
             <a:r>
-              <a:rPr lang="ko-KR" altLang="en-US" b="0" dirty="0"/>
+              <a:rPr lang="ko-KR" altLang="en-US" dirty="0"/>
               <a:t>함수 호출</a:t>
             </a:r>
             <a:r>
-              <a:rPr lang="en-US" altLang="ko-KR" b="0" dirty="0"/>
+              <a:rPr lang="en-US" altLang="ko-KR" dirty="0"/>
               <a:t>(Function Call)</a:t>
             </a:r>
             <a:endParaRPr lang="ko-KR" altLang="en-US" dirty="0"/>
@@ -14036,15 +14573,15 @@
           <a:lstStyle/>
           <a:p>
             <a:r>
-              <a:rPr lang="en-US" altLang="ko-KR" b="0" dirty="0"/>
+              <a:rPr lang="en-US" altLang="ko-KR" dirty="0"/>
               <a:t>5.2 </a:t>
             </a:r>
             <a:r>
-              <a:rPr lang="ko-KR" altLang="en-US" b="0" dirty="0"/>
+              <a:rPr lang="ko-KR" altLang="en-US" dirty="0"/>
               <a:t>함수 호출</a:t>
             </a:r>
             <a:r>
-              <a:rPr lang="en-US" altLang="ko-KR" b="0" dirty="0"/>
+              <a:rPr lang="en-US" altLang="ko-KR" dirty="0"/>
               <a:t>(Function Call)</a:t>
             </a:r>
             <a:endParaRPr lang="ko-KR" altLang="en-US" dirty="0"/>
@@ -14733,15 +15270,15 @@
           <a:lstStyle/>
           <a:p>
             <a:r>
-              <a:rPr lang="en-US" altLang="ko-KR" b="0" dirty="0"/>
+              <a:rPr lang="en-US" altLang="ko-KR" dirty="0"/>
               <a:t>5.2 </a:t>
             </a:r>
             <a:r>
-              <a:rPr lang="ko-KR" altLang="en-US" b="0" dirty="0"/>
+              <a:rPr lang="ko-KR" altLang="en-US" dirty="0"/>
               <a:t>함수 호출</a:t>
             </a:r>
             <a:r>
-              <a:rPr lang="en-US" altLang="ko-KR" b="0" dirty="0"/>
+              <a:rPr lang="en-US" altLang="ko-KR" dirty="0"/>
               <a:t>(Function Call)</a:t>
             </a:r>
             <a:endParaRPr lang="ko-KR" altLang="en-US" dirty="0"/>
@@ -14845,7 +15382,7 @@
           <a:lstStyle/>
           <a:p>
             <a:r>
-              <a:rPr lang="en-US" altLang="ko-KR" sz="1800" b="0" i="0" u="none" strike="noStrike" dirty="0">
+              <a:rPr lang="en-US" altLang="ko-KR" sz="1800" b="1" i="0" u="none" strike="noStrike" dirty="0">
                 <a:solidFill>
                   <a:srgbClr val="4078F2"/>
                 </a:solidFill>
@@ -14855,7 +15392,7 @@
               <a:t>#include </a:t>
             </a:r>
             <a:r>
-              <a:rPr lang="en-US" altLang="ko-KR" sz="1800" b="0" i="0" u="none" strike="noStrike" dirty="0">
+              <a:rPr lang="en-US" altLang="ko-KR" sz="1800" b="1" i="0" u="none" strike="noStrike" dirty="0">
                 <a:solidFill>
                   <a:srgbClr val="50A14F"/>
                 </a:solidFill>
@@ -14865,7 +15402,7 @@
               <a:t>&lt;stdio.h&gt;</a:t>
             </a:r>
             <a:br>
-              <a:rPr lang="en-US" altLang="ko-KR" sz="1800" b="0" i="0" u="none" strike="noStrike" dirty="0">
+              <a:rPr lang="en-US" altLang="ko-KR" sz="1800" b="1" i="0" u="none" strike="noStrike" dirty="0">
                 <a:solidFill>
                   <a:srgbClr val="383A42"/>
                 </a:solidFill>
@@ -14874,7 +15411,7 @@
               </a:rPr>
             </a:br>
             <a:r>
-              <a:rPr lang="en-US" altLang="ko-KR" sz="1800" b="0" i="0" u="none" strike="noStrike" dirty="0">
+              <a:rPr lang="en-US" altLang="ko-KR" sz="1800" b="1" i="0" u="none" strike="noStrike" dirty="0">
                 <a:solidFill>
                   <a:srgbClr val="A626A4"/>
                 </a:solidFill>
@@ -14884,7 +15421,7 @@
               <a:t>int</a:t>
             </a:r>
             <a:r>
-              <a:rPr lang="en-US" altLang="ko-KR" sz="1800" b="0" i="0" u="none" strike="noStrike" dirty="0">
+              <a:rPr lang="en-US" altLang="ko-KR" sz="1800" b="1" i="0" u="none" strike="noStrike" dirty="0">
                 <a:solidFill>
                   <a:srgbClr val="383A42"/>
                 </a:solidFill>
@@ -14894,7 +15431,7 @@
               <a:t> </a:t>
             </a:r>
             <a:r>
-              <a:rPr lang="en-US" altLang="ko-KR" sz="1800" b="0" i="0" u="none" strike="noStrike" dirty="0">
+              <a:rPr lang="en-US" altLang="ko-KR" sz="1800" b="1" i="0" u="none" strike="noStrike" dirty="0">
                 <a:solidFill>
                   <a:srgbClr val="4078F2"/>
                 </a:solidFill>
@@ -14904,7 +15441,7 @@
               <a:t>Add</a:t>
             </a:r>
             <a:r>
-              <a:rPr lang="en-US" altLang="ko-KR" sz="1800" b="0" i="0" u="none" strike="noStrike" dirty="0">
+              <a:rPr lang="en-US" altLang="ko-KR" sz="1800" b="1" i="0" u="none" strike="noStrike" dirty="0">
                 <a:solidFill>
                   <a:srgbClr val="383A42"/>
                 </a:solidFill>
@@ -14914,7 +15451,7 @@
               <a:t>(</a:t>
             </a:r>
             <a:r>
-              <a:rPr lang="en-US" altLang="ko-KR" sz="1800" b="0" i="0" u="none" strike="noStrike" dirty="0">
+              <a:rPr lang="en-US" altLang="ko-KR" sz="1800" b="1" i="0" u="none" strike="noStrike" dirty="0">
                 <a:solidFill>
                   <a:srgbClr val="A626A4"/>
                 </a:solidFill>
@@ -14924,7 +15461,7 @@
               <a:t>int</a:t>
             </a:r>
             <a:r>
-              <a:rPr lang="en-US" altLang="ko-KR" sz="1800" b="0" i="0" u="none" strike="noStrike" dirty="0">
+              <a:rPr lang="en-US" altLang="ko-KR" sz="1800" b="1" i="0" u="none" strike="noStrike" dirty="0">
                 <a:solidFill>
                   <a:srgbClr val="383A42"/>
                 </a:solidFill>
@@ -14934,7 +15471,7 @@
               <a:t> a, </a:t>
             </a:r>
             <a:r>
-              <a:rPr lang="en-US" altLang="ko-KR" sz="1800" b="0" i="0" u="none" strike="noStrike" dirty="0">
+              <a:rPr lang="en-US" altLang="ko-KR" sz="1800" b="1" i="0" u="none" strike="noStrike" dirty="0">
                 <a:solidFill>
                   <a:srgbClr val="A626A4"/>
                 </a:solidFill>
@@ -14944,7 +15481,7 @@
               <a:t>int</a:t>
             </a:r>
             <a:r>
-              <a:rPr lang="en-US" altLang="ko-KR" sz="1800" b="0" i="0" u="none" strike="noStrike" dirty="0">
+              <a:rPr lang="en-US" altLang="ko-KR" sz="1800" b="1" i="0" u="none" strike="noStrike" dirty="0">
                 <a:solidFill>
                   <a:srgbClr val="383A42"/>
                 </a:solidFill>
@@ -14954,7 +15491,7 @@
               <a:t> b); </a:t>
             </a:r>
             <a:r>
-              <a:rPr lang="en-US" altLang="ko-KR" sz="1800" i="1" dirty="0">
+              <a:rPr lang="en-US" altLang="ko-KR" sz="1800" b="1" i="1" dirty="0">
                 <a:solidFill>
                   <a:srgbClr val="A0A1A7"/>
                 </a:solidFill>
@@ -14963,7 +15500,7 @@
               <a:t>// Add </a:t>
             </a:r>
             <a:r>
-              <a:rPr lang="ko-KR" altLang="en-US" sz="1800" i="1" dirty="0">
+              <a:rPr lang="ko-KR" altLang="en-US" sz="1800" b="1" i="1" dirty="0">
                 <a:solidFill>
                   <a:srgbClr val="A0A1A7"/>
                 </a:solidFill>
@@ -14972,7 +15509,7 @@
               <a:t>함수 선언</a:t>
             </a:r>
             <a:br>
-              <a:rPr lang="en-US" altLang="ko-KR" sz="1800" b="0" i="0" u="none" strike="noStrike" dirty="0">
+              <a:rPr lang="en-US" altLang="ko-KR" sz="1800" b="1" i="0" u="none" strike="noStrike" dirty="0">
                 <a:solidFill>
                   <a:srgbClr val="383A42"/>
                 </a:solidFill>
@@ -14981,7 +15518,7 @@
               </a:rPr>
             </a:br>
             <a:r>
-              <a:rPr lang="en-US" altLang="ko-KR" sz="1800" b="0" i="0" u="none" strike="noStrike" dirty="0">
+              <a:rPr lang="en-US" altLang="ko-KR" sz="1800" b="1" i="0" u="none" strike="noStrike" dirty="0">
                 <a:solidFill>
                   <a:srgbClr val="A626A4"/>
                 </a:solidFill>
@@ -14991,7 +15528,7 @@
               <a:t>int</a:t>
             </a:r>
             <a:r>
-              <a:rPr lang="en-US" altLang="ko-KR" sz="1800" b="0" i="0" u="none" strike="noStrike" dirty="0">
+              <a:rPr lang="en-US" altLang="ko-KR" sz="1800" b="1" i="0" u="none" strike="noStrike" dirty="0">
                 <a:solidFill>
                   <a:srgbClr val="383A42"/>
                 </a:solidFill>
@@ -15001,7 +15538,7 @@
               <a:t> </a:t>
             </a:r>
             <a:r>
-              <a:rPr lang="en-US" altLang="ko-KR" sz="1800" b="0" i="0" u="none" strike="noStrike" dirty="0">
+              <a:rPr lang="en-US" altLang="ko-KR" sz="1800" b="1" i="0" u="none" strike="noStrike" dirty="0">
                 <a:solidFill>
                   <a:srgbClr val="4078F2"/>
                 </a:solidFill>
@@ -15011,7 +15548,7 @@
               <a:t>Multi</a:t>
             </a:r>
             <a:r>
-              <a:rPr lang="en-US" altLang="ko-KR" sz="1800" b="0" i="0" u="none" strike="noStrike" dirty="0">
+              <a:rPr lang="en-US" altLang="ko-KR" sz="1800" b="1" i="0" u="none" strike="noStrike" dirty="0">
                 <a:solidFill>
                   <a:srgbClr val="383A42"/>
                 </a:solidFill>
@@ -15021,7 +15558,7 @@
               <a:t>(</a:t>
             </a:r>
             <a:r>
-              <a:rPr lang="en-US" altLang="ko-KR" sz="1800" b="0" i="0" u="none" strike="noStrike" dirty="0">
+              <a:rPr lang="en-US" altLang="ko-KR" sz="1800" b="1" i="0" u="none" strike="noStrike" dirty="0">
                 <a:solidFill>
                   <a:srgbClr val="A626A4"/>
                 </a:solidFill>
@@ -15031,7 +15568,7 @@
               <a:t>int</a:t>
             </a:r>
             <a:r>
-              <a:rPr lang="en-US" altLang="ko-KR" sz="1800" b="0" i="0" u="none" strike="noStrike" dirty="0">
+              <a:rPr lang="en-US" altLang="ko-KR" sz="1800" b="1" i="0" u="none" strike="noStrike" dirty="0">
                 <a:solidFill>
                   <a:srgbClr val="383A42"/>
                 </a:solidFill>
@@ -15041,7 +15578,7 @@
               <a:t> a, </a:t>
             </a:r>
             <a:r>
-              <a:rPr lang="en-US" altLang="ko-KR" sz="1800" b="0" i="0" u="none" strike="noStrike" dirty="0">
+              <a:rPr lang="en-US" altLang="ko-KR" sz="1800" b="1" i="0" u="none" strike="noStrike" dirty="0">
                 <a:solidFill>
                   <a:srgbClr val="A626A4"/>
                 </a:solidFill>
@@ -15051,7 +15588,7 @@
               <a:t>int</a:t>
             </a:r>
             <a:r>
-              <a:rPr lang="en-US" altLang="ko-KR" sz="1800" b="0" i="0" u="none" strike="noStrike" dirty="0">
+              <a:rPr lang="en-US" altLang="ko-KR" sz="1800" b="1" i="0" u="none" strike="noStrike" dirty="0">
                 <a:solidFill>
                   <a:srgbClr val="383A42"/>
                 </a:solidFill>
@@ -15061,7 +15598,7 @@
               <a:t> b); </a:t>
             </a:r>
             <a:r>
-              <a:rPr lang="en-US" altLang="ko-KR" sz="1800" i="1" dirty="0">
+              <a:rPr lang="en-US" altLang="ko-KR" sz="1800" b="1" i="1" dirty="0">
                 <a:solidFill>
                   <a:srgbClr val="A0A1A7"/>
                 </a:solidFill>
@@ -15070,7 +15607,7 @@
               <a:t>// Multi </a:t>
             </a:r>
             <a:r>
-              <a:rPr lang="ko-KR" altLang="en-US" sz="1800" i="1" dirty="0">
+              <a:rPr lang="ko-KR" altLang="en-US" sz="1800" b="1" i="1" dirty="0">
                 <a:solidFill>
                   <a:srgbClr val="A0A1A7"/>
                 </a:solidFill>
@@ -15079,7 +15616,7 @@
               <a:t>함수 선언</a:t>
             </a:r>
             <a:br>
-              <a:rPr lang="en-US" altLang="ko-KR" sz="1800" b="0" i="0" u="none" strike="noStrike" dirty="0">
+              <a:rPr lang="en-US" altLang="ko-KR" sz="1800" b="1" i="0" u="none" strike="noStrike" dirty="0">
                 <a:solidFill>
                   <a:srgbClr val="383A42"/>
                 </a:solidFill>
@@ -15088,7 +15625,7 @@
               </a:rPr>
             </a:br>
             <a:br>
-              <a:rPr lang="en-US" altLang="ko-KR" sz="1800" b="0" i="0" u="none" strike="noStrike" dirty="0">
+              <a:rPr lang="en-US" altLang="ko-KR" sz="1800" b="1" i="0" u="none" strike="noStrike" dirty="0">
                 <a:solidFill>
                   <a:srgbClr val="383A42"/>
                 </a:solidFill>
@@ -15097,7 +15634,7 @@
               </a:rPr>
             </a:br>
             <a:r>
-              <a:rPr lang="en-US" altLang="ko-KR" sz="1800" b="0" i="0" u="none" strike="noStrike" dirty="0">
+              <a:rPr lang="en-US" altLang="ko-KR" sz="1800" b="1" i="0" u="none" strike="noStrike" dirty="0">
                 <a:solidFill>
                   <a:srgbClr val="A626A4"/>
                 </a:solidFill>
@@ -15107,7 +15644,7 @@
               <a:t>int</a:t>
             </a:r>
             <a:r>
-              <a:rPr lang="en-US" altLang="ko-KR" sz="1800" b="0" i="0" u="none" strike="noStrike" dirty="0">
+              <a:rPr lang="en-US" altLang="ko-KR" sz="1800" b="1" i="0" u="none" strike="noStrike" dirty="0">
                 <a:solidFill>
                   <a:srgbClr val="383A42"/>
                 </a:solidFill>
@@ -15117,7 +15654,7 @@
               <a:t> </a:t>
             </a:r>
             <a:r>
-              <a:rPr lang="en-US" altLang="ko-KR" sz="1800" b="0" i="0" u="none" strike="noStrike" dirty="0">
+              <a:rPr lang="en-US" altLang="ko-KR" sz="1800" b="1" i="0" u="none" strike="noStrike" dirty="0">
                 <a:solidFill>
                   <a:srgbClr val="4078F2"/>
                 </a:solidFill>
@@ -15127,7 +15664,7 @@
               <a:t>main</a:t>
             </a:r>
             <a:r>
-              <a:rPr lang="en-US" altLang="ko-KR" sz="1800" b="0" i="0" u="none" strike="noStrike" dirty="0">
+              <a:rPr lang="en-US" altLang="ko-KR" sz="1800" b="1" i="0" u="none" strike="noStrike" dirty="0">
                 <a:solidFill>
                   <a:srgbClr val="383A42"/>
                 </a:solidFill>
@@ -15137,7 +15674,7 @@
               <a:t>(</a:t>
             </a:r>
             <a:r>
-              <a:rPr lang="en-US" altLang="ko-KR" sz="1800" b="0" i="0" u="none" strike="noStrike" dirty="0">
+              <a:rPr lang="en-US" altLang="ko-KR" sz="1800" b="1" i="0" u="none" strike="noStrike" dirty="0">
                 <a:solidFill>
                   <a:srgbClr val="A626A4"/>
                 </a:solidFill>
@@ -15147,7 +15684,7 @@
               <a:t>void</a:t>
             </a:r>
             <a:r>
-              <a:rPr lang="en-US" altLang="ko-KR" sz="1800" b="0" i="0" u="none" strike="noStrike" dirty="0">
+              <a:rPr lang="en-US" altLang="ko-KR" sz="1800" b="1" i="0" u="none" strike="noStrike" dirty="0">
                 <a:solidFill>
                   <a:srgbClr val="383A42"/>
                 </a:solidFill>
@@ -15157,7 +15694,7 @@
               <a:t>)</a:t>
             </a:r>
             <a:br>
-              <a:rPr lang="en-US" altLang="ko-KR" sz="1800" b="0" i="0" u="none" strike="noStrike" dirty="0">
+              <a:rPr lang="en-US" altLang="ko-KR" sz="1800" b="1" i="0" u="none" strike="noStrike" dirty="0">
                 <a:solidFill>
                   <a:srgbClr val="383A42"/>
                 </a:solidFill>
@@ -15166,7 +15703,7 @@
               </a:rPr>
             </a:br>
             <a:r>
-              <a:rPr lang="en-US" altLang="ko-KR" sz="1800" b="0" i="0" u="none" strike="noStrike" dirty="0">
+              <a:rPr lang="en-US" altLang="ko-KR" sz="1800" b="1" i="0" u="none" strike="noStrike" dirty="0">
                 <a:solidFill>
                   <a:srgbClr val="383A42"/>
                 </a:solidFill>
@@ -15176,7 +15713,7 @@
               <a:t>{</a:t>
             </a:r>
             <a:br>
-              <a:rPr lang="en-US" altLang="ko-KR" sz="1800" b="0" i="0" u="none" strike="noStrike" dirty="0">
+              <a:rPr lang="en-US" altLang="ko-KR" sz="1800" b="1" i="0" u="none" strike="noStrike" dirty="0">
                 <a:solidFill>
                   <a:srgbClr val="383A42"/>
                 </a:solidFill>
@@ -15185,7 +15722,7 @@
               </a:rPr>
             </a:br>
             <a:r>
-              <a:rPr lang="en-US" altLang="ko-KR" sz="1800" b="0" i="0" u="none" strike="noStrike" dirty="0">
+              <a:rPr lang="en-US" altLang="ko-KR" sz="1800" b="1" i="0" u="none" strike="noStrike" dirty="0">
                 <a:solidFill>
                   <a:srgbClr val="383A42"/>
                 </a:solidFill>
@@ -15195,7 +15732,7 @@
               <a:t>    </a:t>
             </a:r>
             <a:r>
-              <a:rPr lang="en-US" altLang="ko-KR" sz="1800" b="0" i="0" u="none" strike="noStrike" dirty="0">
+              <a:rPr lang="en-US" altLang="ko-KR" sz="1800" b="1" i="0" u="none" strike="noStrike" dirty="0">
                 <a:solidFill>
                   <a:srgbClr val="A626A4"/>
                 </a:solidFill>
@@ -15205,7 +15742,7 @@
               <a:t>int</a:t>
             </a:r>
             <a:r>
-              <a:rPr lang="en-US" altLang="ko-KR" sz="1800" b="0" i="0" u="none" strike="noStrike" dirty="0">
+              <a:rPr lang="en-US" altLang="ko-KR" sz="1800" b="1" i="0" u="none" strike="noStrike" dirty="0">
                 <a:solidFill>
                   <a:srgbClr val="383A42"/>
                 </a:solidFill>
@@ -15215,7 +15752,7 @@
               <a:t> x = </a:t>
             </a:r>
             <a:r>
-              <a:rPr lang="en-US" altLang="ko-KR" sz="1800" b="0" i="0" u="none" strike="noStrike" dirty="0">
+              <a:rPr lang="en-US" altLang="ko-KR" sz="1800" b="1" i="0" u="none" strike="noStrike" dirty="0">
                 <a:solidFill>
                   <a:srgbClr val="986801"/>
                 </a:solidFill>
@@ -15225,7 +15762,7 @@
               <a:t>5000</a:t>
             </a:r>
             <a:r>
-              <a:rPr lang="en-US" altLang="ko-KR" sz="1800" b="0" i="0" u="none" strike="noStrike" dirty="0">
+              <a:rPr lang="en-US" altLang="ko-KR" sz="1800" b="1" i="0" u="none" strike="noStrike" dirty="0">
                 <a:solidFill>
                   <a:srgbClr val="383A42"/>
                 </a:solidFill>
@@ -15235,7 +15772,7 @@
               <a:t>, y = </a:t>
             </a:r>
             <a:r>
-              <a:rPr lang="en-US" altLang="ko-KR" sz="1800" b="0" i="0" u="none" strike="noStrike" dirty="0">
+              <a:rPr lang="en-US" altLang="ko-KR" sz="1800" b="1" i="0" u="none" strike="noStrike" dirty="0">
                 <a:solidFill>
                   <a:srgbClr val="986801"/>
                 </a:solidFill>
@@ -15245,7 +15782,7 @@
               <a:t>4000</a:t>
             </a:r>
             <a:r>
-              <a:rPr lang="en-US" altLang="ko-KR" sz="1800" b="0" i="0" u="none" strike="noStrike" dirty="0">
+              <a:rPr lang="en-US" altLang="ko-KR" sz="1800" b="1" i="0" u="none" strike="noStrike" dirty="0">
                 <a:solidFill>
                   <a:srgbClr val="383A42"/>
                 </a:solidFill>
@@ -15255,7 +15792,7 @@
               <a:t>;</a:t>
             </a:r>
             <a:br>
-              <a:rPr lang="en-US" altLang="ko-KR" sz="1800" b="0" i="0" u="none" strike="noStrike" dirty="0">
+              <a:rPr lang="en-US" altLang="ko-KR" sz="1800" b="1" i="0" u="none" strike="noStrike" dirty="0">
                 <a:solidFill>
                   <a:srgbClr val="383A42"/>
                 </a:solidFill>
@@ -15264,7 +15801,7 @@
               </a:rPr>
             </a:br>
             <a:r>
-              <a:rPr lang="en-US" altLang="ko-KR" sz="1800" b="0" i="0" u="none" strike="noStrike" dirty="0">
+              <a:rPr lang="en-US" altLang="ko-KR" sz="1800" b="1" i="0" u="none" strike="noStrike" dirty="0">
                 <a:solidFill>
                   <a:srgbClr val="383A42"/>
                 </a:solidFill>
@@ -15274,7 +15811,7 @@
               <a:t>    </a:t>
             </a:r>
             <a:r>
-              <a:rPr lang="en-US" altLang="ko-KR" sz="1800" b="0" i="1" u="none" strike="noStrike" dirty="0">
+              <a:rPr lang="en-US" altLang="ko-KR" sz="1800" b="1" i="1" u="none" strike="noStrike" dirty="0">
                 <a:solidFill>
                   <a:srgbClr val="A0A1A7"/>
                 </a:solidFill>
@@ -15284,7 +15821,7 @@
               <a:t>// Add </a:t>
             </a:r>
             <a:r>
-              <a:rPr lang="ko-KR" altLang="en-US" sz="1800" b="0" i="1" u="none" strike="noStrike" dirty="0">
+              <a:rPr lang="ko-KR" altLang="en-US" sz="1800" b="1" i="1" u="none" strike="noStrike" dirty="0">
                 <a:solidFill>
                   <a:srgbClr val="A0A1A7"/>
                 </a:solidFill>
@@ -15294,7 +15831,7 @@
               <a:t>함수 호출</a:t>
             </a:r>
             <a:br>
-              <a:rPr lang="ko-KR" altLang="en-US" sz="1800" b="0" i="0" u="none" strike="noStrike" dirty="0">
+              <a:rPr lang="ko-KR" altLang="en-US" sz="1800" b="1" i="0" u="none" strike="noStrike" dirty="0">
                 <a:solidFill>
                   <a:srgbClr val="383A42"/>
                 </a:solidFill>
@@ -15303,7 +15840,7 @@
               </a:rPr>
             </a:br>
             <a:r>
-              <a:rPr lang="ko-KR" altLang="en-US" sz="1800" b="0" i="0" u="none" strike="noStrike" dirty="0">
+              <a:rPr lang="ko-KR" altLang="en-US" sz="1800" b="1" i="0" u="none" strike="noStrike" dirty="0">
                 <a:solidFill>
                   <a:srgbClr val="383A42"/>
                 </a:solidFill>
@@ -15313,7 +15850,7 @@
               <a:t>    </a:t>
             </a:r>
             <a:r>
-              <a:rPr lang="en-US" altLang="ko-KR" sz="1800" b="0" i="0" u="none" strike="noStrike" dirty="0">
+              <a:rPr lang="en-US" altLang="ko-KR" sz="1800" b="1" i="0" u="none" strike="noStrike" dirty="0">
                 <a:solidFill>
                   <a:srgbClr val="A626A4"/>
                 </a:solidFill>
@@ -15323,7 +15860,7 @@
               <a:t>int</a:t>
             </a:r>
             <a:r>
-              <a:rPr lang="en-US" altLang="ko-KR" sz="1800" b="0" i="0" u="none" strike="noStrike" dirty="0">
+              <a:rPr lang="en-US" altLang="ko-KR" sz="1800" b="1" i="0" u="none" strike="noStrike" dirty="0">
                 <a:solidFill>
                   <a:srgbClr val="383A42"/>
                 </a:solidFill>
@@ -15333,7 +15870,7 @@
               <a:t> z = Add(x, y);</a:t>
             </a:r>
             <a:br>
-              <a:rPr lang="en-US" altLang="ko-KR" sz="1800" b="0" i="0" u="none" strike="noStrike" dirty="0">
+              <a:rPr lang="en-US" altLang="ko-KR" sz="1800" b="1" i="0" u="none" strike="noStrike" dirty="0">
                 <a:solidFill>
                   <a:srgbClr val="383A42"/>
                 </a:solidFill>
@@ -15342,7 +15879,7 @@
               </a:rPr>
             </a:br>
             <a:r>
-              <a:rPr lang="en-US" altLang="ko-KR" sz="1800" b="0" i="0" u="none" strike="noStrike" dirty="0">
+              <a:rPr lang="en-US" altLang="ko-KR" sz="1800" b="1" i="0" u="none" strike="noStrike" dirty="0">
                 <a:solidFill>
                   <a:srgbClr val="383A42"/>
                 </a:solidFill>
@@ -15352,7 +15889,7 @@
               <a:t>    </a:t>
             </a:r>
             <a:r>
-              <a:rPr lang="en-US" altLang="ko-KR" sz="1800" b="0" i="0" u="none" strike="noStrike" dirty="0">
+              <a:rPr lang="en-US" altLang="ko-KR" sz="1800" b="1" i="0" u="none" strike="noStrike" dirty="0">
                 <a:solidFill>
                   <a:srgbClr val="C18401"/>
                 </a:solidFill>
@@ -15362,7 +15899,7 @@
               <a:t>printf</a:t>
             </a:r>
             <a:r>
-              <a:rPr lang="en-US" altLang="ko-KR" sz="1800" b="0" i="0" u="none" strike="noStrike" dirty="0">
+              <a:rPr lang="en-US" altLang="ko-KR" sz="1800" b="1" i="0" u="none" strike="noStrike" dirty="0">
                 <a:solidFill>
                   <a:srgbClr val="383A42"/>
                 </a:solidFill>
@@ -15372,7 +15909,7 @@
               <a:t>(</a:t>
             </a:r>
             <a:r>
-              <a:rPr lang="en-US" altLang="ko-KR" sz="1800" b="0" i="0" u="none" strike="noStrike" dirty="0">
+              <a:rPr lang="en-US" altLang="ko-KR" sz="1800" b="1" i="0" u="none" strike="noStrike" dirty="0">
                 <a:solidFill>
                   <a:srgbClr val="50A14F"/>
                 </a:solidFill>
@@ -15382,7 +15919,7 @@
               <a:t>"Add(%d, %d) =&gt; %d\n"</a:t>
             </a:r>
             <a:r>
-              <a:rPr lang="en-US" altLang="ko-KR" sz="1800" b="0" i="0" u="none" strike="noStrike" dirty="0">
+              <a:rPr lang="en-US" altLang="ko-KR" sz="1800" b="1" i="0" u="none" strike="noStrike" dirty="0">
                 <a:solidFill>
                   <a:srgbClr val="383A42"/>
                 </a:solidFill>
@@ -15392,7 +15929,7 @@
               <a:t>, x, y, z);</a:t>
             </a:r>
             <a:br>
-              <a:rPr lang="en-US" altLang="ko-KR" sz="1800" b="0" i="0" u="none" strike="noStrike" dirty="0">
+              <a:rPr lang="en-US" altLang="ko-KR" sz="1800" b="1" i="0" u="none" strike="noStrike" dirty="0">
                 <a:solidFill>
                   <a:srgbClr val="383A42"/>
                 </a:solidFill>
@@ -15401,7 +15938,7 @@
               </a:rPr>
             </a:br>
             <a:br>
-              <a:rPr lang="en-US" altLang="ko-KR" sz="1800" b="0" i="0" u="none" strike="noStrike" dirty="0">
+              <a:rPr lang="en-US" altLang="ko-KR" sz="1800" b="1" i="0" u="none" strike="noStrike" dirty="0">
                 <a:solidFill>
                   <a:srgbClr val="383A42"/>
                 </a:solidFill>
@@ -15410,7 +15947,7 @@
               </a:rPr>
             </a:br>
             <a:r>
-              <a:rPr lang="en-US" altLang="ko-KR" sz="1800" b="0" i="0" u="none" strike="noStrike" dirty="0">
+              <a:rPr lang="en-US" altLang="ko-KR" sz="1800" b="1" i="0" u="none" strike="noStrike" dirty="0">
                 <a:solidFill>
                   <a:srgbClr val="383A42"/>
                 </a:solidFill>
@@ -15420,7 +15957,7 @@
               <a:t>    </a:t>
             </a:r>
             <a:r>
-              <a:rPr lang="en-US" altLang="ko-KR" sz="1800" b="0" i="1" u="none" strike="noStrike" dirty="0">
+              <a:rPr lang="en-US" altLang="ko-KR" sz="1800" b="1" i="1" u="none" strike="noStrike" dirty="0">
                 <a:solidFill>
                   <a:srgbClr val="A0A1A7"/>
                 </a:solidFill>
@@ -15430,7 +15967,7 @@
               <a:t>// Multi </a:t>
             </a:r>
             <a:r>
-              <a:rPr lang="ko-KR" altLang="en-US" sz="1800" b="0" i="1" u="none" strike="noStrike" dirty="0">
+              <a:rPr lang="ko-KR" altLang="en-US" sz="1800" b="1" i="1" u="none" strike="noStrike" dirty="0">
                 <a:solidFill>
                   <a:srgbClr val="A0A1A7"/>
                 </a:solidFill>
@@ -15440,7 +15977,7 @@
               <a:t>함수 호출</a:t>
             </a:r>
             <a:br>
-              <a:rPr lang="ko-KR" altLang="en-US" sz="1800" b="0" i="0" u="none" strike="noStrike" dirty="0">
+              <a:rPr lang="ko-KR" altLang="en-US" sz="1800" b="1" i="0" u="none" strike="noStrike" dirty="0">
                 <a:solidFill>
                   <a:srgbClr val="383A42"/>
                 </a:solidFill>
@@ -15449,7 +15986,7 @@
               </a:rPr>
             </a:br>
             <a:r>
-              <a:rPr lang="ko-KR" altLang="en-US" sz="1800" b="0" i="0" u="none" strike="noStrike" dirty="0">
+              <a:rPr lang="ko-KR" altLang="en-US" sz="1800" b="1" i="0" u="none" strike="noStrike" dirty="0">
                 <a:solidFill>
                   <a:srgbClr val="383A42"/>
                 </a:solidFill>
@@ -15459,7 +15996,7 @@
               <a:t>    </a:t>
             </a:r>
             <a:r>
-              <a:rPr lang="en-US" altLang="ko-KR" sz="1800" b="0" i="1" u="none" strike="noStrike" dirty="0">
+              <a:rPr lang="en-US" altLang="ko-KR" sz="1800" b="1" i="1" u="none" strike="noStrike" dirty="0">
                 <a:solidFill>
                   <a:srgbClr val="A0A1A7"/>
                 </a:solidFill>
@@ -15469,7 +16006,7 @@
               <a:t>// </a:t>
             </a:r>
             <a:r>
-              <a:rPr lang="ko-KR" altLang="en-US" sz="1800" b="0" i="1" u="none" strike="noStrike" dirty="0">
+              <a:rPr lang="ko-KR" altLang="en-US" sz="1800" b="1" i="1" u="none" strike="noStrike" dirty="0">
                 <a:solidFill>
                   <a:srgbClr val="A0A1A7"/>
                 </a:solidFill>
@@ -15479,7 +16016,7 @@
               <a:t>정의가 없으면 링크 단계에서 오류 발생</a:t>
             </a:r>
             <a:br>
-              <a:rPr lang="ko-KR" altLang="en-US" sz="1800" b="0" i="0" u="none" strike="noStrike" dirty="0">
+              <a:rPr lang="ko-KR" altLang="en-US" sz="1800" b="1" i="0" u="none" strike="noStrike" dirty="0">
                 <a:solidFill>
                   <a:srgbClr val="383A42"/>
                 </a:solidFill>
@@ -15488,7 +16025,7 @@
               </a:rPr>
             </a:br>
             <a:r>
-              <a:rPr lang="ko-KR" altLang="en-US" sz="1800" b="0" i="0" u="none" strike="noStrike" dirty="0">
+              <a:rPr lang="ko-KR" altLang="en-US" sz="1800" b="1" i="0" u="none" strike="noStrike" dirty="0">
                 <a:solidFill>
                   <a:srgbClr val="383A42"/>
                 </a:solidFill>
@@ -15498,7 +16035,7 @@
               <a:t>    </a:t>
             </a:r>
             <a:r>
-              <a:rPr lang="en-US" altLang="ko-KR" sz="1800" b="0" i="0" u="none" strike="noStrike" dirty="0">
+              <a:rPr lang="en-US" altLang="ko-KR" sz="1800" b="1" i="0" u="none" strike="noStrike" dirty="0">
                 <a:solidFill>
                   <a:srgbClr val="383A42"/>
                 </a:solidFill>
@@ -15508,7 +16045,7 @@
               <a:t>z = Multi(x, y);</a:t>
             </a:r>
             <a:br>
-              <a:rPr lang="en-US" altLang="ko-KR" sz="1800" b="0" i="0" u="none" strike="noStrike" dirty="0">
+              <a:rPr lang="en-US" altLang="ko-KR" sz="1800" b="1" i="0" u="none" strike="noStrike" dirty="0">
                 <a:solidFill>
                   <a:srgbClr val="383A42"/>
                 </a:solidFill>
@@ -15517,7 +16054,7 @@
               </a:rPr>
             </a:br>
             <a:r>
-              <a:rPr lang="en-US" altLang="ko-KR" sz="1800" b="0" i="0" u="none" strike="noStrike" dirty="0">
+              <a:rPr lang="en-US" altLang="ko-KR" sz="1800" b="1" i="0" u="none" strike="noStrike" dirty="0">
                 <a:solidFill>
                   <a:srgbClr val="383A42"/>
                 </a:solidFill>
@@ -15527,7 +16064,7 @@
               <a:t>    </a:t>
             </a:r>
             <a:r>
-              <a:rPr lang="en-US" altLang="ko-KR" sz="1800" b="0" i="0" u="none" strike="noStrike" dirty="0">
+              <a:rPr lang="en-US" altLang="ko-KR" sz="1800" b="1" i="0" u="none" strike="noStrike" dirty="0">
                 <a:solidFill>
                   <a:srgbClr val="C18401"/>
                 </a:solidFill>
@@ -15537,7 +16074,7 @@
               <a:t>printf</a:t>
             </a:r>
             <a:r>
-              <a:rPr lang="en-US" altLang="ko-KR" sz="1800" b="0" i="0" u="none" strike="noStrike" dirty="0">
+              <a:rPr lang="en-US" altLang="ko-KR" sz="1800" b="1" i="0" u="none" strike="noStrike" dirty="0">
                 <a:solidFill>
                   <a:srgbClr val="383A42"/>
                 </a:solidFill>
@@ -15547,7 +16084,7 @@
               <a:t>(</a:t>
             </a:r>
             <a:r>
-              <a:rPr lang="en-US" altLang="ko-KR" sz="1800" b="0" i="0" u="none" strike="noStrike" dirty="0">
+              <a:rPr lang="en-US" altLang="ko-KR" sz="1800" b="1" i="0" u="none" strike="noStrike" dirty="0">
                 <a:solidFill>
                   <a:srgbClr val="50A14F"/>
                 </a:solidFill>
@@ -15557,7 +16094,7 @@
               <a:t>"Multi(%d, %d) =&gt; %d\n"</a:t>
             </a:r>
             <a:r>
-              <a:rPr lang="en-US" altLang="ko-KR" sz="1800" b="0" i="0" u="none" strike="noStrike" dirty="0">
+              <a:rPr lang="en-US" altLang="ko-KR" sz="1800" b="1" i="0" u="none" strike="noStrike" dirty="0">
                 <a:solidFill>
                   <a:srgbClr val="383A42"/>
                 </a:solidFill>
@@ -15567,7 +16104,7 @@
               <a:t>, x, y, z);</a:t>
             </a:r>
             <a:br>
-              <a:rPr lang="en-US" altLang="ko-KR" sz="1800" b="0" i="0" u="none" strike="noStrike" dirty="0">
+              <a:rPr lang="en-US" altLang="ko-KR" sz="1800" b="1" i="0" u="none" strike="noStrike" dirty="0">
                 <a:solidFill>
                   <a:srgbClr val="383A42"/>
                 </a:solidFill>
@@ -15576,7 +16113,7 @@
               </a:rPr>
             </a:br>
             <a:br>
-              <a:rPr lang="en-US" altLang="ko-KR" sz="1800" b="0" i="0" u="none" strike="noStrike" dirty="0">
+              <a:rPr lang="en-US" altLang="ko-KR" sz="1800" b="1" i="0" u="none" strike="noStrike" dirty="0">
                 <a:solidFill>
                   <a:srgbClr val="383A42"/>
                 </a:solidFill>
@@ -15585,7 +16122,7 @@
               </a:rPr>
             </a:br>
             <a:r>
-              <a:rPr lang="en-US" altLang="ko-KR" sz="1800" b="0" i="0" u="none" strike="noStrike" dirty="0">
+              <a:rPr lang="en-US" altLang="ko-KR" sz="1800" b="1" i="0" u="none" strike="noStrike" dirty="0">
                 <a:solidFill>
                   <a:srgbClr val="383A42"/>
                 </a:solidFill>
@@ -15595,7 +16132,7 @@
               <a:t>    </a:t>
             </a:r>
             <a:r>
-              <a:rPr lang="en-US" altLang="ko-KR" sz="1800" b="0" i="0" u="none" strike="noStrike" dirty="0">
+              <a:rPr lang="en-US" altLang="ko-KR" sz="1800" b="1" i="0" u="none" strike="noStrike" dirty="0">
                 <a:solidFill>
                   <a:srgbClr val="A626A4"/>
                 </a:solidFill>
@@ -15605,7 +16142,7 @@
               <a:t>return</a:t>
             </a:r>
             <a:r>
-              <a:rPr lang="en-US" altLang="ko-KR" sz="1800" b="0" i="0" u="none" strike="noStrike" dirty="0">
+              <a:rPr lang="en-US" altLang="ko-KR" sz="1800" b="1" i="0" u="none" strike="noStrike" dirty="0">
                 <a:solidFill>
                   <a:srgbClr val="383A42"/>
                 </a:solidFill>
@@ -15615,7 +16152,7 @@
               <a:t> </a:t>
             </a:r>
             <a:r>
-              <a:rPr lang="en-US" altLang="ko-KR" sz="1800" b="0" i="0" u="none" strike="noStrike" dirty="0">
+              <a:rPr lang="en-US" altLang="ko-KR" sz="1800" b="1" i="0" u="none" strike="noStrike" dirty="0">
                 <a:solidFill>
                   <a:srgbClr val="986801"/>
                 </a:solidFill>
@@ -15625,7 +16162,7 @@
               <a:t>0</a:t>
             </a:r>
             <a:r>
-              <a:rPr lang="en-US" altLang="ko-KR" sz="1800" b="0" i="0" u="none" strike="noStrike" dirty="0">
+              <a:rPr lang="en-US" altLang="ko-KR" sz="1800" b="1" i="0" u="none" strike="noStrike" dirty="0">
                 <a:solidFill>
                   <a:srgbClr val="383A42"/>
                 </a:solidFill>
@@ -15635,7 +16172,7 @@
               <a:t>;</a:t>
             </a:r>
             <a:br>
-              <a:rPr lang="en-US" altLang="ko-KR" sz="1800" b="0" i="0" u="none" strike="noStrike" dirty="0">
+              <a:rPr lang="en-US" altLang="ko-KR" sz="1800" b="1" i="0" u="none" strike="noStrike" dirty="0">
                 <a:solidFill>
                   <a:srgbClr val="383A42"/>
                 </a:solidFill>
@@ -15644,7 +16181,7 @@
               </a:rPr>
             </a:br>
             <a:r>
-              <a:rPr lang="en-US" altLang="ko-KR" sz="1800" b="0" i="0" u="none" strike="noStrike" dirty="0">
+              <a:rPr lang="en-US" altLang="ko-KR" sz="1800" b="1" i="0" u="none" strike="noStrike" dirty="0">
                 <a:solidFill>
                   <a:srgbClr val="383A42"/>
                 </a:solidFill>
@@ -15653,7 +16190,7 @@
               </a:rPr>
               <a:t>}</a:t>
             </a:r>
-            <a:endParaRPr lang="ko-KR" altLang="en-US" sz="1800" dirty="0"/>
+            <a:endParaRPr lang="ko-KR" altLang="en-US" sz="1800" b="1" dirty="0"/>
           </a:p>
         </p:txBody>
       </p:sp>
@@ -15711,15 +16248,15 @@
         <a:srgbClr val="B2B2B2"/>
       </a:folHlink>
     </a:clrScheme>
-    <a:fontScheme name="기본 디자인">
+    <a:fontScheme name="바른고딕">
       <a:majorFont>
-        <a:latin typeface="가을체"/>
-        <a:ea typeface="가을체"/>
+        <a:latin typeface="나눔바른고딕"/>
+        <a:ea typeface="나눔바른고딕"/>
         <a:cs typeface=""/>
       </a:majorFont>
       <a:minorFont>
-        <a:latin typeface="가을체"/>
-        <a:ea typeface="가을체"/>
+        <a:latin typeface="나눔바른고딕"/>
+        <a:ea typeface="나눔바른고딕"/>
         <a:cs typeface=""/>
       </a:minorFont>
     </a:fontScheme>
